--- a/260418_add/ppt/Fig6_target_engagement_native_editable.pptx
+++ b/260418_add/ppt/Fig6_target_engagement_native_editable.pptx
@@ -3788,9 +3788,9 @@
           <a:prstGeom prst="line">
             <a:avLst/>
           </a:prstGeom>
-          <a:ln w="13970">
-            <a:solidFill>
-              <a:srgbClr val="C53E1F"/>
+          <a:ln w="10160">
+            <a:solidFill>
+              <a:srgbClr val="E8B5A9"/>
             </a:solidFill>
           </a:ln>
           <a:effectLst/>
@@ -3824,9 +3824,9 @@
           <a:prstGeom prst="line">
             <a:avLst/>
           </a:prstGeom>
-          <a:ln w="13970">
-            <a:solidFill>
-              <a:srgbClr val="C53E1F"/>
+          <a:ln w="10160">
+            <a:solidFill>
+              <a:srgbClr val="E8B5A9"/>
             </a:solidFill>
           </a:ln>
           <a:effectLst/>
@@ -3860,9 +3860,9 @@
           <a:prstGeom prst="line">
             <a:avLst/>
           </a:prstGeom>
-          <a:ln w="13970">
-            <a:solidFill>
-              <a:srgbClr val="C53E1F"/>
+          <a:ln w="10160">
+            <a:solidFill>
+              <a:srgbClr val="E8B5A9"/>
             </a:solidFill>
           </a:ln>
           <a:effectLst/>
@@ -3896,9 +3896,9 @@
           <a:prstGeom prst="line">
             <a:avLst/>
           </a:prstGeom>
-          <a:ln w="13970">
-            <a:solidFill>
-              <a:srgbClr val="C53E1F"/>
+          <a:ln w="10160">
+            <a:solidFill>
+              <a:srgbClr val="E8B5A9"/>
             </a:solidFill>
           </a:ln>
           <a:effectLst/>
@@ -3932,9 +3932,9 @@
           <a:prstGeom prst="line">
             <a:avLst/>
           </a:prstGeom>
-          <a:ln w="13970">
-            <a:solidFill>
-              <a:srgbClr val="C53E1F"/>
+          <a:ln w="10160">
+            <a:solidFill>
+              <a:srgbClr val="E8B5A9"/>
             </a:solidFill>
           </a:ln>
           <a:effectLst/>
@@ -3968,9 +3968,9 @@
           <a:prstGeom prst="line">
             <a:avLst/>
           </a:prstGeom>
-          <a:ln w="13970">
-            <a:solidFill>
-              <a:srgbClr val="C53E1F"/>
+          <a:ln w="10160">
+            <a:solidFill>
+              <a:srgbClr val="E8B5A9"/>
             </a:solidFill>
           </a:ln>
           <a:effectLst/>
@@ -4004,9 +4004,9 @@
           <a:prstGeom prst="line">
             <a:avLst/>
           </a:prstGeom>
-          <a:ln w="13970">
-            <a:solidFill>
-              <a:srgbClr val="0A7D6E"/>
+          <a:ln w="10160">
+            <a:solidFill>
+              <a:srgbClr val="A1CDC7"/>
             </a:solidFill>
           </a:ln>
           <a:effectLst/>
@@ -4040,9 +4040,9 @@
           <a:prstGeom prst="line">
             <a:avLst/>
           </a:prstGeom>
-          <a:ln w="13970">
-            <a:solidFill>
-              <a:srgbClr val="0A7D6E"/>
+          <a:ln w="10160">
+            <a:solidFill>
+              <a:srgbClr val="A1CDC7"/>
             </a:solidFill>
           </a:ln>
           <a:effectLst/>
@@ -4076,9 +4076,9 @@
           <a:prstGeom prst="line">
             <a:avLst/>
           </a:prstGeom>
-          <a:ln w="13970">
-            <a:solidFill>
-              <a:srgbClr val="0A7D6E"/>
+          <a:ln w="10160">
+            <a:solidFill>
+              <a:srgbClr val="A1CDC7"/>
             </a:solidFill>
           </a:ln>
           <a:effectLst/>
@@ -4112,9 +4112,9 @@
           <a:prstGeom prst="line">
             <a:avLst/>
           </a:prstGeom>
-          <a:ln w="13970">
-            <a:solidFill>
-              <a:srgbClr val="0A7D6E"/>
+          <a:ln w="10160">
+            <a:solidFill>
+              <a:srgbClr val="A1CDC7"/>
             </a:solidFill>
           </a:ln>
           <a:effectLst/>
@@ -4148,9 +4148,9 @@
           <a:prstGeom prst="line">
             <a:avLst/>
           </a:prstGeom>
-          <a:ln w="13970">
-            <a:solidFill>
-              <a:srgbClr val="0A7D6E"/>
+          <a:ln w="10160">
+            <a:solidFill>
+              <a:srgbClr val="A1CDC7"/>
             </a:solidFill>
           </a:ln>
           <a:effectLst/>
@@ -4184,7 +4184,46 @@
           <a:prstGeom prst="line">
             <a:avLst/>
           </a:prstGeom>
-          <a:ln w="13970">
+          <a:ln w="10160">
+            <a:solidFill>
+              <a:srgbClr val="A1CDC7"/>
+            </a:solidFill>
+          </a:ln>
+          <a:effectLst/>
+        </p:spPr>
+        <p:style>
+          <a:lnRef idx="2">
+            <a:schemeClr val="accent1"/>
+          </a:lnRef>
+          <a:fillRef idx="0">
+            <a:schemeClr val="accent1"/>
+          </a:fillRef>
+          <a:effectRef idx="1">
+            <a:schemeClr val="accent1"/>
+          </a:effectRef>
+          <a:fontRef idx="minor">
+            <a:schemeClr val="tx1"/>
+          </a:fontRef>
+        </p:style>
+      </p:cxnSp>
+      <p:sp>
+        <p:nvSpPr>
+          <p:cNvPr id="33" name="Rectangle 32"/>
+          <p:cNvSpPr/>
+          <p:nvPr/>
+        </p:nvSpPr>
+        <p:spPr>
+          <a:xfrm>
+            <a:off x="932688" y="845991"/>
+            <a:ext cx="91440" cy="33536"/>
+          </a:xfrm>
+          <a:prstGeom prst="rect">
+            <a:avLst/>
+          </a:prstGeom>
+          <a:solidFill>
+            <a:srgbClr val="A1CDC7"/>
+          </a:solidFill>
+          <a:ln w="7620">
             <a:solidFill>
               <a:srgbClr val="0A7D6E"/>
             </a:solidFill>
@@ -4192,30 +4231,175 @@
           <a:effectLst/>
         </p:spPr>
         <p:style>
-          <a:lnRef idx="2">
-            <a:schemeClr val="accent1"/>
-          </a:lnRef>
-          <a:fillRef idx="0">
-            <a:schemeClr val="accent1"/>
-          </a:fillRef>
-          <a:effectRef idx="1">
-            <a:schemeClr val="accent1"/>
-          </a:effectRef>
-          <a:fontRef idx="minor">
-            <a:schemeClr val="tx1"/>
-          </a:fontRef>
-        </p:style>
-      </p:cxnSp>
-      <p:sp>
-        <p:nvSpPr>
-          <p:cNvPr id="33" name="Oval 32"/>
+          <a:lnRef idx="1">
+            <a:schemeClr val="accent1"/>
+          </a:lnRef>
+          <a:fillRef idx="3">
+            <a:schemeClr val="accent1"/>
+          </a:fillRef>
+          <a:effectRef idx="2">
+            <a:schemeClr val="accent1"/>
+          </a:effectRef>
+          <a:fontRef idx="minor">
+            <a:schemeClr val="lt1"/>
+          </a:fontRef>
+        </p:style>
+        <p:txBody>
+          <a:bodyPr rtlCol="0" anchor="ctr"/>
+          <a:lstStyle/>
+          <a:p>
+            <a:pPr algn="ctr"/>
+          </a:p>
+        </p:txBody>
+      </p:sp>
+      <p:sp>
+        <p:nvSpPr>
+          <p:cNvPr id="34" name="Rectangle 33"/>
           <p:cNvSpPr/>
           <p:nvPr/>
         </p:nvSpPr>
         <p:spPr>
           <a:xfrm>
-            <a:off x="1044848" y="949002"/>
-            <a:ext cx="50000" cy="50000"/>
+            <a:off x="2788920" y="970850"/>
+            <a:ext cx="91440" cy="227251"/>
+          </a:xfrm>
+          <a:prstGeom prst="rect">
+            <a:avLst/>
+          </a:prstGeom>
+          <a:solidFill>
+            <a:srgbClr val="A1CDC7"/>
+          </a:solidFill>
+          <a:ln w="7620">
+            <a:solidFill>
+              <a:srgbClr val="0A7D6E"/>
+            </a:solidFill>
+          </a:ln>
+          <a:effectLst/>
+        </p:spPr>
+        <p:style>
+          <a:lnRef idx="1">
+            <a:schemeClr val="accent1"/>
+          </a:lnRef>
+          <a:fillRef idx="3">
+            <a:schemeClr val="accent1"/>
+          </a:fillRef>
+          <a:effectRef idx="2">
+            <a:schemeClr val="accent1"/>
+          </a:effectRef>
+          <a:fontRef idx="minor">
+            <a:schemeClr val="lt1"/>
+          </a:fontRef>
+        </p:style>
+        <p:txBody>
+          <a:bodyPr rtlCol="0" anchor="ctr"/>
+          <a:lstStyle/>
+          <a:p>
+            <a:pPr algn="ctr"/>
+          </a:p>
+        </p:txBody>
+      </p:sp>
+      <p:sp>
+        <p:nvSpPr>
+          <p:cNvPr id="35" name="Rectangle 34"/>
+          <p:cNvSpPr/>
+          <p:nvPr/>
+        </p:nvSpPr>
+        <p:spPr>
+          <a:xfrm>
+            <a:off x="1115568" y="913835"/>
+            <a:ext cx="91440" cy="92125"/>
+          </a:xfrm>
+          <a:prstGeom prst="rect">
+            <a:avLst/>
+          </a:prstGeom>
+          <a:solidFill>
+            <a:srgbClr val="E8B5A9"/>
+          </a:solidFill>
+          <a:ln w="7620">
+            <a:solidFill>
+              <a:srgbClr val="C53E1F"/>
+            </a:solidFill>
+          </a:ln>
+          <a:effectLst/>
+        </p:spPr>
+        <p:style>
+          <a:lnRef idx="1">
+            <a:schemeClr val="accent1"/>
+          </a:lnRef>
+          <a:fillRef idx="3">
+            <a:schemeClr val="accent1"/>
+          </a:fillRef>
+          <a:effectRef idx="2">
+            <a:schemeClr val="accent1"/>
+          </a:effectRef>
+          <a:fontRef idx="minor">
+            <a:schemeClr val="lt1"/>
+          </a:fontRef>
+        </p:style>
+        <p:txBody>
+          <a:bodyPr rtlCol="0" anchor="ctr"/>
+          <a:lstStyle/>
+          <a:p>
+            <a:pPr algn="ctr"/>
+          </a:p>
+        </p:txBody>
+      </p:sp>
+      <p:sp>
+        <p:nvSpPr>
+          <p:cNvPr id="36" name="Rectangle 35"/>
+          <p:cNvSpPr/>
+          <p:nvPr/>
+        </p:nvSpPr>
+        <p:spPr>
+          <a:xfrm>
+            <a:off x="2971800" y="1143056"/>
+            <a:ext cx="91440" cy="66113"/>
+          </a:xfrm>
+          <a:prstGeom prst="rect">
+            <a:avLst/>
+          </a:prstGeom>
+          <a:solidFill>
+            <a:srgbClr val="E8B5A9"/>
+          </a:solidFill>
+          <a:ln w="7620">
+            <a:solidFill>
+              <a:srgbClr val="C53E1F"/>
+            </a:solidFill>
+          </a:ln>
+          <a:effectLst/>
+        </p:spPr>
+        <p:style>
+          <a:lnRef idx="1">
+            <a:schemeClr val="accent1"/>
+          </a:lnRef>
+          <a:fillRef idx="3">
+            <a:schemeClr val="accent1"/>
+          </a:fillRef>
+          <a:effectRef idx="2">
+            <a:schemeClr val="accent1"/>
+          </a:effectRef>
+          <a:fontRef idx="minor">
+            <a:schemeClr val="lt1"/>
+          </a:fontRef>
+        </p:style>
+        <p:txBody>
+          <a:bodyPr rtlCol="0" anchor="ctr"/>
+          <a:lstStyle/>
+          <a:p>
+            <a:pPr algn="ctr"/>
+          </a:p>
+        </p:txBody>
+      </p:sp>
+      <p:sp>
+        <p:nvSpPr>
+          <p:cNvPr id="37" name="Oval 36"/>
+          <p:cNvSpPr/>
+          <p:nvPr/>
+        </p:nvSpPr>
+        <p:spPr>
+          <a:xfrm>
+            <a:off x="1047848" y="952002"/>
+            <a:ext cx="44000" cy="44000"/>
           </a:xfrm>
           <a:prstGeom prst="ellipse">
             <a:avLst/>
@@ -4223,7 +4407,7 @@
           <a:solidFill>
             <a:srgbClr val="FFFFFF"/>
           </a:solidFill>
-          <a:ln w="12700">
+          <a:ln w="11430">
             <a:solidFill>
               <a:srgbClr val="C53E1F"/>
             </a:solidFill>
@@ -4254,14 +4438,14 @@
       </p:sp>
       <p:sp>
         <p:nvSpPr>
-          <p:cNvPr id="34" name="Oval 33"/>
+          <p:cNvPr id="38" name="Oval 37"/>
           <p:cNvSpPr/>
           <p:nvPr/>
         </p:nvSpPr>
         <p:spPr>
           <a:xfrm>
-            <a:off x="2901080" y="1157033"/>
-            <a:ext cx="50000" cy="50000"/>
+            <a:off x="2904080" y="1160033"/>
+            <a:ext cx="44000" cy="44000"/>
           </a:xfrm>
           <a:prstGeom prst="ellipse">
             <a:avLst/>
@@ -4269,7 +4453,7 @@
           <a:solidFill>
             <a:srgbClr val="FFFFFF"/>
           </a:solidFill>
-          <a:ln w="12700">
+          <a:ln w="11430">
             <a:solidFill>
               <a:srgbClr val="C53E1F"/>
             </a:solidFill>
@@ -4300,14 +4484,14 @@
       </p:sp>
       <p:sp>
         <p:nvSpPr>
-          <p:cNvPr id="35" name="Oval 34"/>
+          <p:cNvPr id="39" name="Oval 38"/>
           <p:cNvSpPr/>
           <p:nvPr/>
         </p:nvSpPr>
         <p:spPr>
           <a:xfrm>
-            <a:off x="1044848" y="866308"/>
-            <a:ext cx="50000" cy="50000"/>
+            <a:off x="1047848" y="869308"/>
+            <a:ext cx="44000" cy="44000"/>
           </a:xfrm>
           <a:prstGeom prst="ellipse">
             <a:avLst/>
@@ -4315,7 +4499,7 @@
           <a:solidFill>
             <a:srgbClr val="FFFFFF"/>
           </a:solidFill>
-          <a:ln w="12700">
+          <a:ln w="11430">
             <a:solidFill>
               <a:srgbClr val="C53E1F"/>
             </a:solidFill>
@@ -4346,14 +4530,14 @@
       </p:sp>
       <p:sp>
         <p:nvSpPr>
-          <p:cNvPr id="36" name="Oval 35"/>
+          <p:cNvPr id="40" name="Oval 39"/>
           <p:cNvSpPr/>
           <p:nvPr/>
         </p:nvSpPr>
         <p:spPr>
           <a:xfrm>
-            <a:off x="2901080" y="1001481"/>
-            <a:ext cx="50000" cy="50000"/>
+            <a:off x="2904080" y="1004481"/>
+            <a:ext cx="44000" cy="44000"/>
           </a:xfrm>
           <a:prstGeom prst="ellipse">
             <a:avLst/>
@@ -4361,7 +4545,7 @@
           <a:solidFill>
             <a:srgbClr val="FFFFFF"/>
           </a:solidFill>
-          <a:ln w="12700">
+          <a:ln w="11430">
             <a:solidFill>
               <a:srgbClr val="C53E1F"/>
             </a:solidFill>
@@ -4392,14 +4576,14 @@
       </p:sp>
       <p:sp>
         <p:nvSpPr>
-          <p:cNvPr id="37" name="Oval 36"/>
+          <p:cNvPr id="41" name="Oval 40"/>
           <p:cNvSpPr/>
           <p:nvPr/>
         </p:nvSpPr>
         <p:spPr>
           <a:xfrm>
-            <a:off x="1044848" y="991612"/>
-            <a:ext cx="50000" cy="50000"/>
+            <a:off x="1047848" y="994612"/>
+            <a:ext cx="44000" cy="44000"/>
           </a:xfrm>
           <a:prstGeom prst="ellipse">
             <a:avLst/>
@@ -4407,7 +4591,7 @@
           <a:solidFill>
             <a:srgbClr val="FFFFFF"/>
           </a:solidFill>
-          <a:ln w="12700">
+          <a:ln w="11430">
             <a:solidFill>
               <a:srgbClr val="C53E1F"/>
             </a:solidFill>
@@ -4438,14 +4622,14 @@
       </p:sp>
       <p:sp>
         <p:nvSpPr>
-          <p:cNvPr id="38" name="Oval 37"/>
+          <p:cNvPr id="42" name="Oval 41"/>
           <p:cNvSpPr/>
           <p:nvPr/>
         </p:nvSpPr>
         <p:spPr>
           <a:xfrm>
-            <a:off x="2901080" y="1158664"/>
-            <a:ext cx="50000" cy="50000"/>
+            <a:off x="2904080" y="1161664"/>
+            <a:ext cx="44000" cy="44000"/>
           </a:xfrm>
           <a:prstGeom prst="ellipse">
             <a:avLst/>
@@ -4453,7 +4637,7 @@
           <a:solidFill>
             <a:srgbClr val="FFFFFF"/>
           </a:solidFill>
-          <a:ln w="12700">
+          <a:ln w="11430">
             <a:solidFill>
               <a:srgbClr val="C53E1F"/>
             </a:solidFill>
@@ -4484,14 +4668,14 @@
       </p:sp>
       <p:sp>
         <p:nvSpPr>
-          <p:cNvPr id="39" name="Oval 38"/>
+          <p:cNvPr id="43" name="Oval 42"/>
           <p:cNvSpPr/>
           <p:nvPr/>
         </p:nvSpPr>
         <p:spPr>
           <a:xfrm>
-            <a:off x="1044848" y="880805"/>
-            <a:ext cx="50000" cy="50000"/>
+            <a:off x="1047848" y="883805"/>
+            <a:ext cx="44000" cy="44000"/>
           </a:xfrm>
           <a:prstGeom prst="ellipse">
             <a:avLst/>
@@ -4499,7 +4683,7 @@
           <a:solidFill>
             <a:srgbClr val="FFFFFF"/>
           </a:solidFill>
-          <a:ln w="12700">
+          <a:ln w="11430">
             <a:solidFill>
               <a:srgbClr val="C53E1F"/>
             </a:solidFill>
@@ -4530,14 +4714,14 @@
       </p:sp>
       <p:sp>
         <p:nvSpPr>
-          <p:cNvPr id="40" name="Oval 39"/>
+          <p:cNvPr id="44" name="Oval 43"/>
           <p:cNvSpPr/>
           <p:nvPr/>
         </p:nvSpPr>
         <p:spPr>
           <a:xfrm>
-            <a:off x="2901080" y="1276291"/>
-            <a:ext cx="50000" cy="50000"/>
+            <a:off x="2904080" y="1279291"/>
+            <a:ext cx="44000" cy="44000"/>
           </a:xfrm>
           <a:prstGeom prst="ellipse">
             <a:avLst/>
@@ -4545,7 +4729,7 @@
           <a:solidFill>
             <a:srgbClr val="FFFFFF"/>
           </a:solidFill>
-          <a:ln w="12700">
+          <a:ln w="11430">
             <a:solidFill>
               <a:srgbClr val="C53E1F"/>
             </a:solidFill>
@@ -4576,14 +4760,14 @@
       </p:sp>
       <p:sp>
         <p:nvSpPr>
-          <p:cNvPr id="41" name="Oval 40"/>
+          <p:cNvPr id="45" name="Oval 44"/>
           <p:cNvSpPr/>
           <p:nvPr/>
         </p:nvSpPr>
         <p:spPr>
           <a:xfrm>
-            <a:off x="1044848" y="912923"/>
-            <a:ext cx="50000" cy="50000"/>
+            <a:off x="1047848" y="915923"/>
+            <a:ext cx="44000" cy="44000"/>
           </a:xfrm>
           <a:prstGeom prst="ellipse">
             <a:avLst/>
@@ -4591,7 +4775,7 @@
           <a:solidFill>
             <a:srgbClr val="FFFFFF"/>
           </a:solidFill>
-          <a:ln w="12700">
+          <a:ln w="11430">
             <a:solidFill>
               <a:srgbClr val="C53E1F"/>
             </a:solidFill>
@@ -4622,14 +4806,14 @@
       </p:sp>
       <p:sp>
         <p:nvSpPr>
-          <p:cNvPr id="42" name="Oval 41"/>
+          <p:cNvPr id="46" name="Oval 45"/>
           <p:cNvSpPr/>
           <p:nvPr/>
         </p:nvSpPr>
         <p:spPr>
           <a:xfrm>
-            <a:off x="2901080" y="1192670"/>
-            <a:ext cx="50000" cy="50000"/>
+            <a:off x="2904080" y="1195670"/>
+            <a:ext cx="44000" cy="44000"/>
           </a:xfrm>
           <a:prstGeom prst="ellipse">
             <a:avLst/>
@@ -4637,7 +4821,7 @@
           <a:solidFill>
             <a:srgbClr val="FFFFFF"/>
           </a:solidFill>
-          <a:ln w="12700">
+          <a:ln w="11430">
             <a:solidFill>
               <a:srgbClr val="C53E1F"/>
             </a:solidFill>
@@ -4668,14 +4852,14 @@
       </p:sp>
       <p:sp>
         <p:nvSpPr>
-          <p:cNvPr id="43" name="Oval 42"/>
+          <p:cNvPr id="47" name="Oval 46"/>
           <p:cNvSpPr/>
           <p:nvPr/>
         </p:nvSpPr>
         <p:spPr>
           <a:xfrm>
-            <a:off x="1044848" y="1193333"/>
-            <a:ext cx="50000" cy="50000"/>
+            <a:off x="1047848" y="1196333"/>
+            <a:ext cx="44000" cy="44000"/>
           </a:xfrm>
           <a:prstGeom prst="ellipse">
             <a:avLst/>
@@ -4683,7 +4867,7 @@
           <a:solidFill>
             <a:srgbClr val="FFFFFF"/>
           </a:solidFill>
-          <a:ln w="12700">
+          <a:ln w="11430">
             <a:solidFill>
               <a:srgbClr val="C53E1F"/>
             </a:solidFill>
@@ -4714,14 +4898,14 @@
       </p:sp>
       <p:sp>
         <p:nvSpPr>
-          <p:cNvPr id="44" name="Oval 43"/>
+          <p:cNvPr id="48" name="Oval 47"/>
           <p:cNvSpPr/>
           <p:nvPr/>
         </p:nvSpPr>
         <p:spPr>
           <a:xfrm>
-            <a:off x="2901080" y="1105063"/>
-            <a:ext cx="50000" cy="50000"/>
+            <a:off x="2904080" y="1108063"/>
+            <a:ext cx="44000" cy="44000"/>
           </a:xfrm>
           <a:prstGeom prst="ellipse">
             <a:avLst/>
@@ -4729,7 +4913,7 @@
           <a:solidFill>
             <a:srgbClr val="FFFFFF"/>
           </a:solidFill>
-          <a:ln w="12700">
+          <a:ln w="11430">
             <a:solidFill>
               <a:srgbClr val="C53E1F"/>
             </a:solidFill>
@@ -4760,14 +4944,14 @@
       </p:sp>
       <p:sp>
         <p:nvSpPr>
-          <p:cNvPr id="45" name="Oval 44"/>
+          <p:cNvPr id="49" name="Oval 48"/>
           <p:cNvSpPr/>
           <p:nvPr/>
         </p:nvSpPr>
         <p:spPr>
           <a:xfrm>
-            <a:off x="1044848" y="817850"/>
-            <a:ext cx="50000" cy="50000"/>
+            <a:off x="1047848" y="820850"/>
+            <a:ext cx="44000" cy="44000"/>
           </a:xfrm>
           <a:prstGeom prst="ellipse">
             <a:avLst/>
@@ -4775,7 +4959,7 @@
           <a:solidFill>
             <a:srgbClr val="FFFFFF"/>
           </a:solidFill>
-          <a:ln w="12700">
+          <a:ln w="11430">
             <a:solidFill>
               <a:srgbClr val="0A7D6E"/>
             </a:solidFill>
@@ -4806,14 +4990,14 @@
       </p:sp>
       <p:sp>
         <p:nvSpPr>
-          <p:cNvPr id="46" name="Oval 45"/>
+          <p:cNvPr id="50" name="Oval 49"/>
           <p:cNvSpPr/>
           <p:nvPr/>
         </p:nvSpPr>
         <p:spPr>
           <a:xfrm>
-            <a:off x="2901080" y="1140091"/>
-            <a:ext cx="50000" cy="50000"/>
+            <a:off x="2904080" y="1143091"/>
+            <a:ext cx="44000" cy="44000"/>
           </a:xfrm>
           <a:prstGeom prst="ellipse">
             <a:avLst/>
@@ -4821,7 +5005,7 @@
           <a:solidFill>
             <a:srgbClr val="FFFFFF"/>
           </a:solidFill>
-          <a:ln w="12700">
+          <a:ln w="11430">
             <a:solidFill>
               <a:srgbClr val="0A7D6E"/>
             </a:solidFill>
@@ -4852,14 +5036,14 @@
       </p:sp>
       <p:sp>
         <p:nvSpPr>
-          <p:cNvPr id="47" name="Oval 46"/>
+          <p:cNvPr id="51" name="Oval 50"/>
           <p:cNvSpPr/>
           <p:nvPr/>
         </p:nvSpPr>
         <p:spPr>
           <a:xfrm>
-            <a:off x="1044848" y="838907"/>
-            <a:ext cx="50000" cy="50000"/>
+            <a:off x="1047848" y="841907"/>
+            <a:ext cx="44000" cy="44000"/>
           </a:xfrm>
           <a:prstGeom prst="ellipse">
             <a:avLst/>
@@ -4867,7 +5051,7 @@
           <a:solidFill>
             <a:srgbClr val="FFFFFF"/>
           </a:solidFill>
-          <a:ln w="12700">
+          <a:ln w="11430">
             <a:solidFill>
               <a:srgbClr val="0A7D6E"/>
             </a:solidFill>
@@ -4898,14 +5082,14 @@
       </p:sp>
       <p:sp>
         <p:nvSpPr>
-          <p:cNvPr id="48" name="Oval 47"/>
+          <p:cNvPr id="52" name="Oval 51"/>
           <p:cNvSpPr/>
           <p:nvPr/>
         </p:nvSpPr>
         <p:spPr>
           <a:xfrm>
-            <a:off x="2901080" y="1031643"/>
-            <a:ext cx="50000" cy="50000"/>
+            <a:off x="2904080" y="1034643"/>
+            <a:ext cx="44000" cy="44000"/>
           </a:xfrm>
           <a:prstGeom prst="ellipse">
             <a:avLst/>
@@ -4913,7 +5097,7 @@
           <a:solidFill>
             <a:srgbClr val="FFFFFF"/>
           </a:solidFill>
-          <a:ln w="12700">
+          <a:ln w="11430">
             <a:solidFill>
               <a:srgbClr val="0A7D6E"/>
             </a:solidFill>
@@ -4944,14 +5128,14 @@
       </p:sp>
       <p:sp>
         <p:nvSpPr>
-          <p:cNvPr id="49" name="Oval 48"/>
+          <p:cNvPr id="53" name="Oval 52"/>
           <p:cNvSpPr/>
           <p:nvPr/>
         </p:nvSpPr>
         <p:spPr>
           <a:xfrm>
-            <a:off x="1044848" y="744437"/>
-            <a:ext cx="50000" cy="50000"/>
+            <a:off x="1047848" y="747437"/>
+            <a:ext cx="44000" cy="44000"/>
           </a:xfrm>
           <a:prstGeom prst="ellipse">
             <a:avLst/>
@@ -4959,7 +5143,7 @@
           <a:solidFill>
             <a:srgbClr val="FFFFFF"/>
           </a:solidFill>
-          <a:ln w="12700">
+          <a:ln w="11430">
             <a:solidFill>
               <a:srgbClr val="0A7D6E"/>
             </a:solidFill>
@@ -4990,14 +5174,14 @@
       </p:sp>
       <p:sp>
         <p:nvSpPr>
-          <p:cNvPr id="50" name="Oval 49"/>
+          <p:cNvPr id="54" name="Oval 53"/>
           <p:cNvSpPr/>
           <p:nvPr/>
         </p:nvSpPr>
         <p:spPr>
           <a:xfrm>
-            <a:off x="2901080" y="1184104"/>
-            <a:ext cx="50000" cy="50000"/>
+            <a:off x="2904080" y="1187104"/>
+            <a:ext cx="44000" cy="44000"/>
           </a:xfrm>
           <a:prstGeom prst="ellipse">
             <a:avLst/>
@@ -5005,7 +5189,7 @@
           <a:solidFill>
             <a:srgbClr val="FFFFFF"/>
           </a:solidFill>
-          <a:ln w="12700">
+          <a:ln w="11430">
             <a:solidFill>
               <a:srgbClr val="0A7D6E"/>
             </a:solidFill>
@@ -5036,14 +5220,14 @@
       </p:sp>
       <p:sp>
         <p:nvSpPr>
-          <p:cNvPr id="51" name="Oval 50"/>
+          <p:cNvPr id="55" name="Oval 54"/>
           <p:cNvSpPr/>
           <p:nvPr/>
         </p:nvSpPr>
         <p:spPr>
           <a:xfrm>
-            <a:off x="1044848" y="1067040"/>
-            <a:ext cx="50000" cy="50000"/>
+            <a:off x="1047848" y="1070040"/>
+            <a:ext cx="44000" cy="44000"/>
           </a:xfrm>
           <a:prstGeom prst="ellipse">
             <a:avLst/>
@@ -5051,7 +5235,7 @@
           <a:solidFill>
             <a:srgbClr val="FFFFFF"/>
           </a:solidFill>
-          <a:ln w="12700">
+          <a:ln w="11430">
             <a:solidFill>
               <a:srgbClr val="0A7D6E"/>
             </a:solidFill>
@@ -5082,14 +5266,14 @@
       </p:sp>
       <p:sp>
         <p:nvSpPr>
-          <p:cNvPr id="52" name="Oval 51"/>
+          <p:cNvPr id="56" name="Oval 55"/>
           <p:cNvSpPr/>
           <p:nvPr/>
         </p:nvSpPr>
         <p:spPr>
           <a:xfrm>
-            <a:off x="2901080" y="917253"/>
-            <a:ext cx="50000" cy="50000"/>
+            <a:off x="2904080" y="920253"/>
+            <a:ext cx="44000" cy="44000"/>
           </a:xfrm>
           <a:prstGeom prst="ellipse">
             <a:avLst/>
@@ -5097,7 +5281,7 @@
           <a:solidFill>
             <a:srgbClr val="FFFFFF"/>
           </a:solidFill>
-          <a:ln w="12700">
+          <a:ln w="11430">
             <a:solidFill>
               <a:srgbClr val="0A7D6E"/>
             </a:solidFill>
@@ -5128,14 +5312,14 @@
       </p:sp>
       <p:sp>
         <p:nvSpPr>
-          <p:cNvPr id="53" name="Oval 52"/>
+          <p:cNvPr id="57" name="Oval 56"/>
           <p:cNvSpPr/>
           <p:nvPr/>
         </p:nvSpPr>
         <p:spPr>
           <a:xfrm>
-            <a:off x="1044848" y="830416"/>
-            <a:ext cx="50000" cy="50000"/>
+            <a:off x="1047848" y="833416"/>
+            <a:ext cx="44000" cy="44000"/>
           </a:xfrm>
           <a:prstGeom prst="ellipse">
             <a:avLst/>
@@ -5143,7 +5327,7 @@
           <a:solidFill>
             <a:srgbClr val="FFFFFF"/>
           </a:solidFill>
-          <a:ln w="12700">
+          <a:ln w="11430">
             <a:solidFill>
               <a:srgbClr val="0A7D6E"/>
             </a:solidFill>
@@ -5174,14 +5358,14 @@
       </p:sp>
       <p:sp>
         <p:nvSpPr>
-          <p:cNvPr id="54" name="Oval 53"/>
+          <p:cNvPr id="58" name="Oval 57"/>
           <p:cNvSpPr/>
           <p:nvPr/>
         </p:nvSpPr>
         <p:spPr>
           <a:xfrm>
-            <a:off x="2901080" y="1342869"/>
-            <a:ext cx="50000" cy="50000"/>
+            <a:off x="2904080" y="1345869"/>
+            <a:ext cx="44000" cy="44000"/>
           </a:xfrm>
           <a:prstGeom prst="ellipse">
             <a:avLst/>
@@ -5189,7 +5373,7 @@
           <a:solidFill>
             <a:srgbClr val="FFFFFF"/>
           </a:solidFill>
-          <a:ln w="12700">
+          <a:ln w="11430">
             <a:solidFill>
               <a:srgbClr val="0A7D6E"/>
             </a:solidFill>
@@ -5220,14 +5404,14 @@
       </p:sp>
       <p:sp>
         <p:nvSpPr>
-          <p:cNvPr id="55" name="Oval 54"/>
+          <p:cNvPr id="59" name="Oval 58"/>
           <p:cNvSpPr/>
           <p:nvPr/>
         </p:nvSpPr>
         <p:spPr>
           <a:xfrm>
-            <a:off x="1044848" y="859734"/>
-            <a:ext cx="50000" cy="50000"/>
+            <a:off x="1047848" y="862734"/>
+            <a:ext cx="44000" cy="44000"/>
           </a:xfrm>
           <a:prstGeom prst="ellipse">
             <a:avLst/>
@@ -5235,7 +5419,7 @@
           <a:solidFill>
             <a:srgbClr val="FFFFFF"/>
           </a:solidFill>
-          <a:ln w="12700">
+          <a:ln w="11430">
             <a:solidFill>
               <a:srgbClr val="0A7D6E"/>
             </a:solidFill>
@@ -5266,14 +5450,14 @@
       </p:sp>
       <p:sp>
         <p:nvSpPr>
-          <p:cNvPr id="56" name="Oval 55"/>
+          <p:cNvPr id="60" name="Oval 59"/>
           <p:cNvSpPr/>
           <p:nvPr/>
         </p:nvSpPr>
         <p:spPr>
           <a:xfrm>
-            <a:off x="2901080" y="862010"/>
-            <a:ext cx="50000" cy="50000"/>
+            <a:off x="2904080" y="865010"/>
+            <a:ext cx="44000" cy="44000"/>
           </a:xfrm>
           <a:prstGeom prst="ellipse">
             <a:avLst/>
@@ -5281,7 +5465,7 @@
           <a:solidFill>
             <a:srgbClr val="FFFFFF"/>
           </a:solidFill>
-          <a:ln w="12700">
+          <a:ln w="11430">
             <a:solidFill>
               <a:srgbClr val="0A7D6E"/>
             </a:solidFill>
@@ -5310,16 +5494,272 @@
           </a:p>
         </p:txBody>
       </p:sp>
-      <p:sp>
-        <p:nvSpPr>
-          <p:cNvPr id="57" name="Rectangle 56"/>
+      <p:cxnSp>
+        <p:nvCxnSpPr>
+          <p:cNvPr id="61" name="Connector 60"/>
+          <p:cNvCxnSpPr/>
+          <p:nvPr/>
+        </p:nvCxnSpPr>
+        <p:spPr>
+          <a:xfrm>
+            <a:off x="978408" y="859661"/>
+            <a:ext cx="1856232" cy="251206"/>
+          </a:xfrm>
+          <a:prstGeom prst="line">
+            <a:avLst/>
+          </a:prstGeom>
+          <a:ln w="27940">
+            <a:solidFill>
+              <a:srgbClr val="0A7D6E"/>
+            </a:solidFill>
+          </a:ln>
+          <a:effectLst/>
+        </p:spPr>
+        <p:style>
+          <a:lnRef idx="2">
+            <a:schemeClr val="accent1"/>
+          </a:lnRef>
+          <a:fillRef idx="0">
+            <a:schemeClr val="accent1"/>
+          </a:fillRef>
+          <a:effectRef idx="1">
+            <a:schemeClr val="accent1"/>
+          </a:effectRef>
+          <a:fontRef idx="minor">
+            <a:schemeClr val="tx1"/>
+          </a:fontRef>
+        </p:style>
+      </p:cxnSp>
+      <p:sp>
+        <p:nvSpPr>
+          <p:cNvPr id="62" name="Diamond 61"/>
           <p:cNvSpPr/>
           <p:nvPr/>
         </p:nvSpPr>
         <p:spPr>
           <a:xfrm>
-            <a:off x="1115568" y="566928"/>
-            <a:ext cx="1188720" cy="420624"/>
+            <a:off x="936408" y="817661"/>
+            <a:ext cx="84000" cy="84000"/>
+          </a:xfrm>
+          <a:prstGeom prst="diamond">
+            <a:avLst/>
+          </a:prstGeom>
+          <a:solidFill>
+            <a:srgbClr val="0A7D6E"/>
+          </a:solidFill>
+          <a:ln w="15240">
+            <a:solidFill>
+              <a:srgbClr val="FFFFFF"/>
+            </a:solidFill>
+          </a:ln>
+          <a:effectLst/>
+        </p:spPr>
+        <p:style>
+          <a:lnRef idx="1">
+            <a:schemeClr val="accent1"/>
+          </a:lnRef>
+          <a:fillRef idx="3">
+            <a:schemeClr val="accent1"/>
+          </a:fillRef>
+          <a:effectRef idx="2">
+            <a:schemeClr val="accent1"/>
+          </a:effectRef>
+          <a:fontRef idx="minor">
+            <a:schemeClr val="lt1"/>
+          </a:fontRef>
+        </p:style>
+        <p:txBody>
+          <a:bodyPr rtlCol="0" anchor="ctr"/>
+          <a:lstStyle/>
+          <a:p>
+            <a:pPr algn="ctr"/>
+          </a:p>
+        </p:txBody>
+      </p:sp>
+      <p:sp>
+        <p:nvSpPr>
+          <p:cNvPr id="63" name="Diamond 62"/>
+          <p:cNvSpPr/>
+          <p:nvPr/>
+        </p:nvSpPr>
+        <p:spPr>
+          <a:xfrm>
+            <a:off x="2792640" y="1068867"/>
+            <a:ext cx="84000" cy="84000"/>
+          </a:xfrm>
+          <a:prstGeom prst="diamond">
+            <a:avLst/>
+          </a:prstGeom>
+          <a:solidFill>
+            <a:srgbClr val="0A7D6E"/>
+          </a:solidFill>
+          <a:ln w="15240">
+            <a:solidFill>
+              <a:srgbClr val="FFFFFF"/>
+            </a:solidFill>
+          </a:ln>
+          <a:effectLst/>
+        </p:spPr>
+        <p:style>
+          <a:lnRef idx="1">
+            <a:schemeClr val="accent1"/>
+          </a:lnRef>
+          <a:fillRef idx="3">
+            <a:schemeClr val="accent1"/>
+          </a:fillRef>
+          <a:effectRef idx="2">
+            <a:schemeClr val="accent1"/>
+          </a:effectRef>
+          <a:fontRef idx="minor">
+            <a:schemeClr val="lt1"/>
+          </a:fontRef>
+        </p:style>
+        <p:txBody>
+          <a:bodyPr rtlCol="0" anchor="ctr"/>
+          <a:lstStyle/>
+          <a:p>
+            <a:pPr algn="ctr"/>
+          </a:p>
+        </p:txBody>
+      </p:sp>
+      <p:cxnSp>
+        <p:nvCxnSpPr>
+          <p:cNvPr id="64" name="Connector 63"/>
+          <p:cNvCxnSpPr/>
+          <p:nvPr/>
+        </p:nvCxnSpPr>
+        <p:spPr>
+          <a:xfrm>
+            <a:off x="1161288" y="955963"/>
+            <a:ext cx="1856232" cy="226886"/>
+          </a:xfrm>
+          <a:prstGeom prst="line">
+            <a:avLst/>
+          </a:prstGeom>
+          <a:ln w="27940">
+            <a:solidFill>
+              <a:srgbClr val="C53E1F"/>
+            </a:solidFill>
+          </a:ln>
+          <a:effectLst/>
+        </p:spPr>
+        <p:style>
+          <a:lnRef idx="2">
+            <a:schemeClr val="accent1"/>
+          </a:lnRef>
+          <a:fillRef idx="0">
+            <a:schemeClr val="accent1"/>
+          </a:fillRef>
+          <a:effectRef idx="1">
+            <a:schemeClr val="accent1"/>
+          </a:effectRef>
+          <a:fontRef idx="minor">
+            <a:schemeClr val="tx1"/>
+          </a:fontRef>
+        </p:style>
+      </p:cxnSp>
+      <p:sp>
+        <p:nvSpPr>
+          <p:cNvPr id="65" name="Diamond 64"/>
+          <p:cNvSpPr/>
+          <p:nvPr/>
+        </p:nvSpPr>
+        <p:spPr>
+          <a:xfrm>
+            <a:off x="1119288" y="913963"/>
+            <a:ext cx="84000" cy="84000"/>
+          </a:xfrm>
+          <a:prstGeom prst="diamond">
+            <a:avLst/>
+          </a:prstGeom>
+          <a:solidFill>
+            <a:srgbClr val="C53E1F"/>
+          </a:solidFill>
+          <a:ln w="15240">
+            <a:solidFill>
+              <a:srgbClr val="FFFFFF"/>
+            </a:solidFill>
+          </a:ln>
+          <a:effectLst/>
+        </p:spPr>
+        <p:style>
+          <a:lnRef idx="1">
+            <a:schemeClr val="accent1"/>
+          </a:lnRef>
+          <a:fillRef idx="3">
+            <a:schemeClr val="accent1"/>
+          </a:fillRef>
+          <a:effectRef idx="2">
+            <a:schemeClr val="accent1"/>
+          </a:effectRef>
+          <a:fontRef idx="minor">
+            <a:schemeClr val="lt1"/>
+          </a:fontRef>
+        </p:style>
+        <p:txBody>
+          <a:bodyPr rtlCol="0" anchor="ctr"/>
+          <a:lstStyle/>
+          <a:p>
+            <a:pPr algn="ctr"/>
+          </a:p>
+        </p:txBody>
+      </p:sp>
+      <p:sp>
+        <p:nvSpPr>
+          <p:cNvPr id="66" name="Diamond 65"/>
+          <p:cNvSpPr/>
+          <p:nvPr/>
+        </p:nvSpPr>
+        <p:spPr>
+          <a:xfrm>
+            <a:off x="2975520" y="1140849"/>
+            <a:ext cx="84000" cy="84000"/>
+          </a:xfrm>
+          <a:prstGeom prst="diamond">
+            <a:avLst/>
+          </a:prstGeom>
+          <a:solidFill>
+            <a:srgbClr val="C53E1F"/>
+          </a:solidFill>
+          <a:ln w="15240">
+            <a:solidFill>
+              <a:srgbClr val="FFFFFF"/>
+            </a:solidFill>
+          </a:ln>
+          <a:effectLst/>
+        </p:spPr>
+        <p:style>
+          <a:lnRef idx="1">
+            <a:schemeClr val="accent1"/>
+          </a:lnRef>
+          <a:fillRef idx="3">
+            <a:schemeClr val="accent1"/>
+          </a:fillRef>
+          <a:effectRef idx="2">
+            <a:schemeClr val="accent1"/>
+          </a:effectRef>
+          <a:fontRef idx="minor">
+            <a:schemeClr val="lt1"/>
+          </a:fontRef>
+        </p:style>
+        <p:txBody>
+          <a:bodyPr rtlCol="0" anchor="ctr"/>
+          <a:lstStyle/>
+          <a:p>
+            <a:pPr algn="ctr"/>
+          </a:p>
+        </p:txBody>
+      </p:sp>
+      <p:sp>
+        <p:nvSpPr>
+          <p:cNvPr id="67" name="Rectangle 66"/>
+          <p:cNvSpPr/>
+          <p:nvPr/>
+        </p:nvSpPr>
+        <p:spPr>
+          <a:xfrm>
+            <a:off x="1115568" y="557784"/>
+            <a:ext cx="1234440" cy="530352"/>
           </a:xfrm>
           <a:prstGeom prst="rect">
             <a:avLst/>
@@ -5358,14 +5798,14 @@
       </p:sp>
       <p:sp>
         <p:nvSpPr>
-          <p:cNvPr id="58" name="TextBox 57"/>
+          <p:cNvPr id="68" name="TextBox 67"/>
           <p:cNvSpPr txBox="1"/>
           <p:nvPr/>
         </p:nvSpPr>
         <p:spPr>
           <a:xfrm>
-            <a:off x="1152144" y="566928"/>
-            <a:ext cx="1115568" cy="164592"/>
+            <a:off x="1152144" y="565784"/>
+            <a:ext cx="1161288" cy="146304"/>
           </a:xfrm>
           <a:prstGeom prst="rect">
             <a:avLst/>
@@ -5394,14 +5834,14 @@
       </p:sp>
       <p:sp>
         <p:nvSpPr>
-          <p:cNvPr id="59" name="TextBox 58"/>
+          <p:cNvPr id="69" name="TextBox 68"/>
           <p:cNvSpPr txBox="1"/>
           <p:nvPr/>
         </p:nvSpPr>
         <p:spPr>
           <a:xfrm>
-            <a:off x="1152144" y="749808"/>
-            <a:ext cx="1115568" cy="164592"/>
+            <a:off x="1152144" y="722376"/>
+            <a:ext cx="1161288" cy="146304"/>
           </a:xfrm>
           <a:prstGeom prst="rect">
             <a:avLst/>
@@ -5428,9 +5868,81 @@
           </a:p>
         </p:txBody>
       </p:sp>
+      <p:sp>
+        <p:nvSpPr>
+          <p:cNvPr id="70" name="TextBox 69"/>
+          <p:cNvSpPr txBox="1"/>
+          <p:nvPr/>
+        </p:nvSpPr>
+        <p:spPr>
+          <a:xfrm>
+            <a:off x="1152144" y="886968"/>
+            <a:ext cx="1161288" cy="146304"/>
+          </a:xfrm>
+          <a:prstGeom prst="rect">
+            <a:avLst/>
+          </a:prstGeom>
+          <a:noFill/>
+          <a:effectLst/>
+        </p:spPr>
+        <p:txBody>
+          <a:bodyPr wrap="square" lIns="0" rIns="0" tIns="0" bIns="0" anchor="t">
+            <a:spAutoFit/>
+          </a:bodyPr>
+          <a:lstStyle/>
+          <a:p>
+            <a:pPr algn="l"/>
+            <a:r>
+              <a:rPr sz="600" b="0">
+                <a:solidFill>
+                  <a:srgbClr val="222222"/>
+                </a:solidFill>
+                <a:latin typeface="Arial"/>
+              </a:rPr>
+              <a:t>MW Δ (good vs bad) P = 0.70</a:t>
+            </a:r>
+          </a:p>
+        </p:txBody>
+      </p:sp>
+      <p:sp>
+        <p:nvSpPr>
+          <p:cNvPr id="71" name="TextBox 70"/>
+          <p:cNvSpPr txBox="1"/>
+          <p:nvPr/>
+        </p:nvSpPr>
+        <p:spPr>
+          <a:xfrm>
+            <a:off x="2670048" y="576072"/>
+            <a:ext cx="237744" cy="182880"/>
+          </a:xfrm>
+          <a:prstGeom prst="rect">
+            <a:avLst/>
+          </a:prstGeom>
+          <a:noFill/>
+          <a:effectLst/>
+        </p:spPr>
+        <p:txBody>
+          <a:bodyPr wrap="square" lIns="0" rIns="0" tIns="0" bIns="0" anchor="ctr">
+            <a:spAutoFit/>
+          </a:bodyPr>
+          <a:lstStyle/>
+          <a:p>
+            <a:pPr algn="ctr"/>
+            <a:r>
+              <a:rPr sz="700" b="1">
+                <a:solidFill>
+                  <a:srgbClr val="666666"/>
+                </a:solidFill>
+                <a:latin typeface="Arial"/>
+              </a:rPr>
+              <a:t>pred ↓</a:t>
+            </a:r>
+          </a:p>
+        </p:txBody>
+      </p:sp>
       <p:cxnSp>
         <p:nvCxnSpPr>
-          <p:cNvPr id="60" name="Connector 59"/>
+          <p:cNvPr id="72" name="Connector 71"/>
           <p:cNvCxnSpPr/>
           <p:nvPr/>
         </p:nvCxnSpPr>
@@ -5466,7 +5978,7 @@
       </p:cxnSp>
       <p:cxnSp>
         <p:nvCxnSpPr>
-          <p:cNvPr id="61" name="Connector 60"/>
+          <p:cNvPr id="73" name="Connector 72"/>
           <p:cNvCxnSpPr/>
           <p:nvPr/>
         </p:nvCxnSpPr>
@@ -5502,7 +6014,7 @@
       </p:cxnSp>
       <p:cxnSp>
         <p:nvCxnSpPr>
-          <p:cNvPr id="62" name="Connector 61"/>
+          <p:cNvPr id="74" name="Connector 73"/>
           <p:cNvCxnSpPr/>
           <p:nvPr/>
         </p:nvCxnSpPr>
@@ -5538,7 +6050,7 @@
       </p:cxnSp>
       <p:sp>
         <p:nvSpPr>
-          <p:cNvPr id="63" name="TextBox 62"/>
+          <p:cNvPr id="75" name="TextBox 74"/>
           <p:cNvSpPr txBox="1"/>
           <p:nvPr/>
         </p:nvSpPr>
@@ -5574,7 +6086,7 @@
       </p:sp>
       <p:cxnSp>
         <p:nvCxnSpPr>
-          <p:cNvPr id="64" name="Connector 63"/>
+          <p:cNvPr id="76" name="Connector 75"/>
           <p:cNvCxnSpPr/>
           <p:nvPr/>
         </p:nvCxnSpPr>
@@ -5610,7 +6122,7 @@
       </p:cxnSp>
       <p:sp>
         <p:nvSpPr>
-          <p:cNvPr id="65" name="TextBox 64"/>
+          <p:cNvPr id="77" name="TextBox 76"/>
           <p:cNvSpPr txBox="1"/>
           <p:nvPr/>
         </p:nvSpPr>
@@ -5646,7 +6158,7 @@
       </p:sp>
       <p:cxnSp>
         <p:nvCxnSpPr>
-          <p:cNvPr id="66" name="Connector 65"/>
+          <p:cNvPr id="78" name="Connector 77"/>
           <p:cNvCxnSpPr/>
           <p:nvPr/>
         </p:nvCxnSpPr>
@@ -5682,7 +6194,7 @@
       </p:cxnSp>
       <p:sp>
         <p:nvSpPr>
-          <p:cNvPr id="67" name="TextBox 66"/>
+          <p:cNvPr id="79" name="TextBox 78"/>
           <p:cNvSpPr txBox="1"/>
           <p:nvPr/>
         </p:nvSpPr>
@@ -5718,7 +6230,7 @@
       </p:sp>
       <p:cxnSp>
         <p:nvCxnSpPr>
-          <p:cNvPr id="68" name="Connector 67"/>
+          <p:cNvPr id="80" name="Connector 79"/>
           <p:cNvCxnSpPr/>
           <p:nvPr/>
         </p:nvCxnSpPr>
@@ -5754,7 +6266,7 @@
       </p:cxnSp>
       <p:sp>
         <p:nvSpPr>
-          <p:cNvPr id="69" name="TextBox 68"/>
+          <p:cNvPr id="81" name="TextBox 80"/>
           <p:cNvSpPr txBox="1"/>
           <p:nvPr/>
         </p:nvSpPr>
@@ -5790,7 +6302,7 @@
       </p:sp>
       <p:cxnSp>
         <p:nvCxnSpPr>
-          <p:cNvPr id="70" name="Connector 69"/>
+          <p:cNvPr id="82" name="Connector 81"/>
           <p:cNvCxnSpPr/>
           <p:nvPr/>
         </p:nvCxnSpPr>
@@ -5826,7 +6338,7 @@
       </p:cxnSp>
       <p:sp>
         <p:nvSpPr>
-          <p:cNvPr id="71" name="TextBox 70"/>
+          <p:cNvPr id="83" name="TextBox 82"/>
           <p:cNvSpPr txBox="1"/>
           <p:nvPr/>
         </p:nvSpPr>
@@ -5862,7 +6374,7 @@
       </p:sp>
       <p:cxnSp>
         <p:nvCxnSpPr>
-          <p:cNvPr id="72" name="Connector 71"/>
+          <p:cNvPr id="84" name="Connector 83"/>
           <p:cNvCxnSpPr/>
           <p:nvPr/>
         </p:nvCxnSpPr>
@@ -5898,7 +6410,7 @@
       </p:cxnSp>
       <p:sp>
         <p:nvSpPr>
-          <p:cNvPr id="73" name="TextBox 72"/>
+          <p:cNvPr id="85" name="TextBox 84"/>
           <p:cNvSpPr txBox="1"/>
           <p:nvPr/>
         </p:nvSpPr>
@@ -5934,7 +6446,7 @@
       </p:sp>
       <p:cxnSp>
         <p:nvCxnSpPr>
-          <p:cNvPr id="74" name="Connector 73"/>
+          <p:cNvPr id="86" name="Connector 85"/>
           <p:cNvCxnSpPr/>
           <p:nvPr/>
         </p:nvCxnSpPr>
@@ -5970,7 +6482,7 @@
       </p:cxnSp>
       <p:sp>
         <p:nvSpPr>
-          <p:cNvPr id="75" name="TextBox 74"/>
+          <p:cNvPr id="87" name="TextBox 86"/>
           <p:cNvSpPr txBox="1"/>
           <p:nvPr/>
         </p:nvSpPr>
@@ -6006,7 +6518,7 @@
       </p:sp>
       <p:cxnSp>
         <p:nvCxnSpPr>
-          <p:cNvPr id="76" name="Connector 75"/>
+          <p:cNvPr id="88" name="Connector 87"/>
           <p:cNvCxnSpPr/>
           <p:nvPr/>
         </p:nvCxnSpPr>
@@ -6043,7 +6555,7 @@
       </p:cxnSp>
       <p:sp>
         <p:nvSpPr>
-          <p:cNvPr id="77" name="TextBox 76"/>
+          <p:cNvPr id="89" name="TextBox 88"/>
           <p:cNvSpPr txBox="1"/>
           <p:nvPr/>
         </p:nvSpPr>
@@ -6079,7 +6591,7 @@
       </p:sp>
       <p:cxnSp>
         <p:nvCxnSpPr>
-          <p:cNvPr id="78" name="Connector 77"/>
+          <p:cNvPr id="90" name="Connector 89"/>
           <p:cNvCxnSpPr/>
           <p:nvPr/>
         </p:nvCxnSpPr>
@@ -6091,9 +6603,9 @@
           <a:prstGeom prst="line">
             <a:avLst/>
           </a:prstGeom>
-          <a:ln w="13970">
-            <a:solidFill>
-              <a:srgbClr val="C53E1F"/>
+          <a:ln w="10160">
+            <a:solidFill>
+              <a:srgbClr val="E8B5A9"/>
             </a:solidFill>
           </a:ln>
           <a:effectLst/>
@@ -6115,7 +6627,7 @@
       </p:cxnSp>
       <p:cxnSp>
         <p:nvCxnSpPr>
-          <p:cNvPr id="79" name="Connector 78"/>
+          <p:cNvPr id="91" name="Connector 90"/>
           <p:cNvCxnSpPr/>
           <p:nvPr/>
         </p:nvCxnSpPr>
@@ -6127,9 +6639,9 @@
           <a:prstGeom prst="line">
             <a:avLst/>
           </a:prstGeom>
-          <a:ln w="13970">
-            <a:solidFill>
-              <a:srgbClr val="C53E1F"/>
+          <a:ln w="10160">
+            <a:solidFill>
+              <a:srgbClr val="E8B5A9"/>
             </a:solidFill>
           </a:ln>
           <a:effectLst/>
@@ -6151,7 +6663,7 @@
       </p:cxnSp>
       <p:cxnSp>
         <p:nvCxnSpPr>
-          <p:cNvPr id="80" name="Connector 79"/>
+          <p:cNvPr id="92" name="Connector 91"/>
           <p:cNvCxnSpPr/>
           <p:nvPr/>
         </p:nvCxnSpPr>
@@ -6163,9 +6675,9 @@
           <a:prstGeom prst="line">
             <a:avLst/>
           </a:prstGeom>
-          <a:ln w="13970">
-            <a:solidFill>
-              <a:srgbClr val="C53E1F"/>
+          <a:ln w="10160">
+            <a:solidFill>
+              <a:srgbClr val="E8B5A9"/>
             </a:solidFill>
           </a:ln>
           <a:effectLst/>
@@ -6187,7 +6699,7 @@
       </p:cxnSp>
       <p:cxnSp>
         <p:nvCxnSpPr>
-          <p:cNvPr id="81" name="Connector 80"/>
+          <p:cNvPr id="93" name="Connector 92"/>
           <p:cNvCxnSpPr/>
           <p:nvPr/>
         </p:nvCxnSpPr>
@@ -6199,9 +6711,9 @@
           <a:prstGeom prst="line">
             <a:avLst/>
           </a:prstGeom>
-          <a:ln w="13970">
-            <a:solidFill>
-              <a:srgbClr val="C53E1F"/>
+          <a:ln w="10160">
+            <a:solidFill>
+              <a:srgbClr val="E8B5A9"/>
             </a:solidFill>
           </a:ln>
           <a:effectLst/>
@@ -6223,7 +6735,7 @@
       </p:cxnSp>
       <p:cxnSp>
         <p:nvCxnSpPr>
-          <p:cNvPr id="82" name="Connector 81"/>
+          <p:cNvPr id="94" name="Connector 93"/>
           <p:cNvCxnSpPr/>
           <p:nvPr/>
         </p:nvCxnSpPr>
@@ -6235,9 +6747,9 @@
           <a:prstGeom prst="line">
             <a:avLst/>
           </a:prstGeom>
-          <a:ln w="13970">
-            <a:solidFill>
-              <a:srgbClr val="C53E1F"/>
+          <a:ln w="10160">
+            <a:solidFill>
+              <a:srgbClr val="E8B5A9"/>
             </a:solidFill>
           </a:ln>
           <a:effectLst/>
@@ -6259,7 +6771,7 @@
       </p:cxnSp>
       <p:cxnSp>
         <p:nvCxnSpPr>
-          <p:cNvPr id="83" name="Connector 82"/>
+          <p:cNvPr id="95" name="Connector 94"/>
           <p:cNvCxnSpPr/>
           <p:nvPr/>
         </p:nvCxnSpPr>
@@ -6271,9 +6783,9 @@
           <a:prstGeom prst="line">
             <a:avLst/>
           </a:prstGeom>
-          <a:ln w="13970">
-            <a:solidFill>
-              <a:srgbClr val="C53E1F"/>
+          <a:ln w="10160">
+            <a:solidFill>
+              <a:srgbClr val="E8B5A9"/>
             </a:solidFill>
           </a:ln>
           <a:effectLst/>
@@ -6295,7 +6807,7 @@
       </p:cxnSp>
       <p:cxnSp>
         <p:nvCxnSpPr>
-          <p:cNvPr id="84" name="Connector 83"/>
+          <p:cNvPr id="96" name="Connector 95"/>
           <p:cNvCxnSpPr/>
           <p:nvPr/>
         </p:nvCxnSpPr>
@@ -6307,9 +6819,9 @@
           <a:prstGeom prst="line">
             <a:avLst/>
           </a:prstGeom>
-          <a:ln w="13970">
-            <a:solidFill>
-              <a:srgbClr val="0A7D6E"/>
+          <a:ln w="10160">
+            <a:solidFill>
+              <a:srgbClr val="A1CDC7"/>
             </a:solidFill>
           </a:ln>
           <a:effectLst/>
@@ -6331,7 +6843,7 @@
       </p:cxnSp>
       <p:cxnSp>
         <p:nvCxnSpPr>
-          <p:cNvPr id="85" name="Connector 84"/>
+          <p:cNvPr id="97" name="Connector 96"/>
           <p:cNvCxnSpPr/>
           <p:nvPr/>
         </p:nvCxnSpPr>
@@ -6343,9 +6855,9 @@
           <a:prstGeom prst="line">
             <a:avLst/>
           </a:prstGeom>
-          <a:ln w="13970">
-            <a:solidFill>
-              <a:srgbClr val="0A7D6E"/>
+          <a:ln w="10160">
+            <a:solidFill>
+              <a:srgbClr val="A1CDC7"/>
             </a:solidFill>
           </a:ln>
           <a:effectLst/>
@@ -6367,7 +6879,7 @@
       </p:cxnSp>
       <p:cxnSp>
         <p:nvCxnSpPr>
-          <p:cNvPr id="86" name="Connector 85"/>
+          <p:cNvPr id="98" name="Connector 97"/>
           <p:cNvCxnSpPr/>
           <p:nvPr/>
         </p:nvCxnSpPr>
@@ -6379,9 +6891,9 @@
           <a:prstGeom prst="line">
             <a:avLst/>
           </a:prstGeom>
-          <a:ln w="13970">
-            <a:solidFill>
-              <a:srgbClr val="0A7D6E"/>
+          <a:ln w="10160">
+            <a:solidFill>
+              <a:srgbClr val="A1CDC7"/>
             </a:solidFill>
           </a:ln>
           <a:effectLst/>
@@ -6403,7 +6915,7 @@
       </p:cxnSp>
       <p:cxnSp>
         <p:nvCxnSpPr>
-          <p:cNvPr id="87" name="Connector 86"/>
+          <p:cNvPr id="99" name="Connector 98"/>
           <p:cNvCxnSpPr/>
           <p:nvPr/>
         </p:nvCxnSpPr>
@@ -6415,9 +6927,9 @@
           <a:prstGeom prst="line">
             <a:avLst/>
           </a:prstGeom>
-          <a:ln w="13970">
-            <a:solidFill>
-              <a:srgbClr val="0A7D6E"/>
+          <a:ln w="10160">
+            <a:solidFill>
+              <a:srgbClr val="A1CDC7"/>
             </a:solidFill>
           </a:ln>
           <a:effectLst/>
@@ -6439,7 +6951,7 @@
       </p:cxnSp>
       <p:cxnSp>
         <p:nvCxnSpPr>
-          <p:cNvPr id="88" name="Connector 87"/>
+          <p:cNvPr id="100" name="Connector 99"/>
           <p:cNvCxnSpPr/>
           <p:nvPr/>
         </p:nvCxnSpPr>
@@ -6451,9 +6963,9 @@
           <a:prstGeom prst="line">
             <a:avLst/>
           </a:prstGeom>
-          <a:ln w="13970">
-            <a:solidFill>
-              <a:srgbClr val="0A7D6E"/>
+          <a:ln w="10160">
+            <a:solidFill>
+              <a:srgbClr val="A1CDC7"/>
             </a:solidFill>
           </a:ln>
           <a:effectLst/>
@@ -6475,7 +6987,7 @@
       </p:cxnSp>
       <p:cxnSp>
         <p:nvCxnSpPr>
-          <p:cNvPr id="89" name="Connector 88"/>
+          <p:cNvPr id="101" name="Connector 100"/>
           <p:cNvCxnSpPr/>
           <p:nvPr/>
         </p:nvCxnSpPr>
@@ -6487,7 +6999,46 @@
           <a:prstGeom prst="line">
             <a:avLst/>
           </a:prstGeom>
-          <a:ln w="13970">
+          <a:ln w="10160">
+            <a:solidFill>
+              <a:srgbClr val="A1CDC7"/>
+            </a:solidFill>
+          </a:ln>
+          <a:effectLst/>
+        </p:spPr>
+        <p:style>
+          <a:lnRef idx="2">
+            <a:schemeClr val="accent1"/>
+          </a:lnRef>
+          <a:fillRef idx="0">
+            <a:schemeClr val="accent1"/>
+          </a:fillRef>
+          <a:effectRef idx="1">
+            <a:schemeClr val="accent1"/>
+          </a:effectRef>
+          <a:fontRef idx="minor">
+            <a:schemeClr val="tx1"/>
+          </a:fontRef>
+        </p:style>
+      </p:cxnSp>
+      <p:sp>
+        <p:nvSpPr>
+          <p:cNvPr id="102" name="Rectangle 101"/>
+          <p:cNvSpPr/>
+          <p:nvPr/>
+        </p:nvSpPr>
+        <p:spPr>
+          <a:xfrm>
+            <a:off x="3675888" y="802976"/>
+            <a:ext cx="91440" cy="104795"/>
+          </a:xfrm>
+          <a:prstGeom prst="rect">
+            <a:avLst/>
+          </a:prstGeom>
+          <a:solidFill>
+            <a:srgbClr val="A1CDC7"/>
+          </a:solidFill>
+          <a:ln w="7620">
             <a:solidFill>
               <a:srgbClr val="0A7D6E"/>
             </a:solidFill>
@@ -6495,30 +7046,175 @@
           <a:effectLst/>
         </p:spPr>
         <p:style>
-          <a:lnRef idx="2">
-            <a:schemeClr val="accent1"/>
-          </a:lnRef>
-          <a:fillRef idx="0">
-            <a:schemeClr val="accent1"/>
-          </a:fillRef>
-          <a:effectRef idx="1">
-            <a:schemeClr val="accent1"/>
-          </a:effectRef>
-          <a:fontRef idx="minor">
-            <a:schemeClr val="tx1"/>
-          </a:fontRef>
-        </p:style>
-      </p:cxnSp>
-      <p:sp>
-        <p:nvSpPr>
-          <p:cNvPr id="90" name="Oval 89"/>
+          <a:lnRef idx="1">
+            <a:schemeClr val="accent1"/>
+          </a:lnRef>
+          <a:fillRef idx="3">
+            <a:schemeClr val="accent1"/>
+          </a:fillRef>
+          <a:effectRef idx="2">
+            <a:schemeClr val="accent1"/>
+          </a:effectRef>
+          <a:fontRef idx="minor">
+            <a:schemeClr val="lt1"/>
+          </a:fontRef>
+        </p:style>
+        <p:txBody>
+          <a:bodyPr rtlCol="0" anchor="ctr"/>
+          <a:lstStyle/>
+          <a:p>
+            <a:pPr algn="ctr"/>
+          </a:p>
+        </p:txBody>
+      </p:sp>
+      <p:sp>
+        <p:nvSpPr>
+          <p:cNvPr id="103" name="Rectangle 102"/>
           <p:cNvSpPr/>
           <p:nvPr/>
         </p:nvSpPr>
         <p:spPr>
           <a:xfrm>
-            <a:off x="3788048" y="900170"/>
-            <a:ext cx="50000" cy="50000"/>
+            <a:off x="5532120" y="1005448"/>
+            <a:ext cx="91440" cy="191254"/>
+          </a:xfrm>
+          <a:prstGeom prst="rect">
+            <a:avLst/>
+          </a:prstGeom>
+          <a:solidFill>
+            <a:srgbClr val="A1CDC7"/>
+          </a:solidFill>
+          <a:ln w="7620">
+            <a:solidFill>
+              <a:srgbClr val="0A7D6E"/>
+            </a:solidFill>
+          </a:ln>
+          <a:effectLst/>
+        </p:spPr>
+        <p:style>
+          <a:lnRef idx="1">
+            <a:schemeClr val="accent1"/>
+          </a:lnRef>
+          <a:fillRef idx="3">
+            <a:schemeClr val="accent1"/>
+          </a:fillRef>
+          <a:effectRef idx="2">
+            <a:schemeClr val="accent1"/>
+          </a:effectRef>
+          <a:fontRef idx="minor">
+            <a:schemeClr val="lt1"/>
+          </a:fontRef>
+        </p:style>
+        <p:txBody>
+          <a:bodyPr rtlCol="0" anchor="ctr"/>
+          <a:lstStyle/>
+          <a:p>
+            <a:pPr algn="ctr"/>
+          </a:p>
+        </p:txBody>
+      </p:sp>
+      <p:sp>
+        <p:nvSpPr>
+          <p:cNvPr id="104" name="Rectangle 103"/>
+          <p:cNvSpPr/>
+          <p:nvPr/>
+        </p:nvSpPr>
+        <p:spPr>
+          <a:xfrm>
+            <a:off x="3858768" y="899847"/>
+            <a:ext cx="91440" cy="69028"/>
+          </a:xfrm>
+          <a:prstGeom prst="rect">
+            <a:avLst/>
+          </a:prstGeom>
+          <a:solidFill>
+            <a:srgbClr val="E8B5A9"/>
+          </a:solidFill>
+          <a:ln w="7620">
+            <a:solidFill>
+              <a:srgbClr val="C53E1F"/>
+            </a:solidFill>
+          </a:ln>
+          <a:effectLst/>
+        </p:spPr>
+        <p:style>
+          <a:lnRef idx="1">
+            <a:schemeClr val="accent1"/>
+          </a:lnRef>
+          <a:fillRef idx="3">
+            <a:schemeClr val="accent1"/>
+          </a:fillRef>
+          <a:effectRef idx="2">
+            <a:schemeClr val="accent1"/>
+          </a:effectRef>
+          <a:fontRef idx="minor">
+            <a:schemeClr val="lt1"/>
+          </a:fontRef>
+        </p:style>
+        <p:txBody>
+          <a:bodyPr rtlCol="0" anchor="ctr"/>
+          <a:lstStyle/>
+          <a:p>
+            <a:pPr algn="ctr"/>
+          </a:p>
+        </p:txBody>
+      </p:sp>
+      <p:sp>
+        <p:nvSpPr>
+          <p:cNvPr id="105" name="Rectangle 104"/>
+          <p:cNvSpPr/>
+          <p:nvPr/>
+        </p:nvSpPr>
+        <p:spPr>
+          <a:xfrm>
+            <a:off x="5715000" y="1093162"/>
+            <a:ext cx="91440" cy="144435"/>
+          </a:xfrm>
+          <a:prstGeom prst="rect">
+            <a:avLst/>
+          </a:prstGeom>
+          <a:solidFill>
+            <a:srgbClr val="E8B5A9"/>
+          </a:solidFill>
+          <a:ln w="7620">
+            <a:solidFill>
+              <a:srgbClr val="C53E1F"/>
+            </a:solidFill>
+          </a:ln>
+          <a:effectLst/>
+        </p:spPr>
+        <p:style>
+          <a:lnRef idx="1">
+            <a:schemeClr val="accent1"/>
+          </a:lnRef>
+          <a:fillRef idx="3">
+            <a:schemeClr val="accent1"/>
+          </a:fillRef>
+          <a:effectRef idx="2">
+            <a:schemeClr val="accent1"/>
+          </a:effectRef>
+          <a:fontRef idx="minor">
+            <a:schemeClr val="lt1"/>
+          </a:fontRef>
+        </p:style>
+        <p:txBody>
+          <a:bodyPr rtlCol="0" anchor="ctr"/>
+          <a:lstStyle/>
+          <a:p>
+            <a:pPr algn="ctr"/>
+          </a:p>
+        </p:txBody>
+      </p:sp>
+      <p:sp>
+        <p:nvSpPr>
+          <p:cNvPr id="106" name="Oval 105"/>
+          <p:cNvSpPr/>
+          <p:nvPr/>
+        </p:nvSpPr>
+        <p:spPr>
+          <a:xfrm>
+            <a:off x="3791048" y="903170"/>
+            <a:ext cx="44000" cy="44000"/>
           </a:xfrm>
           <a:prstGeom prst="ellipse">
             <a:avLst/>
@@ -6526,7 +7222,7 @@
           <a:solidFill>
             <a:srgbClr val="FFFFFF"/>
           </a:solidFill>
-          <a:ln w="12700">
+          <a:ln w="11430">
             <a:solidFill>
               <a:srgbClr val="C53E1F"/>
             </a:solidFill>
@@ -6557,14 +7253,14 @@
       </p:sp>
       <p:sp>
         <p:nvSpPr>
-          <p:cNvPr id="91" name="Oval 90"/>
+          <p:cNvPr id="107" name="Oval 106"/>
           <p:cNvSpPr/>
           <p:nvPr/>
         </p:nvSpPr>
         <p:spPr>
           <a:xfrm>
-            <a:off x="5644280" y="1187381"/>
-            <a:ext cx="50000" cy="50000"/>
+            <a:off x="5647280" y="1190381"/>
+            <a:ext cx="44000" cy="44000"/>
           </a:xfrm>
           <a:prstGeom prst="ellipse">
             <a:avLst/>
@@ -6572,7 +7268,7 @@
           <a:solidFill>
             <a:srgbClr val="FFFFFF"/>
           </a:solidFill>
-          <a:ln w="12700">
+          <a:ln w="11430">
             <a:solidFill>
               <a:srgbClr val="C53E1F"/>
             </a:solidFill>
@@ -6603,14 +7299,14 @@
       </p:sp>
       <p:sp>
         <p:nvSpPr>
-          <p:cNvPr id="92" name="Oval 91"/>
+          <p:cNvPr id="108" name="Oval 107"/>
           <p:cNvSpPr/>
           <p:nvPr/>
         </p:nvSpPr>
         <p:spPr>
           <a:xfrm>
-            <a:off x="3788048" y="820089"/>
-            <a:ext cx="50000" cy="50000"/>
+            <a:off x="3791048" y="823089"/>
+            <a:ext cx="44000" cy="44000"/>
           </a:xfrm>
           <a:prstGeom prst="ellipse">
             <a:avLst/>
@@ -6618,7 +7314,7 @@
           <a:solidFill>
             <a:srgbClr val="FFFFFF"/>
           </a:solidFill>
-          <a:ln w="12700">
+          <a:ln w="11430">
             <a:solidFill>
               <a:srgbClr val="C53E1F"/>
             </a:solidFill>
@@ -6649,14 +7345,14 @@
       </p:sp>
       <p:sp>
         <p:nvSpPr>
-          <p:cNvPr id="93" name="Oval 92"/>
+          <p:cNvPr id="109" name="Oval 108"/>
           <p:cNvSpPr/>
           <p:nvPr/>
         </p:nvSpPr>
         <p:spPr>
           <a:xfrm>
-            <a:off x="5644280" y="1008957"/>
-            <a:ext cx="50000" cy="50000"/>
+            <a:off x="5647280" y="1011957"/>
+            <a:ext cx="44000" cy="44000"/>
           </a:xfrm>
           <a:prstGeom prst="ellipse">
             <a:avLst/>
@@ -6664,7 +7360,7 @@
           <a:solidFill>
             <a:srgbClr val="FFFFFF"/>
           </a:solidFill>
-          <a:ln w="12700">
+          <a:ln w="11430">
             <a:solidFill>
               <a:srgbClr val="C53E1F"/>
             </a:solidFill>
@@ -6695,14 +7391,14 @@
       </p:sp>
       <p:sp>
         <p:nvSpPr>
-          <p:cNvPr id="94" name="Oval 93"/>
+          <p:cNvPr id="110" name="Oval 109"/>
           <p:cNvSpPr/>
           <p:nvPr/>
         </p:nvSpPr>
         <p:spPr>
           <a:xfrm>
-            <a:off x="3788048" y="958443"/>
-            <a:ext cx="50000" cy="50000"/>
+            <a:off x="3791048" y="961443"/>
+            <a:ext cx="44000" cy="44000"/>
           </a:xfrm>
           <a:prstGeom prst="ellipse">
             <a:avLst/>
@@ -6710,7 +7406,7 @@
           <a:solidFill>
             <a:srgbClr val="FFFFFF"/>
           </a:solidFill>
-          <a:ln w="12700">
+          <a:ln w="11430">
             <a:solidFill>
               <a:srgbClr val="C53E1F"/>
             </a:solidFill>
@@ -6741,14 +7437,14 @@
       </p:sp>
       <p:sp>
         <p:nvSpPr>
-          <p:cNvPr id="95" name="Oval 94"/>
+          <p:cNvPr id="111" name="Oval 110"/>
           <p:cNvSpPr/>
           <p:nvPr/>
         </p:nvSpPr>
         <p:spPr>
           <a:xfrm>
-            <a:off x="5644280" y="1092754"/>
-            <a:ext cx="50000" cy="50000"/>
+            <a:off x="5647280" y="1095754"/>
+            <a:ext cx="44000" cy="44000"/>
           </a:xfrm>
           <a:prstGeom prst="ellipse">
             <a:avLst/>
@@ -6756,7 +7452,7 @@
           <a:solidFill>
             <a:srgbClr val="FFFFFF"/>
           </a:solidFill>
-          <a:ln w="12700">
+          <a:ln w="11430">
             <a:solidFill>
               <a:srgbClr val="C53E1F"/>
             </a:solidFill>
@@ -6787,14 +7483,14 @@
       </p:sp>
       <p:sp>
         <p:nvSpPr>
-          <p:cNvPr id="96" name="Oval 95"/>
+          <p:cNvPr id="112" name="Oval 111"/>
           <p:cNvSpPr/>
           <p:nvPr/>
         </p:nvSpPr>
         <p:spPr>
           <a:xfrm>
-            <a:off x="3788048" y="868744"/>
-            <a:ext cx="50000" cy="50000"/>
+            <a:off x="3791048" y="871744"/>
+            <a:ext cx="44000" cy="44000"/>
           </a:xfrm>
           <a:prstGeom prst="ellipse">
             <a:avLst/>
@@ -6802,7 +7498,7 @@
           <a:solidFill>
             <a:srgbClr val="FFFFFF"/>
           </a:solidFill>
-          <a:ln w="12700">
+          <a:ln w="11430">
             <a:solidFill>
               <a:srgbClr val="C53E1F"/>
             </a:solidFill>
@@ -6833,14 +7529,14 @@
       </p:sp>
       <p:sp>
         <p:nvSpPr>
-          <p:cNvPr id="97" name="Oval 96"/>
+          <p:cNvPr id="113" name="Oval 112"/>
           <p:cNvSpPr/>
           <p:nvPr/>
         </p:nvSpPr>
         <p:spPr>
           <a:xfrm>
-            <a:off x="5644280" y="1337166"/>
-            <a:ext cx="50000" cy="50000"/>
+            <a:off x="5647280" y="1340166"/>
+            <a:ext cx="44000" cy="44000"/>
           </a:xfrm>
           <a:prstGeom prst="ellipse">
             <a:avLst/>
@@ -6848,7 +7544,7 @@
           <a:solidFill>
             <a:srgbClr val="FFFFFF"/>
           </a:solidFill>
-          <a:ln w="12700">
+          <a:ln w="11430">
             <a:solidFill>
               <a:srgbClr val="C53E1F"/>
             </a:solidFill>
@@ -6879,14 +7575,14 @@
       </p:sp>
       <p:sp>
         <p:nvSpPr>
-          <p:cNvPr id="98" name="Oval 97"/>
+          <p:cNvPr id="114" name="Oval 113"/>
           <p:cNvSpPr/>
           <p:nvPr/>
         </p:nvSpPr>
         <p:spPr>
           <a:xfrm>
-            <a:off x="3788048" y="893154"/>
-            <a:ext cx="50000" cy="50000"/>
+            <a:off x="3791048" y="896154"/>
+            <a:ext cx="44000" cy="44000"/>
           </a:xfrm>
           <a:prstGeom prst="ellipse">
             <a:avLst/>
@@ -6894,7 +7590,7 @@
           <a:solidFill>
             <a:srgbClr val="FFFFFF"/>
           </a:solidFill>
-          <a:ln w="12700">
+          <a:ln w="11430">
             <a:solidFill>
               <a:srgbClr val="C53E1F"/>
             </a:solidFill>
@@ -6925,14 +7621,14 @@
       </p:sp>
       <p:sp>
         <p:nvSpPr>
-          <p:cNvPr id="99" name="Oval 98"/>
+          <p:cNvPr id="115" name="Oval 114"/>
           <p:cNvSpPr/>
           <p:nvPr/>
         </p:nvSpPr>
         <p:spPr>
           <a:xfrm>
-            <a:off x="5644280" y="1221003"/>
-            <a:ext cx="50000" cy="50000"/>
+            <a:off x="5647280" y="1224003"/>
+            <a:ext cx="44000" cy="44000"/>
           </a:xfrm>
           <a:prstGeom prst="ellipse">
             <a:avLst/>
@@ -6940,7 +7636,7 @@
           <a:solidFill>
             <a:srgbClr val="FFFFFF"/>
           </a:solidFill>
-          <a:ln w="12700">
+          <a:ln w="11430">
             <a:solidFill>
               <a:srgbClr val="C53E1F"/>
             </a:solidFill>
@@ -6971,14 +7667,14 @@
       </p:sp>
       <p:sp>
         <p:nvSpPr>
-          <p:cNvPr id="100" name="Oval 99"/>
+          <p:cNvPr id="116" name="Oval 115"/>
           <p:cNvSpPr/>
           <p:nvPr/>
         </p:nvSpPr>
         <p:spPr>
           <a:xfrm>
-            <a:off x="3788048" y="1190620"/>
-            <a:ext cx="50000" cy="50000"/>
+            <a:off x="3791048" y="1193620"/>
+            <a:ext cx="44000" cy="44000"/>
           </a:xfrm>
           <a:prstGeom prst="ellipse">
             <a:avLst/>
@@ -6986,7 +7682,7 @@
           <a:solidFill>
             <a:srgbClr val="FFFFFF"/>
           </a:solidFill>
-          <a:ln w="12700">
+          <a:ln w="11430">
             <a:solidFill>
               <a:srgbClr val="C53E1F"/>
             </a:solidFill>
@@ -7017,14 +7713,14 @@
       </p:sp>
       <p:sp>
         <p:nvSpPr>
-          <p:cNvPr id="101" name="Oval 100"/>
+          <p:cNvPr id="117" name="Oval 116"/>
           <p:cNvSpPr/>
           <p:nvPr/>
         </p:nvSpPr>
         <p:spPr>
           <a:xfrm>
-            <a:off x="5644280" y="1059965"/>
-            <a:ext cx="50000" cy="50000"/>
+            <a:off x="5647280" y="1062965"/>
+            <a:ext cx="44000" cy="44000"/>
           </a:xfrm>
           <a:prstGeom prst="ellipse">
             <a:avLst/>
@@ -7032,7 +7728,7 @@
           <a:solidFill>
             <a:srgbClr val="FFFFFF"/>
           </a:solidFill>
-          <a:ln w="12700">
+          <a:ln w="11430">
             <a:solidFill>
               <a:srgbClr val="C53E1F"/>
             </a:solidFill>
@@ -7063,14 +7759,14 @@
       </p:sp>
       <p:sp>
         <p:nvSpPr>
-          <p:cNvPr id="102" name="Oval 101"/>
+          <p:cNvPr id="118" name="Oval 117"/>
           <p:cNvSpPr/>
           <p:nvPr/>
         </p:nvSpPr>
         <p:spPr>
           <a:xfrm>
-            <a:off x="3788048" y="788628"/>
-            <a:ext cx="50000" cy="50000"/>
+            <a:off x="3791048" y="791628"/>
+            <a:ext cx="44000" cy="44000"/>
           </a:xfrm>
           <a:prstGeom prst="ellipse">
             <a:avLst/>
@@ -7078,7 +7774,7 @@
           <a:solidFill>
             <a:srgbClr val="FFFFFF"/>
           </a:solidFill>
-          <a:ln w="12700">
+          <a:ln w="11430">
             <a:solidFill>
               <a:srgbClr val="0A7D6E"/>
             </a:solidFill>
@@ -7109,14 +7805,14 @@
       </p:sp>
       <p:sp>
         <p:nvSpPr>
-          <p:cNvPr id="103" name="Oval 102"/>
+          <p:cNvPr id="119" name="Oval 118"/>
           <p:cNvSpPr/>
           <p:nvPr/>
         </p:nvSpPr>
         <p:spPr>
           <a:xfrm>
-            <a:off x="5644280" y="1069180"/>
-            <a:ext cx="50000" cy="50000"/>
+            <a:off x="5647280" y="1072180"/>
+            <a:ext cx="44000" cy="44000"/>
           </a:xfrm>
           <a:prstGeom prst="ellipse">
             <a:avLst/>
@@ -7124,7 +7820,7 @@
           <a:solidFill>
             <a:srgbClr val="FFFFFF"/>
           </a:solidFill>
-          <a:ln w="12700">
+          <a:ln w="11430">
             <a:solidFill>
               <a:srgbClr val="0A7D6E"/>
             </a:solidFill>
@@ -7155,14 +7851,14 @@
       </p:sp>
       <p:sp>
         <p:nvSpPr>
-          <p:cNvPr id="104" name="Oval 103"/>
+          <p:cNvPr id="120" name="Oval 119"/>
           <p:cNvSpPr/>
           <p:nvPr/>
         </p:nvSpPr>
         <p:spPr>
           <a:xfrm>
-            <a:off x="3788048" y="774425"/>
-            <a:ext cx="50000" cy="50000"/>
+            <a:off x="3791048" y="777425"/>
+            <a:ext cx="44000" cy="44000"/>
           </a:xfrm>
           <a:prstGeom prst="ellipse">
             <a:avLst/>
@@ -7170,7 +7866,7 @@
           <a:solidFill>
             <a:srgbClr val="FFFFFF"/>
           </a:solidFill>
-          <a:ln w="12700">
+          <a:ln w="11430">
             <a:solidFill>
               <a:srgbClr val="0A7D6E"/>
             </a:solidFill>
@@ -7201,14 +7897,14 @@
       </p:sp>
       <p:sp>
         <p:nvSpPr>
-          <p:cNvPr id="105" name="Oval 104"/>
+          <p:cNvPr id="121" name="Oval 120"/>
           <p:cNvSpPr/>
           <p:nvPr/>
         </p:nvSpPr>
         <p:spPr>
           <a:xfrm>
-            <a:off x="5644280" y="1000477"/>
-            <a:ext cx="50000" cy="50000"/>
+            <a:off x="5647280" y="1003477"/>
+            <a:ext cx="44000" cy="44000"/>
           </a:xfrm>
           <a:prstGeom prst="ellipse">
             <a:avLst/>
@@ -7216,7 +7912,7 @@
           <a:solidFill>
             <a:srgbClr val="FFFFFF"/>
           </a:solidFill>
-          <a:ln w="12700">
+          <a:ln w="11430">
             <a:solidFill>
               <a:srgbClr val="0A7D6E"/>
             </a:solidFill>
@@ -7247,14 +7943,14 @@
       </p:sp>
       <p:sp>
         <p:nvSpPr>
-          <p:cNvPr id="106" name="Oval 105"/>
+          <p:cNvPr id="122" name="Oval 121"/>
           <p:cNvSpPr/>
           <p:nvPr/>
         </p:nvSpPr>
         <p:spPr>
           <a:xfrm>
-            <a:off x="3788048" y="768867"/>
-            <a:ext cx="50000" cy="50000"/>
+            <a:off x="3791048" y="771867"/>
+            <a:ext cx="44000" cy="44000"/>
           </a:xfrm>
           <a:prstGeom prst="ellipse">
             <a:avLst/>
@@ -7262,7 +7958,7 @@
           <a:solidFill>
             <a:srgbClr val="FFFFFF"/>
           </a:solidFill>
-          <a:ln w="12700">
+          <a:ln w="11430">
             <a:solidFill>
               <a:srgbClr val="0A7D6E"/>
             </a:solidFill>
@@ -7293,14 +7989,14 @@
       </p:sp>
       <p:sp>
         <p:nvSpPr>
-          <p:cNvPr id="107" name="Oval 106"/>
+          <p:cNvPr id="123" name="Oval 122"/>
           <p:cNvSpPr/>
           <p:nvPr/>
         </p:nvSpPr>
         <p:spPr>
           <a:xfrm>
-            <a:off x="5644280" y="1205876"/>
-            <a:ext cx="50000" cy="50000"/>
+            <a:off x="5647280" y="1208876"/>
+            <a:ext cx="44000" cy="44000"/>
           </a:xfrm>
           <a:prstGeom prst="ellipse">
             <a:avLst/>
@@ -7308,7 +8004,7 @@
           <a:solidFill>
             <a:srgbClr val="FFFFFF"/>
           </a:solidFill>
-          <a:ln w="12700">
+          <a:ln w="11430">
             <a:solidFill>
               <a:srgbClr val="0A7D6E"/>
             </a:solidFill>
@@ -7339,14 +8035,14 @@
       </p:sp>
       <p:sp>
         <p:nvSpPr>
-          <p:cNvPr id="108" name="Oval 107"/>
+          <p:cNvPr id="124" name="Oval 123"/>
           <p:cNvSpPr/>
           <p:nvPr/>
         </p:nvSpPr>
         <p:spPr>
           <a:xfrm>
-            <a:off x="3788048" y="1054766"/>
-            <a:ext cx="50000" cy="50000"/>
+            <a:off x="3791048" y="1057766"/>
+            <a:ext cx="44000" cy="44000"/>
           </a:xfrm>
           <a:prstGeom prst="ellipse">
             <a:avLst/>
@@ -7354,7 +8050,7 @@
           <a:solidFill>
             <a:srgbClr val="FFFFFF"/>
           </a:solidFill>
-          <a:ln w="12700">
+          <a:ln w="11430">
             <a:solidFill>
               <a:srgbClr val="0A7D6E"/>
             </a:solidFill>
@@ -7385,14 +8081,14 @@
       </p:sp>
       <p:sp>
         <p:nvSpPr>
-          <p:cNvPr id="109" name="Oval 108"/>
+          <p:cNvPr id="125" name="Oval 124"/>
           <p:cNvSpPr/>
           <p:nvPr/>
         </p:nvSpPr>
         <p:spPr>
           <a:xfrm>
-            <a:off x="5644280" y="973772"/>
-            <a:ext cx="50000" cy="50000"/>
+            <a:off x="5647280" y="976772"/>
+            <a:ext cx="44000" cy="44000"/>
           </a:xfrm>
           <a:prstGeom prst="ellipse">
             <a:avLst/>
@@ -7400,7 +8096,7 @@
           <a:solidFill>
             <a:srgbClr val="FFFFFF"/>
           </a:solidFill>
-          <a:ln w="12700">
+          <a:ln w="11430">
             <a:solidFill>
               <a:srgbClr val="0A7D6E"/>
             </a:solidFill>
@@ -7431,14 +8127,14 @@
       </p:sp>
       <p:sp>
         <p:nvSpPr>
-          <p:cNvPr id="110" name="Oval 109"/>
+          <p:cNvPr id="126" name="Oval 125"/>
           <p:cNvSpPr/>
           <p:nvPr/>
         </p:nvSpPr>
         <p:spPr>
           <a:xfrm>
-            <a:off x="3788048" y="849620"/>
-            <a:ext cx="50000" cy="50000"/>
+            <a:off x="3791048" y="852620"/>
+            <a:ext cx="44000" cy="44000"/>
           </a:xfrm>
           <a:prstGeom prst="ellipse">
             <a:avLst/>
@@ -7446,7 +8142,7 @@
           <a:solidFill>
             <a:srgbClr val="FFFFFF"/>
           </a:solidFill>
-          <a:ln w="12700">
+          <a:ln w="11430">
             <a:solidFill>
               <a:srgbClr val="0A7D6E"/>
             </a:solidFill>
@@ -7477,14 +8173,14 @@
       </p:sp>
       <p:sp>
         <p:nvSpPr>
-          <p:cNvPr id="111" name="Oval 110"/>
+          <p:cNvPr id="127" name="Oval 126"/>
           <p:cNvSpPr/>
           <p:nvPr/>
         </p:nvSpPr>
         <p:spPr>
           <a:xfrm>
-            <a:off x="5644280" y="1302715"/>
-            <a:ext cx="50000" cy="50000"/>
+            <a:off x="5647280" y="1305715"/>
+            <a:ext cx="44000" cy="44000"/>
           </a:xfrm>
           <a:prstGeom prst="ellipse">
             <a:avLst/>
@@ -7492,7 +8188,7 @@
           <a:solidFill>
             <a:srgbClr val="FFFFFF"/>
           </a:solidFill>
-          <a:ln w="12700">
+          <a:ln w="11430">
             <a:solidFill>
               <a:srgbClr val="0A7D6E"/>
             </a:solidFill>
@@ -7523,14 +8219,14 @@
       </p:sp>
       <p:sp>
         <p:nvSpPr>
-          <p:cNvPr id="112" name="Oval 111"/>
+          <p:cNvPr id="128" name="Oval 127"/>
           <p:cNvSpPr/>
           <p:nvPr/>
         </p:nvSpPr>
         <p:spPr>
           <a:xfrm>
-            <a:off x="3788048" y="893821"/>
-            <a:ext cx="50000" cy="50000"/>
+            <a:off x="3791048" y="896821"/>
+            <a:ext cx="44000" cy="44000"/>
           </a:xfrm>
           <a:prstGeom prst="ellipse">
             <a:avLst/>
@@ -7538,7 +8234,7 @@
           <a:solidFill>
             <a:srgbClr val="FFFFFF"/>
           </a:solidFill>
-          <a:ln w="12700">
+          <a:ln w="11430">
             <a:solidFill>
               <a:srgbClr val="0A7D6E"/>
             </a:solidFill>
@@ -7569,14 +8265,14 @@
       </p:sp>
       <p:sp>
         <p:nvSpPr>
-          <p:cNvPr id="113" name="Oval 112"/>
+          <p:cNvPr id="129" name="Oval 128"/>
           <p:cNvSpPr/>
           <p:nvPr/>
         </p:nvSpPr>
         <p:spPr>
           <a:xfrm>
-            <a:off x="5644280" y="882265"/>
-            <a:ext cx="50000" cy="50000"/>
+            <a:off x="5647280" y="885265"/>
+            <a:ext cx="44000" cy="44000"/>
           </a:xfrm>
           <a:prstGeom prst="ellipse">
             <a:avLst/>
@@ -7584,7 +8280,7 @@
           <a:solidFill>
             <a:srgbClr val="FFFFFF"/>
           </a:solidFill>
-          <a:ln w="12700">
+          <a:ln w="11430">
             <a:solidFill>
               <a:srgbClr val="0A7D6E"/>
             </a:solidFill>
@@ -7613,16 +8309,272 @@
           </a:p>
         </p:txBody>
       </p:sp>
-      <p:sp>
-        <p:nvSpPr>
-          <p:cNvPr id="114" name="Rectangle 113"/>
+      <p:cxnSp>
+        <p:nvCxnSpPr>
+          <p:cNvPr id="130" name="Connector 129"/>
+          <p:cNvCxnSpPr/>
+          <p:nvPr/>
+        </p:nvCxnSpPr>
+        <p:spPr>
+          <a:xfrm>
+            <a:off x="3721608" y="844124"/>
+            <a:ext cx="1856232" cy="215704"/>
+          </a:xfrm>
+          <a:prstGeom prst="line">
+            <a:avLst/>
+          </a:prstGeom>
+          <a:ln w="27940">
+            <a:solidFill>
+              <a:srgbClr val="0A7D6E"/>
+            </a:solidFill>
+          </a:ln>
+          <a:effectLst/>
+        </p:spPr>
+        <p:style>
+          <a:lnRef idx="2">
+            <a:schemeClr val="accent1"/>
+          </a:lnRef>
+          <a:fillRef idx="0">
+            <a:schemeClr val="accent1"/>
+          </a:fillRef>
+          <a:effectRef idx="1">
+            <a:schemeClr val="accent1"/>
+          </a:effectRef>
+          <a:fontRef idx="minor">
+            <a:schemeClr val="tx1"/>
+          </a:fontRef>
+        </p:style>
+      </p:cxnSp>
+      <p:sp>
+        <p:nvSpPr>
+          <p:cNvPr id="131" name="Diamond 130"/>
           <p:cNvSpPr/>
           <p:nvPr/>
         </p:nvSpPr>
         <p:spPr>
           <a:xfrm>
-            <a:off x="3858768" y="566928"/>
-            <a:ext cx="1188720" cy="420624"/>
+            <a:off x="3679608" y="802124"/>
+            <a:ext cx="84000" cy="84000"/>
+          </a:xfrm>
+          <a:prstGeom prst="diamond">
+            <a:avLst/>
+          </a:prstGeom>
+          <a:solidFill>
+            <a:srgbClr val="0A7D6E"/>
+          </a:solidFill>
+          <a:ln w="15240">
+            <a:solidFill>
+              <a:srgbClr val="FFFFFF"/>
+            </a:solidFill>
+          </a:ln>
+          <a:effectLst/>
+        </p:spPr>
+        <p:style>
+          <a:lnRef idx="1">
+            <a:schemeClr val="accent1"/>
+          </a:lnRef>
+          <a:fillRef idx="3">
+            <a:schemeClr val="accent1"/>
+          </a:fillRef>
+          <a:effectRef idx="2">
+            <a:schemeClr val="accent1"/>
+          </a:effectRef>
+          <a:fontRef idx="minor">
+            <a:schemeClr val="lt1"/>
+          </a:fontRef>
+        </p:style>
+        <p:txBody>
+          <a:bodyPr rtlCol="0" anchor="ctr"/>
+          <a:lstStyle/>
+          <a:p>
+            <a:pPr algn="ctr"/>
+          </a:p>
+        </p:txBody>
+      </p:sp>
+      <p:sp>
+        <p:nvSpPr>
+          <p:cNvPr id="132" name="Diamond 131"/>
+          <p:cNvSpPr/>
+          <p:nvPr/>
+        </p:nvSpPr>
+        <p:spPr>
+          <a:xfrm>
+            <a:off x="5535840" y="1017828"/>
+            <a:ext cx="84000" cy="84000"/>
+          </a:xfrm>
+          <a:prstGeom prst="diamond">
+            <a:avLst/>
+          </a:prstGeom>
+          <a:solidFill>
+            <a:srgbClr val="0A7D6E"/>
+          </a:solidFill>
+          <a:ln w="15240">
+            <a:solidFill>
+              <a:srgbClr val="FFFFFF"/>
+            </a:solidFill>
+          </a:ln>
+          <a:effectLst/>
+        </p:spPr>
+        <p:style>
+          <a:lnRef idx="1">
+            <a:schemeClr val="accent1"/>
+          </a:lnRef>
+          <a:fillRef idx="3">
+            <a:schemeClr val="accent1"/>
+          </a:fillRef>
+          <a:effectRef idx="2">
+            <a:schemeClr val="accent1"/>
+          </a:effectRef>
+          <a:fontRef idx="minor">
+            <a:schemeClr val="lt1"/>
+          </a:fontRef>
+        </p:style>
+        <p:txBody>
+          <a:bodyPr rtlCol="0" anchor="ctr"/>
+          <a:lstStyle/>
+          <a:p>
+            <a:pPr algn="ctr"/>
+          </a:p>
+        </p:txBody>
+      </p:sp>
+      <p:cxnSp>
+        <p:nvCxnSpPr>
+          <p:cNvPr id="133" name="Connector 132"/>
+          <p:cNvCxnSpPr/>
+          <p:nvPr/>
+        </p:nvCxnSpPr>
+        <p:spPr>
+          <a:xfrm>
+            <a:off x="3904488" y="921662"/>
+            <a:ext cx="1856232" cy="243405"/>
+          </a:xfrm>
+          <a:prstGeom prst="line">
+            <a:avLst/>
+          </a:prstGeom>
+          <a:ln w="27940">
+            <a:solidFill>
+              <a:srgbClr val="C53E1F"/>
+            </a:solidFill>
+          </a:ln>
+          <a:effectLst/>
+        </p:spPr>
+        <p:style>
+          <a:lnRef idx="2">
+            <a:schemeClr val="accent1"/>
+          </a:lnRef>
+          <a:fillRef idx="0">
+            <a:schemeClr val="accent1"/>
+          </a:fillRef>
+          <a:effectRef idx="1">
+            <a:schemeClr val="accent1"/>
+          </a:effectRef>
+          <a:fontRef idx="minor">
+            <a:schemeClr val="tx1"/>
+          </a:fontRef>
+        </p:style>
+      </p:cxnSp>
+      <p:sp>
+        <p:nvSpPr>
+          <p:cNvPr id="134" name="Diamond 133"/>
+          <p:cNvSpPr/>
+          <p:nvPr/>
+        </p:nvSpPr>
+        <p:spPr>
+          <a:xfrm>
+            <a:off x="3862488" y="879662"/>
+            <a:ext cx="84000" cy="84000"/>
+          </a:xfrm>
+          <a:prstGeom prst="diamond">
+            <a:avLst/>
+          </a:prstGeom>
+          <a:solidFill>
+            <a:srgbClr val="C53E1F"/>
+          </a:solidFill>
+          <a:ln w="15240">
+            <a:solidFill>
+              <a:srgbClr val="FFFFFF"/>
+            </a:solidFill>
+          </a:ln>
+          <a:effectLst/>
+        </p:spPr>
+        <p:style>
+          <a:lnRef idx="1">
+            <a:schemeClr val="accent1"/>
+          </a:lnRef>
+          <a:fillRef idx="3">
+            <a:schemeClr val="accent1"/>
+          </a:fillRef>
+          <a:effectRef idx="2">
+            <a:schemeClr val="accent1"/>
+          </a:effectRef>
+          <a:fontRef idx="minor">
+            <a:schemeClr val="lt1"/>
+          </a:fontRef>
+        </p:style>
+        <p:txBody>
+          <a:bodyPr rtlCol="0" anchor="ctr"/>
+          <a:lstStyle/>
+          <a:p>
+            <a:pPr algn="ctr"/>
+          </a:p>
+        </p:txBody>
+      </p:sp>
+      <p:sp>
+        <p:nvSpPr>
+          <p:cNvPr id="135" name="Diamond 134"/>
+          <p:cNvSpPr/>
+          <p:nvPr/>
+        </p:nvSpPr>
+        <p:spPr>
+          <a:xfrm>
+            <a:off x="5718720" y="1123067"/>
+            <a:ext cx="84000" cy="84000"/>
+          </a:xfrm>
+          <a:prstGeom prst="diamond">
+            <a:avLst/>
+          </a:prstGeom>
+          <a:solidFill>
+            <a:srgbClr val="C53E1F"/>
+          </a:solidFill>
+          <a:ln w="15240">
+            <a:solidFill>
+              <a:srgbClr val="FFFFFF"/>
+            </a:solidFill>
+          </a:ln>
+          <a:effectLst/>
+        </p:spPr>
+        <p:style>
+          <a:lnRef idx="1">
+            <a:schemeClr val="accent1"/>
+          </a:lnRef>
+          <a:fillRef idx="3">
+            <a:schemeClr val="accent1"/>
+          </a:fillRef>
+          <a:effectRef idx="2">
+            <a:schemeClr val="accent1"/>
+          </a:effectRef>
+          <a:fontRef idx="minor">
+            <a:schemeClr val="lt1"/>
+          </a:fontRef>
+        </p:style>
+        <p:txBody>
+          <a:bodyPr rtlCol="0" anchor="ctr"/>
+          <a:lstStyle/>
+          <a:p>
+            <a:pPr algn="ctr"/>
+          </a:p>
+        </p:txBody>
+      </p:sp>
+      <p:sp>
+        <p:nvSpPr>
+          <p:cNvPr id="136" name="Rectangle 135"/>
+          <p:cNvSpPr/>
+          <p:nvPr/>
+        </p:nvSpPr>
+        <p:spPr>
+          <a:xfrm>
+            <a:off x="3858768" y="557784"/>
+            <a:ext cx="1234440" cy="530352"/>
           </a:xfrm>
           <a:prstGeom prst="rect">
             <a:avLst/>
@@ -7661,14 +8613,14 @@
       </p:sp>
       <p:sp>
         <p:nvSpPr>
-          <p:cNvPr id="115" name="TextBox 114"/>
+          <p:cNvPr id="137" name="TextBox 136"/>
           <p:cNvSpPr txBox="1"/>
           <p:nvPr/>
         </p:nvSpPr>
         <p:spPr>
           <a:xfrm>
-            <a:off x="3895344" y="566928"/>
-            <a:ext cx="1115568" cy="164592"/>
+            <a:off x="3895344" y="565784"/>
+            <a:ext cx="1161288" cy="146304"/>
           </a:xfrm>
           <a:prstGeom prst="rect">
             <a:avLst/>
@@ -7697,14 +8649,14 @@
       </p:sp>
       <p:sp>
         <p:nvSpPr>
-          <p:cNvPr id="116" name="TextBox 115"/>
+          <p:cNvPr id="138" name="TextBox 137"/>
           <p:cNvSpPr txBox="1"/>
           <p:nvPr/>
         </p:nvSpPr>
         <p:spPr>
           <a:xfrm>
-            <a:off x="3895344" y="749808"/>
-            <a:ext cx="1115568" cy="164592"/>
+            <a:off x="3895344" y="722376"/>
+            <a:ext cx="1161288" cy="146304"/>
           </a:xfrm>
           <a:prstGeom prst="rect">
             <a:avLst/>
@@ -7731,9 +8683,81 @@
           </a:p>
         </p:txBody>
       </p:sp>
+      <p:sp>
+        <p:nvSpPr>
+          <p:cNvPr id="139" name="TextBox 138"/>
+          <p:cNvSpPr txBox="1"/>
+          <p:nvPr/>
+        </p:nvSpPr>
+        <p:spPr>
+          <a:xfrm>
+            <a:off x="3895344" y="886968"/>
+            <a:ext cx="1161288" cy="146304"/>
+          </a:xfrm>
+          <a:prstGeom prst="rect">
+            <a:avLst/>
+          </a:prstGeom>
+          <a:noFill/>
+          <a:effectLst/>
+        </p:spPr>
+        <p:txBody>
+          <a:bodyPr wrap="square" lIns="0" rIns="0" tIns="0" bIns="0" anchor="t">
+            <a:spAutoFit/>
+          </a:bodyPr>
+          <a:lstStyle/>
+          <a:p>
+            <a:pPr algn="l"/>
+            <a:r>
+              <a:rPr sz="600" b="0">
+                <a:solidFill>
+                  <a:srgbClr val="222222"/>
+                </a:solidFill>
+                <a:latin typeface="Arial"/>
+              </a:rPr>
+              <a:t>MW Δ (good vs bad) P = 1.00</a:t>
+            </a:r>
+          </a:p>
+        </p:txBody>
+      </p:sp>
+      <p:sp>
+        <p:nvSpPr>
+          <p:cNvPr id="140" name="TextBox 139"/>
+          <p:cNvSpPr txBox="1"/>
+          <p:nvPr/>
+        </p:nvSpPr>
+        <p:spPr>
+          <a:xfrm>
+            <a:off x="5413248" y="576072"/>
+            <a:ext cx="237744" cy="182880"/>
+          </a:xfrm>
+          <a:prstGeom prst="rect">
+            <a:avLst/>
+          </a:prstGeom>
+          <a:noFill/>
+          <a:effectLst/>
+        </p:spPr>
+        <p:txBody>
+          <a:bodyPr wrap="square" lIns="0" rIns="0" tIns="0" bIns="0" anchor="ctr">
+            <a:spAutoFit/>
+          </a:bodyPr>
+          <a:lstStyle/>
+          <a:p>
+            <a:pPr algn="ctr"/>
+            <a:r>
+              <a:rPr sz="700" b="1">
+                <a:solidFill>
+                  <a:srgbClr val="666666"/>
+                </a:solidFill>
+                <a:latin typeface="Arial"/>
+              </a:rPr>
+              <a:t>pred ↓</a:t>
+            </a:r>
+          </a:p>
+        </p:txBody>
+      </p:sp>
       <p:cxnSp>
         <p:nvCxnSpPr>
-          <p:cNvPr id="117" name="Connector 116"/>
+          <p:cNvPr id="141" name="Connector 140"/>
           <p:cNvCxnSpPr/>
           <p:nvPr/>
         </p:nvCxnSpPr>
@@ -7769,7 +8793,7 @@
       </p:cxnSp>
       <p:cxnSp>
         <p:nvCxnSpPr>
-          <p:cNvPr id="118" name="Connector 117"/>
+          <p:cNvPr id="142" name="Connector 141"/>
           <p:cNvCxnSpPr/>
           <p:nvPr/>
         </p:nvCxnSpPr>
@@ -7805,7 +8829,7 @@
       </p:cxnSp>
       <p:cxnSp>
         <p:nvCxnSpPr>
-          <p:cNvPr id="119" name="Connector 118"/>
+          <p:cNvPr id="143" name="Connector 142"/>
           <p:cNvCxnSpPr/>
           <p:nvPr/>
         </p:nvCxnSpPr>
@@ -7841,7 +8865,7 @@
       </p:cxnSp>
       <p:sp>
         <p:nvSpPr>
-          <p:cNvPr id="120" name="TextBox 119"/>
+          <p:cNvPr id="144" name="TextBox 143"/>
           <p:cNvSpPr txBox="1"/>
           <p:nvPr/>
         </p:nvSpPr>
@@ -7877,7 +8901,7 @@
       </p:sp>
       <p:cxnSp>
         <p:nvCxnSpPr>
-          <p:cNvPr id="121" name="Connector 120"/>
+          <p:cNvPr id="145" name="Connector 144"/>
           <p:cNvCxnSpPr/>
           <p:nvPr/>
         </p:nvCxnSpPr>
@@ -7913,7 +8937,7 @@
       </p:cxnSp>
       <p:sp>
         <p:nvSpPr>
-          <p:cNvPr id="122" name="TextBox 121"/>
+          <p:cNvPr id="146" name="TextBox 145"/>
           <p:cNvSpPr txBox="1"/>
           <p:nvPr/>
         </p:nvSpPr>
@@ -7949,7 +8973,7 @@
       </p:sp>
       <p:cxnSp>
         <p:nvCxnSpPr>
-          <p:cNvPr id="123" name="Connector 122"/>
+          <p:cNvPr id="147" name="Connector 146"/>
           <p:cNvCxnSpPr/>
           <p:nvPr/>
         </p:nvCxnSpPr>
@@ -7985,7 +9009,7 @@
       </p:cxnSp>
       <p:sp>
         <p:nvSpPr>
-          <p:cNvPr id="124" name="TextBox 123"/>
+          <p:cNvPr id="148" name="TextBox 147"/>
           <p:cNvSpPr txBox="1"/>
           <p:nvPr/>
         </p:nvSpPr>
@@ -8021,7 +9045,7 @@
       </p:sp>
       <p:cxnSp>
         <p:nvCxnSpPr>
-          <p:cNvPr id="125" name="Connector 124"/>
+          <p:cNvPr id="149" name="Connector 148"/>
           <p:cNvCxnSpPr/>
           <p:nvPr/>
         </p:nvCxnSpPr>
@@ -8057,7 +9081,7 @@
       </p:cxnSp>
       <p:sp>
         <p:nvSpPr>
-          <p:cNvPr id="126" name="TextBox 125"/>
+          <p:cNvPr id="150" name="TextBox 149"/>
           <p:cNvSpPr txBox="1"/>
           <p:nvPr/>
         </p:nvSpPr>
@@ -8093,7 +9117,7 @@
       </p:sp>
       <p:cxnSp>
         <p:nvCxnSpPr>
-          <p:cNvPr id="127" name="Connector 126"/>
+          <p:cNvPr id="151" name="Connector 150"/>
           <p:cNvCxnSpPr/>
           <p:nvPr/>
         </p:nvCxnSpPr>
@@ -8129,7 +9153,7 @@
       </p:cxnSp>
       <p:sp>
         <p:nvSpPr>
-          <p:cNvPr id="128" name="TextBox 127"/>
+          <p:cNvPr id="152" name="TextBox 151"/>
           <p:cNvSpPr txBox="1"/>
           <p:nvPr/>
         </p:nvSpPr>
@@ -8165,7 +9189,7 @@
       </p:sp>
       <p:cxnSp>
         <p:nvCxnSpPr>
-          <p:cNvPr id="129" name="Connector 128"/>
+          <p:cNvPr id="153" name="Connector 152"/>
           <p:cNvCxnSpPr/>
           <p:nvPr/>
         </p:nvCxnSpPr>
@@ -8201,7 +9225,7 @@
       </p:cxnSp>
       <p:sp>
         <p:nvSpPr>
-          <p:cNvPr id="130" name="TextBox 129"/>
+          <p:cNvPr id="154" name="TextBox 153"/>
           <p:cNvSpPr txBox="1"/>
           <p:nvPr/>
         </p:nvSpPr>
@@ -8237,7 +9261,7 @@
       </p:sp>
       <p:cxnSp>
         <p:nvCxnSpPr>
-          <p:cNvPr id="131" name="Connector 130"/>
+          <p:cNvPr id="155" name="Connector 154"/>
           <p:cNvCxnSpPr/>
           <p:nvPr/>
         </p:nvCxnSpPr>
@@ -8273,7 +9297,7 @@
       </p:cxnSp>
       <p:sp>
         <p:nvSpPr>
-          <p:cNvPr id="132" name="TextBox 131"/>
+          <p:cNvPr id="156" name="TextBox 155"/>
           <p:cNvSpPr txBox="1"/>
           <p:nvPr/>
         </p:nvSpPr>
@@ -8309,7 +9333,7 @@
       </p:sp>
       <p:cxnSp>
         <p:nvCxnSpPr>
-          <p:cNvPr id="133" name="Connector 132"/>
+          <p:cNvPr id="157" name="Connector 156"/>
           <p:cNvCxnSpPr/>
           <p:nvPr/>
         </p:nvCxnSpPr>
@@ -8346,7 +9370,7 @@
       </p:cxnSp>
       <p:sp>
         <p:nvSpPr>
-          <p:cNvPr id="134" name="TextBox 133"/>
+          <p:cNvPr id="158" name="TextBox 157"/>
           <p:cNvSpPr txBox="1"/>
           <p:nvPr/>
         </p:nvSpPr>
@@ -8382,7 +9406,7 @@
       </p:sp>
       <p:cxnSp>
         <p:nvCxnSpPr>
-          <p:cNvPr id="135" name="Connector 134"/>
+          <p:cNvPr id="159" name="Connector 158"/>
           <p:cNvCxnSpPr/>
           <p:nvPr/>
         </p:nvCxnSpPr>
@@ -8394,9 +9418,9 @@
           <a:prstGeom prst="line">
             <a:avLst/>
           </a:prstGeom>
-          <a:ln w="13970">
-            <a:solidFill>
-              <a:srgbClr val="C53E1F"/>
+          <a:ln w="10160">
+            <a:solidFill>
+              <a:srgbClr val="E8B5A9"/>
             </a:solidFill>
           </a:ln>
           <a:effectLst/>
@@ -8418,7 +9442,7 @@
       </p:cxnSp>
       <p:cxnSp>
         <p:nvCxnSpPr>
-          <p:cNvPr id="136" name="Connector 135"/>
+          <p:cNvPr id="160" name="Connector 159"/>
           <p:cNvCxnSpPr/>
           <p:nvPr/>
         </p:nvCxnSpPr>
@@ -8430,9 +9454,9 @@
           <a:prstGeom prst="line">
             <a:avLst/>
           </a:prstGeom>
-          <a:ln w="13970">
-            <a:solidFill>
-              <a:srgbClr val="C53E1F"/>
+          <a:ln w="10160">
+            <a:solidFill>
+              <a:srgbClr val="E8B5A9"/>
             </a:solidFill>
           </a:ln>
           <a:effectLst/>
@@ -8454,7 +9478,7 @@
       </p:cxnSp>
       <p:cxnSp>
         <p:nvCxnSpPr>
-          <p:cNvPr id="137" name="Connector 136"/>
+          <p:cNvPr id="161" name="Connector 160"/>
           <p:cNvCxnSpPr/>
           <p:nvPr/>
         </p:nvCxnSpPr>
@@ -8466,9 +9490,9 @@
           <a:prstGeom prst="line">
             <a:avLst/>
           </a:prstGeom>
-          <a:ln w="13970">
-            <a:solidFill>
-              <a:srgbClr val="C53E1F"/>
+          <a:ln w="10160">
+            <a:solidFill>
+              <a:srgbClr val="E8B5A9"/>
             </a:solidFill>
           </a:ln>
           <a:effectLst/>
@@ -8490,7 +9514,7 @@
       </p:cxnSp>
       <p:cxnSp>
         <p:nvCxnSpPr>
-          <p:cNvPr id="138" name="Connector 137"/>
+          <p:cNvPr id="162" name="Connector 161"/>
           <p:cNvCxnSpPr/>
           <p:nvPr/>
         </p:nvCxnSpPr>
@@ -8502,9 +9526,9 @@
           <a:prstGeom prst="line">
             <a:avLst/>
           </a:prstGeom>
-          <a:ln w="13970">
-            <a:solidFill>
-              <a:srgbClr val="C53E1F"/>
+          <a:ln w="10160">
+            <a:solidFill>
+              <a:srgbClr val="E8B5A9"/>
             </a:solidFill>
           </a:ln>
           <a:effectLst/>
@@ -8526,7 +9550,7 @@
       </p:cxnSp>
       <p:cxnSp>
         <p:nvCxnSpPr>
-          <p:cNvPr id="139" name="Connector 138"/>
+          <p:cNvPr id="163" name="Connector 162"/>
           <p:cNvCxnSpPr/>
           <p:nvPr/>
         </p:nvCxnSpPr>
@@ -8538,9 +9562,9 @@
           <a:prstGeom prst="line">
             <a:avLst/>
           </a:prstGeom>
-          <a:ln w="13970">
-            <a:solidFill>
-              <a:srgbClr val="C53E1F"/>
+          <a:ln w="10160">
+            <a:solidFill>
+              <a:srgbClr val="E8B5A9"/>
             </a:solidFill>
           </a:ln>
           <a:effectLst/>
@@ -8562,7 +9586,7 @@
       </p:cxnSp>
       <p:cxnSp>
         <p:nvCxnSpPr>
-          <p:cNvPr id="140" name="Connector 139"/>
+          <p:cNvPr id="164" name="Connector 163"/>
           <p:cNvCxnSpPr/>
           <p:nvPr/>
         </p:nvCxnSpPr>
@@ -8574,9 +9598,9 @@
           <a:prstGeom prst="line">
             <a:avLst/>
           </a:prstGeom>
-          <a:ln w="13970">
-            <a:solidFill>
-              <a:srgbClr val="C53E1F"/>
+          <a:ln w="10160">
+            <a:solidFill>
+              <a:srgbClr val="E8B5A9"/>
             </a:solidFill>
           </a:ln>
           <a:effectLst/>
@@ -8598,7 +9622,7 @@
       </p:cxnSp>
       <p:cxnSp>
         <p:nvCxnSpPr>
-          <p:cNvPr id="141" name="Connector 140"/>
+          <p:cNvPr id="165" name="Connector 164"/>
           <p:cNvCxnSpPr/>
           <p:nvPr/>
         </p:nvCxnSpPr>
@@ -8610,9 +9634,9 @@
           <a:prstGeom prst="line">
             <a:avLst/>
           </a:prstGeom>
-          <a:ln w="13970">
-            <a:solidFill>
-              <a:srgbClr val="0A7D6E"/>
+          <a:ln w="10160">
+            <a:solidFill>
+              <a:srgbClr val="A1CDC7"/>
             </a:solidFill>
           </a:ln>
           <a:effectLst/>
@@ -8634,7 +9658,7 @@
       </p:cxnSp>
       <p:cxnSp>
         <p:nvCxnSpPr>
-          <p:cNvPr id="142" name="Connector 141"/>
+          <p:cNvPr id="166" name="Connector 165"/>
           <p:cNvCxnSpPr/>
           <p:nvPr/>
         </p:nvCxnSpPr>
@@ -8646,9 +9670,9 @@
           <a:prstGeom prst="line">
             <a:avLst/>
           </a:prstGeom>
-          <a:ln w="13970">
-            <a:solidFill>
-              <a:srgbClr val="0A7D6E"/>
+          <a:ln w="10160">
+            <a:solidFill>
+              <a:srgbClr val="A1CDC7"/>
             </a:solidFill>
           </a:ln>
           <a:effectLst/>
@@ -8670,7 +9694,7 @@
       </p:cxnSp>
       <p:cxnSp>
         <p:nvCxnSpPr>
-          <p:cNvPr id="143" name="Connector 142"/>
+          <p:cNvPr id="167" name="Connector 166"/>
           <p:cNvCxnSpPr/>
           <p:nvPr/>
         </p:nvCxnSpPr>
@@ -8682,9 +9706,9 @@
           <a:prstGeom prst="line">
             <a:avLst/>
           </a:prstGeom>
-          <a:ln w="13970">
-            <a:solidFill>
-              <a:srgbClr val="0A7D6E"/>
+          <a:ln w="10160">
+            <a:solidFill>
+              <a:srgbClr val="A1CDC7"/>
             </a:solidFill>
           </a:ln>
           <a:effectLst/>
@@ -8706,7 +9730,7 @@
       </p:cxnSp>
       <p:cxnSp>
         <p:nvCxnSpPr>
-          <p:cNvPr id="144" name="Connector 143"/>
+          <p:cNvPr id="168" name="Connector 167"/>
           <p:cNvCxnSpPr/>
           <p:nvPr/>
         </p:nvCxnSpPr>
@@ -8718,9 +9742,9 @@
           <a:prstGeom prst="line">
             <a:avLst/>
           </a:prstGeom>
-          <a:ln w="13970">
-            <a:solidFill>
-              <a:srgbClr val="0A7D6E"/>
+          <a:ln w="10160">
+            <a:solidFill>
+              <a:srgbClr val="A1CDC7"/>
             </a:solidFill>
           </a:ln>
           <a:effectLst/>
@@ -8742,7 +9766,7 @@
       </p:cxnSp>
       <p:cxnSp>
         <p:nvCxnSpPr>
-          <p:cNvPr id="145" name="Connector 144"/>
+          <p:cNvPr id="169" name="Connector 168"/>
           <p:cNvCxnSpPr/>
           <p:nvPr/>
         </p:nvCxnSpPr>
@@ -8754,9 +9778,9 @@
           <a:prstGeom prst="line">
             <a:avLst/>
           </a:prstGeom>
-          <a:ln w="13970">
-            <a:solidFill>
-              <a:srgbClr val="0A7D6E"/>
+          <a:ln w="10160">
+            <a:solidFill>
+              <a:srgbClr val="A1CDC7"/>
             </a:solidFill>
           </a:ln>
           <a:effectLst/>
@@ -8778,7 +9802,7 @@
       </p:cxnSp>
       <p:cxnSp>
         <p:nvCxnSpPr>
-          <p:cNvPr id="146" name="Connector 145"/>
+          <p:cNvPr id="170" name="Connector 169"/>
           <p:cNvCxnSpPr/>
           <p:nvPr/>
         </p:nvCxnSpPr>
@@ -8790,7 +9814,46 @@
           <a:prstGeom prst="line">
             <a:avLst/>
           </a:prstGeom>
-          <a:ln w="13970">
+          <a:ln w="10160">
+            <a:solidFill>
+              <a:srgbClr val="A1CDC7"/>
+            </a:solidFill>
+          </a:ln>
+          <a:effectLst/>
+        </p:spPr>
+        <p:style>
+          <a:lnRef idx="2">
+            <a:schemeClr val="accent1"/>
+          </a:lnRef>
+          <a:fillRef idx="0">
+            <a:schemeClr val="accent1"/>
+          </a:fillRef>
+          <a:effectRef idx="1">
+            <a:schemeClr val="accent1"/>
+          </a:effectRef>
+          <a:fontRef idx="minor">
+            <a:schemeClr val="tx1"/>
+          </a:fontRef>
+        </p:style>
+      </p:cxnSp>
+      <p:sp>
+        <p:nvSpPr>
+          <p:cNvPr id="171" name="Rectangle 170"/>
+          <p:cNvSpPr/>
+          <p:nvPr/>
+        </p:nvSpPr>
+        <p:spPr>
+          <a:xfrm>
+            <a:off x="932688" y="2717110"/>
+            <a:ext cx="91440" cy="74711"/>
+          </a:xfrm>
+          <a:prstGeom prst="rect">
+            <a:avLst/>
+          </a:prstGeom>
+          <a:solidFill>
+            <a:srgbClr val="A1CDC7"/>
+          </a:solidFill>
+          <a:ln w="7620">
             <a:solidFill>
               <a:srgbClr val="0A7D6E"/>
             </a:solidFill>
@@ -8798,30 +9861,175 @@
           <a:effectLst/>
         </p:spPr>
         <p:style>
-          <a:lnRef idx="2">
-            <a:schemeClr val="accent1"/>
-          </a:lnRef>
-          <a:fillRef idx="0">
-            <a:schemeClr val="accent1"/>
-          </a:fillRef>
-          <a:effectRef idx="1">
-            <a:schemeClr val="accent1"/>
-          </a:effectRef>
-          <a:fontRef idx="minor">
-            <a:schemeClr val="tx1"/>
-          </a:fontRef>
-        </p:style>
-      </p:cxnSp>
-      <p:sp>
-        <p:nvSpPr>
-          <p:cNvPr id="147" name="Oval 146"/>
+          <a:lnRef idx="1">
+            <a:schemeClr val="accent1"/>
+          </a:lnRef>
+          <a:fillRef idx="3">
+            <a:schemeClr val="accent1"/>
+          </a:fillRef>
+          <a:effectRef idx="2">
+            <a:schemeClr val="accent1"/>
+          </a:effectRef>
+          <a:fontRef idx="minor">
+            <a:schemeClr val="lt1"/>
+          </a:fontRef>
+        </p:style>
+        <p:txBody>
+          <a:bodyPr rtlCol="0" anchor="ctr"/>
+          <a:lstStyle/>
+          <a:p>
+            <a:pPr algn="ctr"/>
+          </a:p>
+        </p:txBody>
+      </p:sp>
+      <p:sp>
+        <p:nvSpPr>
+          <p:cNvPr id="172" name="Rectangle 171"/>
           <p:cNvSpPr/>
           <p:nvPr/>
         </p:nvSpPr>
         <p:spPr>
           <a:xfrm>
-            <a:off x="1044848" y="2774061"/>
-            <a:ext cx="50000" cy="50000"/>
+            <a:off x="2788920" y="2925771"/>
+            <a:ext cx="91440" cy="155262"/>
+          </a:xfrm>
+          <a:prstGeom prst="rect">
+            <a:avLst/>
+          </a:prstGeom>
+          <a:solidFill>
+            <a:srgbClr val="A1CDC7"/>
+          </a:solidFill>
+          <a:ln w="7620">
+            <a:solidFill>
+              <a:srgbClr val="0A7D6E"/>
+            </a:solidFill>
+          </a:ln>
+          <a:effectLst/>
+        </p:spPr>
+        <p:style>
+          <a:lnRef idx="1">
+            <a:schemeClr val="accent1"/>
+          </a:lnRef>
+          <a:fillRef idx="3">
+            <a:schemeClr val="accent1"/>
+          </a:fillRef>
+          <a:effectRef idx="2">
+            <a:schemeClr val="accent1"/>
+          </a:effectRef>
+          <a:fontRef idx="minor">
+            <a:schemeClr val="lt1"/>
+          </a:fontRef>
+        </p:style>
+        <p:txBody>
+          <a:bodyPr rtlCol="0" anchor="ctr"/>
+          <a:lstStyle/>
+          <a:p>
+            <a:pPr algn="ctr"/>
+          </a:p>
+        </p:txBody>
+      </p:sp>
+      <p:sp>
+        <p:nvSpPr>
+          <p:cNvPr id="173" name="Rectangle 172"/>
+          <p:cNvSpPr/>
+          <p:nvPr/>
+        </p:nvSpPr>
+        <p:spPr>
+          <a:xfrm>
+            <a:off x="1115568" y="2777795"/>
+            <a:ext cx="91440" cy="97554"/>
+          </a:xfrm>
+          <a:prstGeom prst="rect">
+            <a:avLst/>
+          </a:prstGeom>
+          <a:solidFill>
+            <a:srgbClr val="E8B5A9"/>
+          </a:solidFill>
+          <a:ln w="7620">
+            <a:solidFill>
+              <a:srgbClr val="C53E1F"/>
+            </a:solidFill>
+          </a:ln>
+          <a:effectLst/>
+        </p:spPr>
+        <p:style>
+          <a:lnRef idx="1">
+            <a:schemeClr val="accent1"/>
+          </a:lnRef>
+          <a:fillRef idx="3">
+            <a:schemeClr val="accent1"/>
+          </a:fillRef>
+          <a:effectRef idx="2">
+            <a:schemeClr val="accent1"/>
+          </a:effectRef>
+          <a:fontRef idx="minor">
+            <a:schemeClr val="lt1"/>
+          </a:fontRef>
+        </p:style>
+        <p:txBody>
+          <a:bodyPr rtlCol="0" anchor="ctr"/>
+          <a:lstStyle/>
+          <a:p>
+            <a:pPr algn="ctr"/>
+          </a:p>
+        </p:txBody>
+      </p:sp>
+      <p:sp>
+        <p:nvSpPr>
+          <p:cNvPr id="174" name="Rectangle 173"/>
+          <p:cNvSpPr/>
+          <p:nvPr/>
+        </p:nvSpPr>
+        <p:spPr>
+          <a:xfrm>
+            <a:off x="2971800" y="2953574"/>
+            <a:ext cx="91440" cy="173639"/>
+          </a:xfrm>
+          <a:prstGeom prst="rect">
+            <a:avLst/>
+          </a:prstGeom>
+          <a:solidFill>
+            <a:srgbClr val="E8B5A9"/>
+          </a:solidFill>
+          <a:ln w="7620">
+            <a:solidFill>
+              <a:srgbClr val="C53E1F"/>
+            </a:solidFill>
+          </a:ln>
+          <a:effectLst/>
+        </p:spPr>
+        <p:style>
+          <a:lnRef idx="1">
+            <a:schemeClr val="accent1"/>
+          </a:lnRef>
+          <a:fillRef idx="3">
+            <a:schemeClr val="accent1"/>
+          </a:fillRef>
+          <a:effectRef idx="2">
+            <a:schemeClr val="accent1"/>
+          </a:effectRef>
+          <a:fontRef idx="minor">
+            <a:schemeClr val="lt1"/>
+          </a:fontRef>
+        </p:style>
+        <p:txBody>
+          <a:bodyPr rtlCol="0" anchor="ctr"/>
+          <a:lstStyle/>
+          <a:p>
+            <a:pPr algn="ctr"/>
+          </a:p>
+        </p:txBody>
+      </p:sp>
+      <p:sp>
+        <p:nvSpPr>
+          <p:cNvPr id="175" name="Oval 174"/>
+          <p:cNvSpPr/>
+          <p:nvPr/>
+        </p:nvSpPr>
+        <p:spPr>
+          <a:xfrm>
+            <a:off x="1047848" y="2777061"/>
+            <a:ext cx="44000" cy="44000"/>
           </a:xfrm>
           <a:prstGeom prst="ellipse">
             <a:avLst/>
@@ -8829,7 +10037,7 @@
           <a:solidFill>
             <a:srgbClr val="FFFFFF"/>
           </a:solidFill>
-          <a:ln w="12700">
+          <a:ln w="11430">
             <a:solidFill>
               <a:srgbClr val="C53E1F"/>
             </a:solidFill>
@@ -8860,14 +10068,14 @@
       </p:sp>
       <p:sp>
         <p:nvSpPr>
-          <p:cNvPr id="148" name="Oval 147"/>
+          <p:cNvPr id="176" name="Oval 175"/>
           <p:cNvSpPr/>
           <p:nvPr/>
         </p:nvSpPr>
         <p:spPr>
           <a:xfrm>
-            <a:off x="2901080" y="2926628"/>
-            <a:ext cx="50000" cy="50000"/>
+            <a:off x="2904080" y="2929628"/>
+            <a:ext cx="44000" cy="44000"/>
           </a:xfrm>
           <a:prstGeom prst="ellipse">
             <a:avLst/>
@@ -8875,7 +10083,7 @@
           <a:solidFill>
             <a:srgbClr val="FFFFFF"/>
           </a:solidFill>
-          <a:ln w="12700">
+          <a:ln w="11430">
             <a:solidFill>
               <a:srgbClr val="C53E1F"/>
             </a:solidFill>
@@ -8906,14 +10114,14 @@
       </p:sp>
       <p:sp>
         <p:nvSpPr>
-          <p:cNvPr id="149" name="Oval 148"/>
+          <p:cNvPr id="177" name="Oval 176"/>
           <p:cNvSpPr/>
           <p:nvPr/>
         </p:nvSpPr>
         <p:spPr>
           <a:xfrm>
-            <a:off x="1044848" y="2745627"/>
-            <a:ext cx="50000" cy="50000"/>
+            <a:off x="1047848" y="2748627"/>
+            <a:ext cx="44000" cy="44000"/>
           </a:xfrm>
           <a:prstGeom prst="ellipse">
             <a:avLst/>
@@ -8921,7 +10129,7 @@
           <a:solidFill>
             <a:srgbClr val="FFFFFF"/>
           </a:solidFill>
-          <a:ln w="12700">
+          <a:ln w="11430">
             <a:solidFill>
               <a:srgbClr val="C53E1F"/>
             </a:solidFill>
@@ -8952,14 +10160,14 @@
       </p:sp>
       <p:sp>
         <p:nvSpPr>
-          <p:cNvPr id="150" name="Oval 149"/>
+          <p:cNvPr id="178" name="Oval 177"/>
           <p:cNvSpPr/>
           <p:nvPr/>
         </p:nvSpPr>
         <p:spPr>
           <a:xfrm>
-            <a:off x="2901080" y="2897269"/>
-            <a:ext cx="50000" cy="50000"/>
+            <a:off x="2904080" y="2900269"/>
+            <a:ext cx="44000" cy="44000"/>
           </a:xfrm>
           <a:prstGeom prst="ellipse">
             <a:avLst/>
@@ -8967,7 +10175,7 @@
           <a:solidFill>
             <a:srgbClr val="FFFFFF"/>
           </a:solidFill>
-          <a:ln w="12700">
+          <a:ln w="11430">
             <a:solidFill>
               <a:srgbClr val="C53E1F"/>
             </a:solidFill>
@@ -8998,14 +10206,14 @@
       </p:sp>
       <p:sp>
         <p:nvSpPr>
-          <p:cNvPr id="151" name="Oval 150"/>
+          <p:cNvPr id="179" name="Oval 178"/>
           <p:cNvSpPr/>
           <p:nvPr/>
         </p:nvSpPr>
         <p:spPr>
           <a:xfrm>
-            <a:off x="1044848" y="2873610"/>
-            <a:ext cx="50000" cy="50000"/>
+            <a:off x="1047848" y="2876610"/>
+            <a:ext cx="44000" cy="44000"/>
           </a:xfrm>
           <a:prstGeom prst="ellipse">
             <a:avLst/>
@@ -9013,7 +10221,7 @@
           <a:solidFill>
             <a:srgbClr val="FFFFFF"/>
           </a:solidFill>
-          <a:ln w="12700">
+          <a:ln w="11430">
             <a:solidFill>
               <a:srgbClr val="C53E1F"/>
             </a:solidFill>
@@ -9044,14 +10252,14 @@
       </p:sp>
       <p:sp>
         <p:nvSpPr>
-          <p:cNvPr id="152" name="Oval 151"/>
+          <p:cNvPr id="180" name="Oval 179"/>
           <p:cNvSpPr/>
           <p:nvPr/>
         </p:nvSpPr>
         <p:spPr>
           <a:xfrm>
-            <a:off x="2901080" y="2962778"/>
-            <a:ext cx="50000" cy="50000"/>
+            <a:off x="2904080" y="2965778"/>
+            <a:ext cx="44000" cy="44000"/>
           </a:xfrm>
           <a:prstGeom prst="ellipse">
             <a:avLst/>
@@ -9059,7 +10267,7 @@
           <a:solidFill>
             <a:srgbClr val="FFFFFF"/>
           </a:solidFill>
-          <a:ln w="12700">
+          <a:ln w="11430">
             <a:solidFill>
               <a:srgbClr val="C53E1F"/>
             </a:solidFill>
@@ -9090,14 +10298,14 @@
       </p:sp>
       <p:sp>
         <p:nvSpPr>
-          <p:cNvPr id="153" name="Oval 152"/>
+          <p:cNvPr id="181" name="Oval 180"/>
           <p:cNvSpPr/>
           <p:nvPr/>
         </p:nvSpPr>
         <p:spPr>
           <a:xfrm>
-            <a:off x="1044848" y="2745706"/>
-            <a:ext cx="50000" cy="50000"/>
+            <a:off x="1047848" y="2748706"/>
+            <a:ext cx="44000" cy="44000"/>
           </a:xfrm>
           <a:prstGeom prst="ellipse">
             <a:avLst/>
@@ -9105,7 +10313,7 @@
           <a:solidFill>
             <a:srgbClr val="FFFFFF"/>
           </a:solidFill>
-          <a:ln w="12700">
+          <a:ln w="11430">
             <a:solidFill>
               <a:srgbClr val="C53E1F"/>
             </a:solidFill>
@@ -9136,14 +10344,14 @@
       </p:sp>
       <p:sp>
         <p:nvSpPr>
-          <p:cNvPr id="154" name="Oval 153"/>
+          <p:cNvPr id="182" name="Oval 181"/>
           <p:cNvSpPr/>
           <p:nvPr/>
         </p:nvSpPr>
         <p:spPr>
           <a:xfrm>
-            <a:off x="2901080" y="3327978"/>
-            <a:ext cx="50000" cy="50000"/>
+            <a:off x="2904080" y="3330978"/>
+            <a:ext cx="44000" cy="44000"/>
           </a:xfrm>
           <a:prstGeom prst="ellipse">
             <a:avLst/>
@@ -9151,7 +10359,7 @@
           <a:solidFill>
             <a:srgbClr val="FFFFFF"/>
           </a:solidFill>
-          <a:ln w="12700">
+          <a:ln w="11430">
             <a:solidFill>
               <a:srgbClr val="C53E1F"/>
             </a:solidFill>
@@ -9182,14 +10390,14 @@
       </p:sp>
       <p:sp>
         <p:nvSpPr>
-          <p:cNvPr id="155" name="Oval 154"/>
+          <p:cNvPr id="183" name="Oval 182"/>
           <p:cNvSpPr/>
           <p:nvPr/>
         </p:nvSpPr>
         <p:spPr>
           <a:xfrm>
-            <a:off x="1044848" y="2780566"/>
-            <a:ext cx="50000" cy="50000"/>
+            <a:off x="1047848" y="2783566"/>
+            <a:ext cx="44000" cy="44000"/>
           </a:xfrm>
           <a:prstGeom prst="ellipse">
             <a:avLst/>
@@ -9197,7 +10405,7 @@
           <a:solidFill>
             <a:srgbClr val="FFFFFF"/>
           </a:solidFill>
-          <a:ln w="12700">
+          <a:ln w="11430">
             <a:solidFill>
               <a:srgbClr val="C53E1F"/>
             </a:solidFill>
@@ -9228,14 +10436,14 @@
       </p:sp>
       <p:sp>
         <p:nvSpPr>
-          <p:cNvPr id="156" name="Oval 155"/>
+          <p:cNvPr id="184" name="Oval 183"/>
           <p:cNvSpPr/>
           <p:nvPr/>
         </p:nvSpPr>
         <p:spPr>
           <a:xfrm>
-            <a:off x="2901080" y="3148691"/>
-            <a:ext cx="50000" cy="50000"/>
+            <a:off x="2904080" y="3151691"/>
+            <a:ext cx="44000" cy="44000"/>
           </a:xfrm>
           <a:prstGeom prst="ellipse">
             <a:avLst/>
@@ -9243,7 +10451,7 @@
           <a:solidFill>
             <a:srgbClr val="FFFFFF"/>
           </a:solidFill>
-          <a:ln w="12700">
+          <a:ln w="11430">
             <a:solidFill>
               <a:srgbClr val="C53E1F"/>
             </a:solidFill>
@@ -9274,14 +10482,14 @@
       </p:sp>
       <p:sp>
         <p:nvSpPr>
-          <p:cNvPr id="157" name="Oval 156"/>
+          <p:cNvPr id="185" name="Oval 184"/>
           <p:cNvSpPr/>
           <p:nvPr/>
         </p:nvSpPr>
         <p:spPr>
           <a:xfrm>
-            <a:off x="1044848" y="3107314"/>
-            <a:ext cx="50000" cy="50000"/>
+            <a:off x="1047848" y="3110314"/>
+            <a:ext cx="44000" cy="44000"/>
           </a:xfrm>
           <a:prstGeom prst="ellipse">
             <a:avLst/>
@@ -9289,7 +10497,7 @@
           <a:solidFill>
             <a:srgbClr val="FFFFFF"/>
           </a:solidFill>
-          <a:ln w="12700">
+          <a:ln w="11430">
             <a:solidFill>
               <a:srgbClr val="C53E1F"/>
             </a:solidFill>
@@ -9320,14 +10528,14 @@
       </p:sp>
       <p:sp>
         <p:nvSpPr>
-          <p:cNvPr id="158" name="Oval 157"/>
+          <p:cNvPr id="186" name="Oval 185"/>
           <p:cNvSpPr/>
           <p:nvPr/>
         </p:nvSpPr>
         <p:spPr>
           <a:xfrm>
-            <a:off x="2901080" y="2934413"/>
-            <a:ext cx="50000" cy="50000"/>
+            <a:off x="2904080" y="2937413"/>
+            <a:ext cx="44000" cy="44000"/>
           </a:xfrm>
           <a:prstGeom prst="ellipse">
             <a:avLst/>
@@ -9335,7 +10543,7 @@
           <a:solidFill>
             <a:srgbClr val="FFFFFF"/>
           </a:solidFill>
-          <a:ln w="12700">
+          <a:ln w="11430">
             <a:solidFill>
               <a:srgbClr val="C53E1F"/>
             </a:solidFill>
@@ -9366,14 +10574,14 @@
       </p:sp>
       <p:sp>
         <p:nvSpPr>
-          <p:cNvPr id="159" name="Oval 158"/>
+          <p:cNvPr id="187" name="Oval 186"/>
           <p:cNvSpPr/>
           <p:nvPr/>
         </p:nvSpPr>
         <p:spPr>
           <a:xfrm>
-            <a:off x="1044848" y="2670182"/>
-            <a:ext cx="50000" cy="50000"/>
+            <a:off x="1047848" y="2673182"/>
+            <a:ext cx="44000" cy="44000"/>
           </a:xfrm>
           <a:prstGeom prst="ellipse">
             <a:avLst/>
@@ -9381,7 +10589,7 @@
           <a:solidFill>
             <a:srgbClr val="FFFFFF"/>
           </a:solidFill>
-          <a:ln w="12700">
+          <a:ln w="11430">
             <a:solidFill>
               <a:srgbClr val="0A7D6E"/>
             </a:solidFill>
@@ -9412,14 +10620,14 @@
       </p:sp>
       <p:sp>
         <p:nvSpPr>
-          <p:cNvPr id="160" name="Oval 159"/>
+          <p:cNvPr id="188" name="Oval 187"/>
           <p:cNvSpPr/>
           <p:nvPr/>
         </p:nvSpPr>
         <p:spPr>
           <a:xfrm>
-            <a:off x="2901080" y="2991723"/>
-            <a:ext cx="50000" cy="50000"/>
+            <a:off x="2904080" y="2994723"/>
+            <a:ext cx="44000" cy="44000"/>
           </a:xfrm>
           <a:prstGeom prst="ellipse">
             <a:avLst/>
@@ -9427,7 +10635,7 @@
           <a:solidFill>
             <a:srgbClr val="FFFFFF"/>
           </a:solidFill>
-          <a:ln w="12700">
+          <a:ln w="11430">
             <a:solidFill>
               <a:srgbClr val="0A7D6E"/>
             </a:solidFill>
@@ -9458,14 +10666,14 @@
       </p:sp>
       <p:sp>
         <p:nvSpPr>
-          <p:cNvPr id="161" name="Oval 160"/>
+          <p:cNvPr id="189" name="Oval 188"/>
           <p:cNvSpPr/>
           <p:nvPr/>
         </p:nvSpPr>
         <p:spPr>
           <a:xfrm>
-            <a:off x="1044848" y="2695796"/>
-            <a:ext cx="50000" cy="50000"/>
+            <a:off x="1047848" y="2698796"/>
+            <a:ext cx="44000" cy="44000"/>
           </a:xfrm>
           <a:prstGeom prst="ellipse">
             <a:avLst/>
@@ -9473,7 +10681,7 @@
           <a:solidFill>
             <a:srgbClr val="FFFFFF"/>
           </a:solidFill>
-          <a:ln w="12700">
+          <a:ln w="11430">
             <a:solidFill>
               <a:srgbClr val="0A7D6E"/>
             </a:solidFill>
@@ -9504,14 +10712,14 @@
       </p:sp>
       <p:sp>
         <p:nvSpPr>
-          <p:cNvPr id="162" name="Oval 161"/>
+          <p:cNvPr id="190" name="Oval 189"/>
           <p:cNvSpPr/>
           <p:nvPr/>
         </p:nvSpPr>
         <p:spPr>
           <a:xfrm>
-            <a:off x="2901080" y="2887539"/>
-            <a:ext cx="50000" cy="50000"/>
+            <a:off x="2904080" y="2890539"/>
+            <a:ext cx="44000" cy="44000"/>
           </a:xfrm>
           <a:prstGeom prst="ellipse">
             <a:avLst/>
@@ -9519,7 +10727,7 @@
           <a:solidFill>
             <a:srgbClr val="FFFFFF"/>
           </a:solidFill>
-          <a:ln w="12700">
+          <a:ln w="11430">
             <a:solidFill>
               <a:srgbClr val="0A7D6E"/>
             </a:solidFill>
@@ -9550,14 +10758,14 @@
       </p:sp>
       <p:sp>
         <p:nvSpPr>
-          <p:cNvPr id="163" name="Oval 162"/>
+          <p:cNvPr id="191" name="Oval 190"/>
           <p:cNvSpPr/>
           <p:nvPr/>
         </p:nvSpPr>
         <p:spPr>
           <a:xfrm>
-            <a:off x="1044848" y="2690881"/>
-            <a:ext cx="50000" cy="50000"/>
+            <a:off x="1047848" y="2693881"/>
+            <a:ext cx="44000" cy="44000"/>
           </a:xfrm>
           <a:prstGeom prst="ellipse">
             <a:avLst/>
@@ -9565,7 +10773,7 @@
           <a:solidFill>
             <a:srgbClr val="FFFFFF"/>
           </a:solidFill>
-          <a:ln w="12700">
+          <a:ln w="11430">
             <a:solidFill>
               <a:srgbClr val="0A7D6E"/>
             </a:solidFill>
@@ -9596,14 +10804,14 @@
       </p:sp>
       <p:sp>
         <p:nvSpPr>
-          <p:cNvPr id="164" name="Oval 163"/>
+          <p:cNvPr id="192" name="Oval 191"/>
           <p:cNvSpPr/>
           <p:nvPr/>
         </p:nvSpPr>
         <p:spPr>
           <a:xfrm>
-            <a:off x="2901080" y="3077469"/>
-            <a:ext cx="50000" cy="50000"/>
+            <a:off x="2904080" y="3080469"/>
+            <a:ext cx="44000" cy="44000"/>
           </a:xfrm>
           <a:prstGeom prst="ellipse">
             <a:avLst/>
@@ -9611,7 +10819,7 @@
           <a:solidFill>
             <a:srgbClr val="FFFFFF"/>
           </a:solidFill>
-          <a:ln w="12700">
+          <a:ln w="11430">
             <a:solidFill>
               <a:srgbClr val="0A7D6E"/>
             </a:solidFill>
@@ -9642,14 +10850,14 @@
       </p:sp>
       <p:sp>
         <p:nvSpPr>
-          <p:cNvPr id="165" name="Oval 164"/>
+          <p:cNvPr id="193" name="Oval 192"/>
           <p:cNvSpPr/>
           <p:nvPr/>
         </p:nvSpPr>
         <p:spPr>
           <a:xfrm>
-            <a:off x="1044848" y="2932836"/>
-            <a:ext cx="50000" cy="50000"/>
+            <a:off x="1047848" y="2935836"/>
+            <a:ext cx="44000" cy="44000"/>
           </a:xfrm>
           <a:prstGeom prst="ellipse">
             <a:avLst/>
@@ -9657,7 +10865,7 @@
           <a:solidFill>
             <a:srgbClr val="FFFFFF"/>
           </a:solidFill>
-          <a:ln w="12700">
+          <a:ln w="11430">
             <a:solidFill>
               <a:srgbClr val="0A7D6E"/>
             </a:solidFill>
@@ -9688,14 +10896,14 @@
       </p:sp>
       <p:sp>
         <p:nvSpPr>
-          <p:cNvPr id="166" name="Oval 165"/>
+          <p:cNvPr id="194" name="Oval 193"/>
           <p:cNvSpPr/>
           <p:nvPr/>
         </p:nvSpPr>
         <p:spPr>
           <a:xfrm>
-            <a:off x="2901080" y="2940467"/>
-            <a:ext cx="50000" cy="50000"/>
+            <a:off x="2904080" y="2943467"/>
+            <a:ext cx="44000" cy="44000"/>
           </a:xfrm>
           <a:prstGeom prst="ellipse">
             <a:avLst/>
@@ -9703,7 +10911,7 @@
           <a:solidFill>
             <a:srgbClr val="FFFFFF"/>
           </a:solidFill>
-          <a:ln w="12700">
+          <a:ln w="11430">
             <a:solidFill>
               <a:srgbClr val="0A7D6E"/>
             </a:solidFill>
@@ -9734,14 +10942,14 @@
       </p:sp>
       <p:sp>
         <p:nvSpPr>
-          <p:cNvPr id="167" name="Oval 166"/>
+          <p:cNvPr id="195" name="Oval 194"/>
           <p:cNvSpPr/>
           <p:nvPr/>
         </p:nvSpPr>
         <p:spPr>
           <a:xfrm>
-            <a:off x="1044848" y="2731458"/>
-            <a:ext cx="50000" cy="50000"/>
+            <a:off x="1047848" y="2734458"/>
+            <a:ext cx="44000" cy="44000"/>
           </a:xfrm>
           <a:prstGeom prst="ellipse">
             <a:avLst/>
@@ -9749,7 +10957,7 @@
           <a:solidFill>
             <a:srgbClr val="FFFFFF"/>
           </a:solidFill>
-          <a:ln w="12700">
+          <a:ln w="11430">
             <a:solidFill>
               <a:srgbClr val="0A7D6E"/>
             </a:solidFill>
@@ -9780,14 +10988,14 @@
       </p:sp>
       <p:sp>
         <p:nvSpPr>
-          <p:cNvPr id="168" name="Oval 167"/>
+          <p:cNvPr id="196" name="Oval 195"/>
           <p:cNvSpPr/>
           <p:nvPr/>
         </p:nvSpPr>
         <p:spPr>
           <a:xfrm>
-            <a:off x="2901080" y="3106087"/>
-            <a:ext cx="50000" cy="50000"/>
+            <a:off x="2904080" y="3109087"/>
+            <a:ext cx="44000" cy="44000"/>
           </a:xfrm>
           <a:prstGeom prst="ellipse">
             <a:avLst/>
@@ -9795,7 +11003,7 @@
           <a:solidFill>
             <a:srgbClr val="FFFFFF"/>
           </a:solidFill>
-          <a:ln w="12700">
+          <a:ln w="11430">
             <a:solidFill>
               <a:srgbClr val="0A7D6E"/>
             </a:solidFill>
@@ -9826,14 +11034,14 @@
       </p:sp>
       <p:sp>
         <p:nvSpPr>
-          <p:cNvPr id="169" name="Oval 168"/>
+          <p:cNvPr id="197" name="Oval 196"/>
           <p:cNvSpPr/>
           <p:nvPr/>
         </p:nvSpPr>
         <p:spPr>
           <a:xfrm>
-            <a:off x="1044848" y="2778609"/>
-            <a:ext cx="50000" cy="50000"/>
+            <a:off x="1047848" y="2781609"/>
+            <a:ext cx="44000" cy="44000"/>
           </a:xfrm>
           <a:prstGeom prst="ellipse">
             <a:avLst/>
@@ -9841,7 +11049,7 @@
           <a:solidFill>
             <a:srgbClr val="FFFFFF"/>
           </a:solidFill>
-          <a:ln w="12700">
+          <a:ln w="11430">
             <a:solidFill>
               <a:srgbClr val="0A7D6E"/>
             </a:solidFill>
@@ -9872,14 +11080,14 @@
       </p:sp>
       <p:sp>
         <p:nvSpPr>
-          <p:cNvPr id="170" name="Oval 169"/>
+          <p:cNvPr id="198" name="Oval 197"/>
           <p:cNvSpPr/>
           <p:nvPr/>
         </p:nvSpPr>
         <p:spPr>
           <a:xfrm>
-            <a:off x="2901080" y="2771134"/>
-            <a:ext cx="50000" cy="50000"/>
+            <a:off x="2904080" y="2774134"/>
+            <a:ext cx="44000" cy="44000"/>
           </a:xfrm>
           <a:prstGeom prst="ellipse">
             <a:avLst/>
@@ -9887,7 +11095,7 @@
           <a:solidFill>
             <a:srgbClr val="FFFFFF"/>
           </a:solidFill>
-          <a:ln w="12700">
+          <a:ln w="11430">
             <a:solidFill>
               <a:srgbClr val="0A7D6E"/>
             </a:solidFill>
@@ -9916,16 +11124,272 @@
           </a:p>
         </p:txBody>
       </p:sp>
-      <p:sp>
-        <p:nvSpPr>
-          <p:cNvPr id="171" name="Rectangle 170"/>
+      <p:cxnSp>
+        <p:nvCxnSpPr>
+          <p:cNvPr id="199" name="Connector 198"/>
+          <p:cNvCxnSpPr/>
+          <p:nvPr/>
+        </p:nvCxnSpPr>
+        <p:spPr>
+          <a:xfrm>
+            <a:off x="978408" y="2738627"/>
+            <a:ext cx="1856232" cy="252468"/>
+          </a:xfrm>
+          <a:prstGeom prst="line">
+            <a:avLst/>
+          </a:prstGeom>
+          <a:ln w="27940">
+            <a:solidFill>
+              <a:srgbClr val="0A7D6E"/>
+            </a:solidFill>
+          </a:ln>
+          <a:effectLst/>
+        </p:spPr>
+        <p:style>
+          <a:lnRef idx="2">
+            <a:schemeClr val="accent1"/>
+          </a:lnRef>
+          <a:fillRef idx="0">
+            <a:schemeClr val="accent1"/>
+          </a:fillRef>
+          <a:effectRef idx="1">
+            <a:schemeClr val="accent1"/>
+          </a:effectRef>
+          <a:fontRef idx="minor">
+            <a:schemeClr val="tx1"/>
+          </a:fontRef>
+        </p:style>
+      </p:cxnSp>
+      <p:sp>
+        <p:nvSpPr>
+          <p:cNvPr id="200" name="Diamond 199"/>
           <p:cNvSpPr/>
           <p:nvPr/>
         </p:nvSpPr>
         <p:spPr>
           <a:xfrm>
-            <a:off x="1115568" y="2459736"/>
-            <a:ext cx="1188720" cy="420624"/>
+            <a:off x="936408" y="2696627"/>
+            <a:ext cx="84000" cy="84000"/>
+          </a:xfrm>
+          <a:prstGeom prst="diamond">
+            <a:avLst/>
+          </a:prstGeom>
+          <a:solidFill>
+            <a:srgbClr val="0A7D6E"/>
+          </a:solidFill>
+          <a:ln w="15240">
+            <a:solidFill>
+              <a:srgbClr val="FFFFFF"/>
+            </a:solidFill>
+          </a:ln>
+          <a:effectLst/>
+        </p:spPr>
+        <p:style>
+          <a:lnRef idx="1">
+            <a:schemeClr val="accent1"/>
+          </a:lnRef>
+          <a:fillRef idx="3">
+            <a:schemeClr val="accent1"/>
+          </a:fillRef>
+          <a:effectRef idx="2">
+            <a:schemeClr val="accent1"/>
+          </a:effectRef>
+          <a:fontRef idx="minor">
+            <a:schemeClr val="lt1"/>
+          </a:fontRef>
+        </p:style>
+        <p:txBody>
+          <a:bodyPr rtlCol="0" anchor="ctr"/>
+          <a:lstStyle/>
+          <a:p>
+            <a:pPr algn="ctr"/>
+          </a:p>
+        </p:txBody>
+      </p:sp>
+      <p:sp>
+        <p:nvSpPr>
+          <p:cNvPr id="201" name="Diamond 200"/>
+          <p:cNvSpPr/>
+          <p:nvPr/>
+        </p:nvSpPr>
+        <p:spPr>
+          <a:xfrm>
+            <a:off x="2792640" y="2949095"/>
+            <a:ext cx="84000" cy="84000"/>
+          </a:xfrm>
+          <a:prstGeom prst="diamond">
+            <a:avLst/>
+          </a:prstGeom>
+          <a:solidFill>
+            <a:srgbClr val="0A7D6E"/>
+          </a:solidFill>
+          <a:ln w="15240">
+            <a:solidFill>
+              <a:srgbClr val="FFFFFF"/>
+            </a:solidFill>
+          </a:ln>
+          <a:effectLst/>
+        </p:spPr>
+        <p:style>
+          <a:lnRef idx="1">
+            <a:schemeClr val="accent1"/>
+          </a:lnRef>
+          <a:fillRef idx="3">
+            <a:schemeClr val="accent1"/>
+          </a:fillRef>
+          <a:effectRef idx="2">
+            <a:schemeClr val="accent1"/>
+          </a:effectRef>
+          <a:fontRef idx="minor">
+            <a:schemeClr val="lt1"/>
+          </a:fontRef>
+        </p:style>
+        <p:txBody>
+          <a:bodyPr rtlCol="0" anchor="ctr"/>
+          <a:lstStyle/>
+          <a:p>
+            <a:pPr algn="ctr"/>
+          </a:p>
+        </p:txBody>
+      </p:sp>
+      <p:cxnSp>
+        <p:nvCxnSpPr>
+          <p:cNvPr id="202" name="Connector 201"/>
+          <p:cNvCxnSpPr/>
+          <p:nvPr/>
+        </p:nvCxnSpPr>
+        <p:spPr>
+          <a:xfrm>
+            <a:off x="1161288" y="2802314"/>
+            <a:ext cx="1856232" cy="171282"/>
+          </a:xfrm>
+          <a:prstGeom prst="line">
+            <a:avLst/>
+          </a:prstGeom>
+          <a:ln w="27940">
+            <a:solidFill>
+              <a:srgbClr val="C53E1F"/>
+            </a:solidFill>
+          </a:ln>
+          <a:effectLst/>
+        </p:spPr>
+        <p:style>
+          <a:lnRef idx="2">
+            <a:schemeClr val="accent1"/>
+          </a:lnRef>
+          <a:fillRef idx="0">
+            <a:schemeClr val="accent1"/>
+          </a:fillRef>
+          <a:effectRef idx="1">
+            <a:schemeClr val="accent1"/>
+          </a:effectRef>
+          <a:fontRef idx="minor">
+            <a:schemeClr val="tx1"/>
+          </a:fontRef>
+        </p:style>
+      </p:cxnSp>
+      <p:sp>
+        <p:nvSpPr>
+          <p:cNvPr id="203" name="Diamond 202"/>
+          <p:cNvSpPr/>
+          <p:nvPr/>
+        </p:nvSpPr>
+        <p:spPr>
+          <a:xfrm>
+            <a:off x="1119288" y="2760314"/>
+            <a:ext cx="84000" cy="84000"/>
+          </a:xfrm>
+          <a:prstGeom prst="diamond">
+            <a:avLst/>
+          </a:prstGeom>
+          <a:solidFill>
+            <a:srgbClr val="C53E1F"/>
+          </a:solidFill>
+          <a:ln w="15240">
+            <a:solidFill>
+              <a:srgbClr val="FFFFFF"/>
+            </a:solidFill>
+          </a:ln>
+          <a:effectLst/>
+        </p:spPr>
+        <p:style>
+          <a:lnRef idx="1">
+            <a:schemeClr val="accent1"/>
+          </a:lnRef>
+          <a:fillRef idx="3">
+            <a:schemeClr val="accent1"/>
+          </a:fillRef>
+          <a:effectRef idx="2">
+            <a:schemeClr val="accent1"/>
+          </a:effectRef>
+          <a:fontRef idx="minor">
+            <a:schemeClr val="lt1"/>
+          </a:fontRef>
+        </p:style>
+        <p:txBody>
+          <a:bodyPr rtlCol="0" anchor="ctr"/>
+          <a:lstStyle/>
+          <a:p>
+            <a:pPr algn="ctr"/>
+          </a:p>
+        </p:txBody>
+      </p:sp>
+      <p:sp>
+        <p:nvSpPr>
+          <p:cNvPr id="204" name="Diamond 203"/>
+          <p:cNvSpPr/>
+          <p:nvPr/>
+        </p:nvSpPr>
+        <p:spPr>
+          <a:xfrm>
+            <a:off x="2975520" y="2931596"/>
+            <a:ext cx="84000" cy="84000"/>
+          </a:xfrm>
+          <a:prstGeom prst="diamond">
+            <a:avLst/>
+          </a:prstGeom>
+          <a:solidFill>
+            <a:srgbClr val="C53E1F"/>
+          </a:solidFill>
+          <a:ln w="15240">
+            <a:solidFill>
+              <a:srgbClr val="FFFFFF"/>
+            </a:solidFill>
+          </a:ln>
+          <a:effectLst/>
+        </p:spPr>
+        <p:style>
+          <a:lnRef idx="1">
+            <a:schemeClr val="accent1"/>
+          </a:lnRef>
+          <a:fillRef idx="3">
+            <a:schemeClr val="accent1"/>
+          </a:fillRef>
+          <a:effectRef idx="2">
+            <a:schemeClr val="accent1"/>
+          </a:effectRef>
+          <a:fontRef idx="minor">
+            <a:schemeClr val="lt1"/>
+          </a:fontRef>
+        </p:style>
+        <p:txBody>
+          <a:bodyPr rtlCol="0" anchor="ctr"/>
+          <a:lstStyle/>
+          <a:p>
+            <a:pPr algn="ctr"/>
+          </a:p>
+        </p:txBody>
+      </p:sp>
+      <p:sp>
+        <p:nvSpPr>
+          <p:cNvPr id="205" name="Rectangle 204"/>
+          <p:cNvSpPr/>
+          <p:nvPr/>
+        </p:nvSpPr>
+        <p:spPr>
+          <a:xfrm>
+            <a:off x="1115568" y="2450592"/>
+            <a:ext cx="1234440" cy="530352"/>
           </a:xfrm>
           <a:prstGeom prst="rect">
             <a:avLst/>
@@ -9964,14 +11428,14 @@
       </p:sp>
       <p:sp>
         <p:nvSpPr>
-          <p:cNvPr id="172" name="TextBox 171"/>
+          <p:cNvPr id="206" name="TextBox 205"/>
           <p:cNvSpPr txBox="1"/>
           <p:nvPr/>
         </p:nvSpPr>
         <p:spPr>
           <a:xfrm>
-            <a:off x="1152144" y="2459736"/>
-            <a:ext cx="1115568" cy="164592"/>
+            <a:off x="1152144" y="2458592"/>
+            <a:ext cx="1161288" cy="146304"/>
           </a:xfrm>
           <a:prstGeom prst="rect">
             <a:avLst/>
@@ -10000,14 +11464,14 @@
       </p:sp>
       <p:sp>
         <p:nvSpPr>
-          <p:cNvPr id="173" name="TextBox 172"/>
+          <p:cNvPr id="207" name="TextBox 206"/>
           <p:cNvSpPr txBox="1"/>
           <p:nvPr/>
         </p:nvSpPr>
         <p:spPr>
           <a:xfrm>
-            <a:off x="1152144" y="2642616"/>
-            <a:ext cx="1115568" cy="164592"/>
+            <a:off x="1152144" y="2615184"/>
+            <a:ext cx="1161288" cy="146304"/>
           </a:xfrm>
           <a:prstGeom prst="rect">
             <a:avLst/>
@@ -10034,9 +11498,81 @@
           </a:p>
         </p:txBody>
       </p:sp>
+      <p:sp>
+        <p:nvSpPr>
+          <p:cNvPr id="208" name="TextBox 207"/>
+          <p:cNvSpPr txBox="1"/>
+          <p:nvPr/>
+        </p:nvSpPr>
+        <p:spPr>
+          <a:xfrm>
+            <a:off x="1152144" y="2779776"/>
+            <a:ext cx="1161288" cy="146304"/>
+          </a:xfrm>
+          <a:prstGeom prst="rect">
+            <a:avLst/>
+          </a:prstGeom>
+          <a:noFill/>
+          <a:effectLst/>
+        </p:spPr>
+        <p:txBody>
+          <a:bodyPr wrap="square" lIns="0" rIns="0" tIns="0" bIns="0" anchor="t">
+            <a:spAutoFit/>
+          </a:bodyPr>
+          <a:lstStyle/>
+          <a:p>
+            <a:pPr algn="l"/>
+            <a:r>
+              <a:rPr sz="600" b="0">
+                <a:solidFill>
+                  <a:srgbClr val="222222"/>
+                </a:solidFill>
+                <a:latin typeface="Arial"/>
+              </a:rPr>
+              <a:t>MW Δ (good vs bad) P = 0.82</a:t>
+            </a:r>
+          </a:p>
+        </p:txBody>
+      </p:sp>
+      <p:sp>
+        <p:nvSpPr>
+          <p:cNvPr id="209" name="TextBox 208"/>
+          <p:cNvSpPr txBox="1"/>
+          <p:nvPr/>
+        </p:nvSpPr>
+        <p:spPr>
+          <a:xfrm>
+            <a:off x="2670048" y="2468880"/>
+            <a:ext cx="237744" cy="182880"/>
+          </a:xfrm>
+          <a:prstGeom prst="rect">
+            <a:avLst/>
+          </a:prstGeom>
+          <a:noFill/>
+          <a:effectLst/>
+        </p:spPr>
+        <p:txBody>
+          <a:bodyPr wrap="square" lIns="0" rIns="0" tIns="0" bIns="0" anchor="ctr">
+            <a:spAutoFit/>
+          </a:bodyPr>
+          <a:lstStyle/>
+          <a:p>
+            <a:pPr algn="ctr"/>
+            <a:r>
+              <a:rPr sz="700" b="1">
+                <a:solidFill>
+                  <a:srgbClr val="666666"/>
+                </a:solidFill>
+                <a:latin typeface="Arial"/>
+              </a:rPr>
+              <a:t>pred ↓</a:t>
+            </a:r>
+          </a:p>
+        </p:txBody>
+      </p:sp>
       <p:cxnSp>
         <p:nvCxnSpPr>
-          <p:cNvPr id="174" name="Connector 173"/>
+          <p:cNvPr id="210" name="Connector 209"/>
           <p:cNvCxnSpPr/>
           <p:nvPr/>
         </p:nvCxnSpPr>
@@ -10072,7 +11608,7 @@
       </p:cxnSp>
       <p:cxnSp>
         <p:nvCxnSpPr>
-          <p:cNvPr id="175" name="Connector 174"/>
+          <p:cNvPr id="211" name="Connector 210"/>
           <p:cNvCxnSpPr/>
           <p:nvPr/>
         </p:nvCxnSpPr>
@@ -10108,7 +11644,7 @@
       </p:cxnSp>
       <p:cxnSp>
         <p:nvCxnSpPr>
-          <p:cNvPr id="176" name="Connector 175"/>
+          <p:cNvPr id="212" name="Connector 211"/>
           <p:cNvCxnSpPr/>
           <p:nvPr/>
         </p:nvCxnSpPr>
@@ -10144,7 +11680,7 @@
       </p:cxnSp>
       <p:sp>
         <p:nvSpPr>
-          <p:cNvPr id="177" name="TextBox 176"/>
+          <p:cNvPr id="213" name="TextBox 212"/>
           <p:cNvSpPr txBox="1"/>
           <p:nvPr/>
         </p:nvSpPr>
@@ -10180,7 +11716,7 @@
       </p:sp>
       <p:cxnSp>
         <p:nvCxnSpPr>
-          <p:cNvPr id="178" name="Connector 177"/>
+          <p:cNvPr id="214" name="Connector 213"/>
           <p:cNvCxnSpPr/>
           <p:nvPr/>
         </p:nvCxnSpPr>
@@ -10216,7 +11752,7 @@
       </p:cxnSp>
       <p:sp>
         <p:nvSpPr>
-          <p:cNvPr id="179" name="TextBox 178"/>
+          <p:cNvPr id="215" name="TextBox 214"/>
           <p:cNvSpPr txBox="1"/>
           <p:nvPr/>
         </p:nvSpPr>
@@ -10252,7 +11788,7 @@
       </p:sp>
       <p:cxnSp>
         <p:nvCxnSpPr>
-          <p:cNvPr id="180" name="Connector 179"/>
+          <p:cNvPr id="216" name="Connector 215"/>
           <p:cNvCxnSpPr/>
           <p:nvPr/>
         </p:nvCxnSpPr>
@@ -10288,7 +11824,7 @@
       </p:cxnSp>
       <p:sp>
         <p:nvSpPr>
-          <p:cNvPr id="181" name="TextBox 180"/>
+          <p:cNvPr id="217" name="TextBox 216"/>
           <p:cNvSpPr txBox="1"/>
           <p:nvPr/>
         </p:nvSpPr>
@@ -10324,7 +11860,7 @@
       </p:sp>
       <p:cxnSp>
         <p:nvCxnSpPr>
-          <p:cNvPr id="182" name="Connector 181"/>
+          <p:cNvPr id="218" name="Connector 217"/>
           <p:cNvCxnSpPr/>
           <p:nvPr/>
         </p:nvCxnSpPr>
@@ -10360,7 +11896,7 @@
       </p:cxnSp>
       <p:sp>
         <p:nvSpPr>
-          <p:cNvPr id="183" name="TextBox 182"/>
+          <p:cNvPr id="219" name="TextBox 218"/>
           <p:cNvSpPr txBox="1"/>
           <p:nvPr/>
         </p:nvSpPr>
@@ -10396,7 +11932,7 @@
       </p:sp>
       <p:cxnSp>
         <p:nvCxnSpPr>
-          <p:cNvPr id="184" name="Connector 183"/>
+          <p:cNvPr id="220" name="Connector 219"/>
           <p:cNvCxnSpPr/>
           <p:nvPr/>
         </p:nvCxnSpPr>
@@ -10432,7 +11968,7 @@
       </p:cxnSp>
       <p:sp>
         <p:nvSpPr>
-          <p:cNvPr id="185" name="TextBox 184"/>
+          <p:cNvPr id="221" name="TextBox 220"/>
           <p:cNvSpPr txBox="1"/>
           <p:nvPr/>
         </p:nvSpPr>
@@ -10468,7 +12004,7 @@
       </p:sp>
       <p:cxnSp>
         <p:nvCxnSpPr>
-          <p:cNvPr id="186" name="Connector 185"/>
+          <p:cNvPr id="222" name="Connector 221"/>
           <p:cNvCxnSpPr/>
           <p:nvPr/>
         </p:nvCxnSpPr>
@@ -10504,7 +12040,7 @@
       </p:cxnSp>
       <p:sp>
         <p:nvSpPr>
-          <p:cNvPr id="187" name="TextBox 186"/>
+          <p:cNvPr id="223" name="TextBox 222"/>
           <p:cNvSpPr txBox="1"/>
           <p:nvPr/>
         </p:nvSpPr>
@@ -10540,7 +12076,7 @@
       </p:sp>
       <p:cxnSp>
         <p:nvCxnSpPr>
-          <p:cNvPr id="188" name="Connector 187"/>
+          <p:cNvPr id="224" name="Connector 223"/>
           <p:cNvCxnSpPr/>
           <p:nvPr/>
         </p:nvCxnSpPr>
@@ -10576,7 +12112,7 @@
       </p:cxnSp>
       <p:sp>
         <p:nvSpPr>
-          <p:cNvPr id="189" name="TextBox 188"/>
+          <p:cNvPr id="225" name="TextBox 224"/>
           <p:cNvSpPr txBox="1"/>
           <p:nvPr/>
         </p:nvSpPr>
@@ -10612,7 +12148,7 @@
       </p:sp>
       <p:cxnSp>
         <p:nvCxnSpPr>
-          <p:cNvPr id="190" name="Connector 189"/>
+          <p:cNvPr id="226" name="Connector 225"/>
           <p:cNvCxnSpPr/>
           <p:nvPr/>
         </p:nvCxnSpPr>
@@ -10649,7 +12185,7 @@
       </p:cxnSp>
       <p:sp>
         <p:nvSpPr>
-          <p:cNvPr id="191" name="TextBox 190"/>
+          <p:cNvPr id="227" name="TextBox 226"/>
           <p:cNvSpPr txBox="1"/>
           <p:nvPr/>
         </p:nvSpPr>
@@ -10685,7 +12221,7 @@
       </p:sp>
       <p:cxnSp>
         <p:nvCxnSpPr>
-          <p:cNvPr id="192" name="Connector 191"/>
+          <p:cNvPr id="228" name="Connector 227"/>
           <p:cNvCxnSpPr/>
           <p:nvPr/>
         </p:nvCxnSpPr>
@@ -10697,9 +12233,9 @@
           <a:prstGeom prst="line">
             <a:avLst/>
           </a:prstGeom>
-          <a:ln w="13970">
-            <a:solidFill>
-              <a:srgbClr val="C53E1F"/>
+          <a:ln w="10160">
+            <a:solidFill>
+              <a:srgbClr val="E8B5A9"/>
             </a:solidFill>
           </a:ln>
           <a:effectLst/>
@@ -10721,7 +12257,7 @@
       </p:cxnSp>
       <p:cxnSp>
         <p:nvCxnSpPr>
-          <p:cNvPr id="193" name="Connector 192"/>
+          <p:cNvPr id="229" name="Connector 228"/>
           <p:cNvCxnSpPr/>
           <p:nvPr/>
         </p:nvCxnSpPr>
@@ -10733,9 +12269,9 @@
           <a:prstGeom prst="line">
             <a:avLst/>
           </a:prstGeom>
-          <a:ln w="13970">
-            <a:solidFill>
-              <a:srgbClr val="C53E1F"/>
+          <a:ln w="10160">
+            <a:solidFill>
+              <a:srgbClr val="E8B5A9"/>
             </a:solidFill>
           </a:ln>
           <a:effectLst/>
@@ -10757,7 +12293,7 @@
       </p:cxnSp>
       <p:cxnSp>
         <p:nvCxnSpPr>
-          <p:cNvPr id="194" name="Connector 193"/>
+          <p:cNvPr id="230" name="Connector 229"/>
           <p:cNvCxnSpPr/>
           <p:nvPr/>
         </p:nvCxnSpPr>
@@ -10769,9 +12305,9 @@
           <a:prstGeom prst="line">
             <a:avLst/>
           </a:prstGeom>
-          <a:ln w="13970">
-            <a:solidFill>
-              <a:srgbClr val="C53E1F"/>
+          <a:ln w="10160">
+            <a:solidFill>
+              <a:srgbClr val="E8B5A9"/>
             </a:solidFill>
           </a:ln>
           <a:effectLst/>
@@ -10793,7 +12329,7 @@
       </p:cxnSp>
       <p:cxnSp>
         <p:nvCxnSpPr>
-          <p:cNvPr id="195" name="Connector 194"/>
+          <p:cNvPr id="231" name="Connector 230"/>
           <p:cNvCxnSpPr/>
           <p:nvPr/>
         </p:nvCxnSpPr>
@@ -10805,9 +12341,9 @@
           <a:prstGeom prst="line">
             <a:avLst/>
           </a:prstGeom>
-          <a:ln w="13970">
-            <a:solidFill>
-              <a:srgbClr val="C53E1F"/>
+          <a:ln w="10160">
+            <a:solidFill>
+              <a:srgbClr val="E8B5A9"/>
             </a:solidFill>
           </a:ln>
           <a:effectLst/>
@@ -10829,7 +12365,7 @@
       </p:cxnSp>
       <p:cxnSp>
         <p:nvCxnSpPr>
-          <p:cNvPr id="196" name="Connector 195"/>
+          <p:cNvPr id="232" name="Connector 231"/>
           <p:cNvCxnSpPr/>
           <p:nvPr/>
         </p:nvCxnSpPr>
@@ -10841,9 +12377,9 @@
           <a:prstGeom prst="line">
             <a:avLst/>
           </a:prstGeom>
-          <a:ln w="13970">
-            <a:solidFill>
-              <a:srgbClr val="C53E1F"/>
+          <a:ln w="10160">
+            <a:solidFill>
+              <a:srgbClr val="E8B5A9"/>
             </a:solidFill>
           </a:ln>
           <a:effectLst/>
@@ -10865,7 +12401,7 @@
       </p:cxnSp>
       <p:cxnSp>
         <p:nvCxnSpPr>
-          <p:cNvPr id="197" name="Connector 196"/>
+          <p:cNvPr id="233" name="Connector 232"/>
           <p:cNvCxnSpPr/>
           <p:nvPr/>
         </p:nvCxnSpPr>
@@ -10877,9 +12413,9 @@
           <a:prstGeom prst="line">
             <a:avLst/>
           </a:prstGeom>
-          <a:ln w="13970">
-            <a:solidFill>
-              <a:srgbClr val="C53E1F"/>
+          <a:ln w="10160">
+            <a:solidFill>
+              <a:srgbClr val="E8B5A9"/>
             </a:solidFill>
           </a:ln>
           <a:effectLst/>
@@ -10901,7 +12437,7 @@
       </p:cxnSp>
       <p:cxnSp>
         <p:nvCxnSpPr>
-          <p:cNvPr id="198" name="Connector 197"/>
+          <p:cNvPr id="234" name="Connector 233"/>
           <p:cNvCxnSpPr/>
           <p:nvPr/>
         </p:nvCxnSpPr>
@@ -10913,9 +12449,9 @@
           <a:prstGeom prst="line">
             <a:avLst/>
           </a:prstGeom>
-          <a:ln w="13970">
-            <a:solidFill>
-              <a:srgbClr val="0A7D6E"/>
+          <a:ln w="10160">
+            <a:solidFill>
+              <a:srgbClr val="A1CDC7"/>
             </a:solidFill>
           </a:ln>
           <a:effectLst/>
@@ -10937,7 +12473,7 @@
       </p:cxnSp>
       <p:cxnSp>
         <p:nvCxnSpPr>
-          <p:cNvPr id="199" name="Connector 198"/>
+          <p:cNvPr id="235" name="Connector 234"/>
           <p:cNvCxnSpPr/>
           <p:nvPr/>
         </p:nvCxnSpPr>
@@ -10949,9 +12485,9 @@
           <a:prstGeom prst="line">
             <a:avLst/>
           </a:prstGeom>
-          <a:ln w="13970">
-            <a:solidFill>
-              <a:srgbClr val="0A7D6E"/>
+          <a:ln w="10160">
+            <a:solidFill>
+              <a:srgbClr val="A1CDC7"/>
             </a:solidFill>
           </a:ln>
           <a:effectLst/>
@@ -10973,7 +12509,7 @@
       </p:cxnSp>
       <p:cxnSp>
         <p:nvCxnSpPr>
-          <p:cNvPr id="200" name="Connector 199"/>
+          <p:cNvPr id="236" name="Connector 235"/>
           <p:cNvCxnSpPr/>
           <p:nvPr/>
         </p:nvCxnSpPr>
@@ -10985,9 +12521,9 @@
           <a:prstGeom prst="line">
             <a:avLst/>
           </a:prstGeom>
-          <a:ln w="13970">
-            <a:solidFill>
-              <a:srgbClr val="0A7D6E"/>
+          <a:ln w="10160">
+            <a:solidFill>
+              <a:srgbClr val="A1CDC7"/>
             </a:solidFill>
           </a:ln>
           <a:effectLst/>
@@ -11009,7 +12545,7 @@
       </p:cxnSp>
       <p:cxnSp>
         <p:nvCxnSpPr>
-          <p:cNvPr id="201" name="Connector 200"/>
+          <p:cNvPr id="237" name="Connector 236"/>
           <p:cNvCxnSpPr/>
           <p:nvPr/>
         </p:nvCxnSpPr>
@@ -11021,9 +12557,9 @@
           <a:prstGeom prst="line">
             <a:avLst/>
           </a:prstGeom>
-          <a:ln w="13970">
-            <a:solidFill>
-              <a:srgbClr val="0A7D6E"/>
+          <a:ln w="10160">
+            <a:solidFill>
+              <a:srgbClr val="A1CDC7"/>
             </a:solidFill>
           </a:ln>
           <a:effectLst/>
@@ -11045,7 +12581,7 @@
       </p:cxnSp>
       <p:cxnSp>
         <p:nvCxnSpPr>
-          <p:cNvPr id="202" name="Connector 201"/>
+          <p:cNvPr id="238" name="Connector 237"/>
           <p:cNvCxnSpPr/>
           <p:nvPr/>
         </p:nvCxnSpPr>
@@ -11057,9 +12593,9 @@
           <a:prstGeom prst="line">
             <a:avLst/>
           </a:prstGeom>
-          <a:ln w="13970">
-            <a:solidFill>
-              <a:srgbClr val="0A7D6E"/>
+          <a:ln w="10160">
+            <a:solidFill>
+              <a:srgbClr val="A1CDC7"/>
             </a:solidFill>
           </a:ln>
           <a:effectLst/>
@@ -11081,7 +12617,7 @@
       </p:cxnSp>
       <p:cxnSp>
         <p:nvCxnSpPr>
-          <p:cNvPr id="203" name="Connector 202"/>
+          <p:cNvPr id="239" name="Connector 238"/>
           <p:cNvCxnSpPr/>
           <p:nvPr/>
         </p:nvCxnSpPr>
@@ -11093,7 +12629,46 @@
           <a:prstGeom prst="line">
             <a:avLst/>
           </a:prstGeom>
-          <a:ln w="13970">
+          <a:ln w="10160">
+            <a:solidFill>
+              <a:srgbClr val="A1CDC7"/>
+            </a:solidFill>
+          </a:ln>
+          <a:effectLst/>
+        </p:spPr>
+        <p:style>
+          <a:lnRef idx="2">
+            <a:schemeClr val="accent1"/>
+          </a:lnRef>
+          <a:fillRef idx="0">
+            <a:schemeClr val="accent1"/>
+          </a:fillRef>
+          <a:effectRef idx="1">
+            <a:schemeClr val="accent1"/>
+          </a:effectRef>
+          <a:fontRef idx="minor">
+            <a:schemeClr val="tx1"/>
+          </a:fontRef>
+        </p:style>
+      </p:cxnSp>
+      <p:sp>
+        <p:nvSpPr>
+          <p:cNvPr id="240" name="Rectangle 239"/>
+          <p:cNvSpPr/>
+          <p:nvPr/>
+        </p:nvSpPr>
+        <p:spPr>
+          <a:xfrm>
+            <a:off x="3675888" y="2983871"/>
+            <a:ext cx="91440" cy="81562"/>
+          </a:xfrm>
+          <a:prstGeom prst="rect">
+            <a:avLst/>
+          </a:prstGeom>
+          <a:solidFill>
+            <a:srgbClr val="A1CDC7"/>
+          </a:solidFill>
+          <a:ln w="7620">
             <a:solidFill>
               <a:srgbClr val="0A7D6E"/>
             </a:solidFill>
@@ -11101,30 +12676,175 @@
           <a:effectLst/>
         </p:spPr>
         <p:style>
-          <a:lnRef idx="2">
-            <a:schemeClr val="accent1"/>
-          </a:lnRef>
-          <a:fillRef idx="0">
-            <a:schemeClr val="accent1"/>
-          </a:fillRef>
-          <a:effectRef idx="1">
-            <a:schemeClr val="accent1"/>
-          </a:effectRef>
-          <a:fontRef idx="minor">
-            <a:schemeClr val="tx1"/>
-          </a:fontRef>
-        </p:style>
-      </p:cxnSp>
-      <p:sp>
-        <p:nvSpPr>
-          <p:cNvPr id="204" name="Oval 203"/>
+          <a:lnRef idx="1">
+            <a:schemeClr val="accent1"/>
+          </a:lnRef>
+          <a:fillRef idx="3">
+            <a:schemeClr val="accent1"/>
+          </a:fillRef>
+          <a:effectRef idx="2">
+            <a:schemeClr val="accent1"/>
+          </a:effectRef>
+          <a:fontRef idx="minor">
+            <a:schemeClr val="lt1"/>
+          </a:fontRef>
+        </p:style>
+        <p:txBody>
+          <a:bodyPr rtlCol="0" anchor="ctr"/>
+          <a:lstStyle/>
+          <a:p>
+            <a:pPr algn="ctr"/>
+          </a:p>
+        </p:txBody>
+      </p:sp>
+      <p:sp>
+        <p:nvSpPr>
+          <p:cNvPr id="241" name="Rectangle 240"/>
           <p:cNvSpPr/>
           <p:nvPr/>
         </p:nvSpPr>
         <p:spPr>
           <a:xfrm>
-            <a:off x="3788048" y="3100002"/>
-            <a:ext cx="50000" cy="50000"/>
+            <a:off x="5532120" y="2613969"/>
+            <a:ext cx="91440" cy="319041"/>
+          </a:xfrm>
+          <a:prstGeom prst="rect">
+            <a:avLst/>
+          </a:prstGeom>
+          <a:solidFill>
+            <a:srgbClr val="A1CDC7"/>
+          </a:solidFill>
+          <a:ln w="7620">
+            <a:solidFill>
+              <a:srgbClr val="0A7D6E"/>
+            </a:solidFill>
+          </a:ln>
+          <a:effectLst/>
+        </p:spPr>
+        <p:style>
+          <a:lnRef idx="1">
+            <a:schemeClr val="accent1"/>
+          </a:lnRef>
+          <a:fillRef idx="3">
+            <a:schemeClr val="accent1"/>
+          </a:fillRef>
+          <a:effectRef idx="2">
+            <a:schemeClr val="accent1"/>
+          </a:effectRef>
+          <a:fontRef idx="minor">
+            <a:schemeClr val="lt1"/>
+          </a:fontRef>
+        </p:style>
+        <p:txBody>
+          <a:bodyPr rtlCol="0" anchor="ctr"/>
+          <a:lstStyle/>
+          <a:p>
+            <a:pPr algn="ctr"/>
+          </a:p>
+        </p:txBody>
+      </p:sp>
+      <p:sp>
+        <p:nvSpPr>
+          <p:cNvPr id="242" name="Rectangle 241"/>
+          <p:cNvSpPr/>
+          <p:nvPr/>
+        </p:nvSpPr>
+        <p:spPr>
+          <a:xfrm>
+            <a:off x="3858768" y="2926486"/>
+            <a:ext cx="91440" cy="80651"/>
+          </a:xfrm>
+          <a:prstGeom prst="rect">
+            <a:avLst/>
+          </a:prstGeom>
+          <a:solidFill>
+            <a:srgbClr val="E8B5A9"/>
+          </a:solidFill>
+          <a:ln w="7620">
+            <a:solidFill>
+              <a:srgbClr val="C53E1F"/>
+            </a:solidFill>
+          </a:ln>
+          <a:effectLst/>
+        </p:spPr>
+        <p:style>
+          <a:lnRef idx="1">
+            <a:schemeClr val="accent1"/>
+          </a:lnRef>
+          <a:fillRef idx="3">
+            <a:schemeClr val="accent1"/>
+          </a:fillRef>
+          <a:effectRef idx="2">
+            <a:schemeClr val="accent1"/>
+          </a:effectRef>
+          <a:fontRef idx="minor">
+            <a:schemeClr val="lt1"/>
+          </a:fontRef>
+        </p:style>
+        <p:txBody>
+          <a:bodyPr rtlCol="0" anchor="ctr"/>
+          <a:lstStyle/>
+          <a:p>
+            <a:pPr algn="ctr"/>
+          </a:p>
+        </p:txBody>
+      </p:sp>
+      <p:sp>
+        <p:nvSpPr>
+          <p:cNvPr id="243" name="Rectangle 242"/>
+          <p:cNvSpPr/>
+          <p:nvPr/>
+        </p:nvSpPr>
+        <p:spPr>
+          <a:xfrm>
+            <a:off x="5715000" y="2636276"/>
+            <a:ext cx="91440" cy="320673"/>
+          </a:xfrm>
+          <a:prstGeom prst="rect">
+            <a:avLst/>
+          </a:prstGeom>
+          <a:solidFill>
+            <a:srgbClr val="E8B5A9"/>
+          </a:solidFill>
+          <a:ln w="7620">
+            <a:solidFill>
+              <a:srgbClr val="C53E1F"/>
+            </a:solidFill>
+          </a:ln>
+          <a:effectLst/>
+        </p:spPr>
+        <p:style>
+          <a:lnRef idx="1">
+            <a:schemeClr val="accent1"/>
+          </a:lnRef>
+          <a:fillRef idx="3">
+            <a:schemeClr val="accent1"/>
+          </a:fillRef>
+          <a:effectRef idx="2">
+            <a:schemeClr val="accent1"/>
+          </a:effectRef>
+          <a:fontRef idx="minor">
+            <a:schemeClr val="lt1"/>
+          </a:fontRef>
+        </p:style>
+        <p:txBody>
+          <a:bodyPr rtlCol="0" anchor="ctr"/>
+          <a:lstStyle/>
+          <a:p>
+            <a:pPr algn="ctr"/>
+          </a:p>
+        </p:txBody>
+      </p:sp>
+      <p:sp>
+        <p:nvSpPr>
+          <p:cNvPr id="244" name="Oval 243"/>
+          <p:cNvSpPr/>
+          <p:nvPr/>
+        </p:nvSpPr>
+        <p:spPr>
+          <a:xfrm>
+            <a:off x="3791048" y="3103002"/>
+            <a:ext cx="44000" cy="44000"/>
           </a:xfrm>
           <a:prstGeom prst="ellipse">
             <a:avLst/>
@@ -11132,7 +12852,7 @@
           <a:solidFill>
             <a:srgbClr val="FFFFFF"/>
           </a:solidFill>
-          <a:ln w="12700">
+          <a:ln w="11430">
             <a:solidFill>
               <a:srgbClr val="C53E1F"/>
             </a:solidFill>
@@ -11163,14 +12883,14 @@
       </p:sp>
       <p:sp>
         <p:nvSpPr>
-          <p:cNvPr id="205" name="Oval 204"/>
+          <p:cNvPr id="245" name="Oval 244"/>
           <p:cNvSpPr/>
           <p:nvPr/>
         </p:nvSpPr>
         <p:spPr>
           <a:xfrm>
-            <a:off x="5644280" y="2961008"/>
-            <a:ext cx="50000" cy="50000"/>
+            <a:off x="5647280" y="2964008"/>
+            <a:ext cx="44000" cy="44000"/>
           </a:xfrm>
           <a:prstGeom prst="ellipse">
             <a:avLst/>
@@ -11178,7 +12898,7 @@
           <a:solidFill>
             <a:srgbClr val="FFFFFF"/>
           </a:solidFill>
-          <a:ln w="12700">
+          <a:ln w="11430">
             <a:solidFill>
               <a:srgbClr val="C53E1F"/>
             </a:solidFill>
@@ -11209,14 +12929,14 @@
       </p:sp>
       <p:sp>
         <p:nvSpPr>
-          <p:cNvPr id="206" name="Oval 205"/>
+          <p:cNvPr id="246" name="Oval 245"/>
           <p:cNvSpPr/>
           <p:nvPr/>
         </p:nvSpPr>
         <p:spPr>
           <a:xfrm>
-            <a:off x="3788048" y="2961647"/>
-            <a:ext cx="50000" cy="50000"/>
+            <a:off x="3791048" y="2964647"/>
+            <a:ext cx="44000" cy="44000"/>
           </a:xfrm>
           <a:prstGeom prst="ellipse">
             <a:avLst/>
@@ -11224,7 +12944,7 @@
           <a:solidFill>
             <a:srgbClr val="FFFFFF"/>
           </a:solidFill>
-          <a:ln w="12700">
+          <a:ln w="11430">
             <a:solidFill>
               <a:srgbClr val="C53E1F"/>
             </a:solidFill>
@@ -11255,14 +12975,14 @@
       </p:sp>
       <p:sp>
         <p:nvSpPr>
-          <p:cNvPr id="207" name="Oval 206"/>
+          <p:cNvPr id="247" name="Oval 246"/>
           <p:cNvSpPr/>
           <p:nvPr/>
         </p:nvSpPr>
         <p:spPr>
           <a:xfrm>
-            <a:off x="5644280" y="2834304"/>
-            <a:ext cx="50000" cy="50000"/>
+            <a:off x="5647280" y="2837304"/>
+            <a:ext cx="44000" cy="44000"/>
           </a:xfrm>
           <a:prstGeom prst="ellipse">
             <a:avLst/>
@@ -11270,7 +12990,7 @@
           <a:solidFill>
             <a:srgbClr val="FFFFFF"/>
           </a:solidFill>
-          <a:ln w="12700">
+          <a:ln w="11430">
             <a:solidFill>
               <a:srgbClr val="C53E1F"/>
             </a:solidFill>
@@ -11301,14 +13021,14 @@
       </p:sp>
       <p:sp>
         <p:nvSpPr>
-          <p:cNvPr id="208" name="Oval 207"/>
+          <p:cNvPr id="248" name="Oval 247"/>
           <p:cNvSpPr/>
           <p:nvPr/>
         </p:nvSpPr>
         <p:spPr>
           <a:xfrm>
-            <a:off x="3788048" y="2882152"/>
-            <a:ext cx="50000" cy="50000"/>
+            <a:off x="3791048" y="2885152"/>
+            <a:ext cx="44000" cy="44000"/>
           </a:xfrm>
           <a:prstGeom prst="ellipse">
             <a:avLst/>
@@ -11316,7 +13036,7 @@
           <a:solidFill>
             <a:srgbClr val="FFFFFF"/>
           </a:solidFill>
-          <a:ln w="12700">
+          <a:ln w="11430">
             <a:solidFill>
               <a:srgbClr val="C53E1F"/>
             </a:solidFill>
@@ -11347,14 +13067,14 @@
       </p:sp>
       <p:sp>
         <p:nvSpPr>
-          <p:cNvPr id="209" name="Oval 208"/>
+          <p:cNvPr id="249" name="Oval 248"/>
           <p:cNvSpPr/>
           <p:nvPr/>
         </p:nvSpPr>
         <p:spPr>
           <a:xfrm>
-            <a:off x="5644280" y="2536934"/>
-            <a:ext cx="50000" cy="50000"/>
+            <a:off x="5647280" y="2539934"/>
+            <a:ext cx="44000" cy="44000"/>
           </a:xfrm>
           <a:prstGeom prst="ellipse">
             <a:avLst/>
@@ -11362,7 +13082,7 @@
           <a:solidFill>
             <a:srgbClr val="FFFFFF"/>
           </a:solidFill>
-          <a:ln w="12700">
+          <a:ln w="11430">
             <a:solidFill>
               <a:srgbClr val="C53E1F"/>
             </a:solidFill>
@@ -11393,14 +13113,14 @@
       </p:sp>
       <p:sp>
         <p:nvSpPr>
-          <p:cNvPr id="210" name="Oval 209"/>
+          <p:cNvPr id="250" name="Oval 249"/>
           <p:cNvSpPr/>
           <p:nvPr/>
         </p:nvSpPr>
         <p:spPr>
           <a:xfrm>
-            <a:off x="3788048" y="2821654"/>
-            <a:ext cx="50000" cy="50000"/>
+            <a:off x="3791048" y="2824654"/>
+            <a:ext cx="44000" cy="44000"/>
           </a:xfrm>
           <a:prstGeom prst="ellipse">
             <a:avLst/>
@@ -11408,7 +13128,7 @@
           <a:solidFill>
             <a:srgbClr val="FFFFFF"/>
           </a:solidFill>
-          <a:ln w="12700">
+          <a:ln w="11430">
             <a:solidFill>
               <a:srgbClr val="C53E1F"/>
             </a:solidFill>
@@ -11439,14 +13159,14 @@
       </p:sp>
       <p:sp>
         <p:nvSpPr>
-          <p:cNvPr id="211" name="Oval 210"/>
+          <p:cNvPr id="251" name="Oval 250"/>
           <p:cNvSpPr/>
           <p:nvPr/>
         </p:nvSpPr>
         <p:spPr>
           <a:xfrm>
-            <a:off x="5644280" y="3021051"/>
-            <a:ext cx="50000" cy="50000"/>
+            <a:off x="5647280" y="3024051"/>
+            <a:ext cx="44000" cy="44000"/>
           </a:xfrm>
           <a:prstGeom prst="ellipse">
             <a:avLst/>
@@ -11454,7 +13174,7 @@
           <a:solidFill>
             <a:srgbClr val="FFFFFF"/>
           </a:solidFill>
-          <a:ln w="12700">
+          <a:ln w="11430">
             <a:solidFill>
               <a:srgbClr val="C53E1F"/>
             </a:solidFill>
@@ -11485,14 +13205,14 @@
       </p:sp>
       <p:sp>
         <p:nvSpPr>
-          <p:cNvPr id="212" name="Oval 211"/>
+          <p:cNvPr id="252" name="Oval 251"/>
           <p:cNvSpPr/>
           <p:nvPr/>
         </p:nvSpPr>
         <p:spPr>
           <a:xfrm>
-            <a:off x="3788048" y="2959485"/>
-            <a:ext cx="50000" cy="50000"/>
+            <a:off x="3791048" y="2962485"/>
+            <a:ext cx="44000" cy="44000"/>
           </a:xfrm>
           <a:prstGeom prst="ellipse">
             <a:avLst/>
@@ -11500,7 +13220,7 @@
           <a:solidFill>
             <a:srgbClr val="FFFFFF"/>
           </a:solidFill>
-          <a:ln w="12700">
+          <a:ln w="11430">
             <a:solidFill>
               <a:srgbClr val="C53E1F"/>
             </a:solidFill>
@@ -11531,14 +13251,14 @@
       </p:sp>
       <p:sp>
         <p:nvSpPr>
-          <p:cNvPr id="213" name="Oval 212"/>
+          <p:cNvPr id="253" name="Oval 252"/>
           <p:cNvSpPr/>
           <p:nvPr/>
         </p:nvSpPr>
         <p:spPr>
           <a:xfrm>
-            <a:off x="5644280" y="2844772"/>
-            <a:ext cx="50000" cy="50000"/>
+            <a:off x="5647280" y="2847772"/>
+            <a:ext cx="44000" cy="44000"/>
           </a:xfrm>
           <a:prstGeom prst="ellipse">
             <a:avLst/>
@@ -11546,7 +13266,7 @@
           <a:solidFill>
             <a:srgbClr val="FFFFFF"/>
           </a:solidFill>
-          <a:ln w="12700">
+          <a:ln w="11430">
             <a:solidFill>
               <a:srgbClr val="C53E1F"/>
             </a:solidFill>
@@ -11577,14 +13297,14 @@
       </p:sp>
       <p:sp>
         <p:nvSpPr>
-          <p:cNvPr id="214" name="Oval 213"/>
+          <p:cNvPr id="254" name="Oval 253"/>
           <p:cNvSpPr/>
           <p:nvPr/>
         </p:nvSpPr>
         <p:spPr>
           <a:xfrm>
-            <a:off x="3788048" y="2988967"/>
-            <a:ext cx="50000" cy="50000"/>
+            <a:off x="3791048" y="2991967"/>
+            <a:ext cx="44000" cy="44000"/>
           </a:xfrm>
           <a:prstGeom prst="ellipse">
             <a:avLst/>
@@ -11592,7 +13312,7 @@
           <a:solidFill>
             <a:srgbClr val="FFFFFF"/>
           </a:solidFill>
-          <a:ln w="12700">
+          <a:ln w="11430">
             <a:solidFill>
               <a:srgbClr val="C53E1F"/>
             </a:solidFill>
@@ -11623,14 +13343,14 @@
       </p:sp>
       <p:sp>
         <p:nvSpPr>
-          <p:cNvPr id="215" name="Oval 214"/>
+          <p:cNvPr id="255" name="Oval 254"/>
           <p:cNvSpPr/>
           <p:nvPr/>
         </p:nvSpPr>
         <p:spPr>
           <a:xfrm>
-            <a:off x="5644280" y="2523795"/>
-            <a:ext cx="50000" cy="50000"/>
+            <a:off x="5647280" y="2526795"/>
+            <a:ext cx="44000" cy="44000"/>
           </a:xfrm>
           <a:prstGeom prst="ellipse">
             <a:avLst/>
@@ -11638,7 +13358,7 @@
           <a:solidFill>
             <a:srgbClr val="FFFFFF"/>
           </a:solidFill>
-          <a:ln w="12700">
+          <a:ln w="11430">
             <a:solidFill>
               <a:srgbClr val="C53E1F"/>
             </a:solidFill>
@@ -11669,14 +13389,14 @@
       </p:sp>
       <p:sp>
         <p:nvSpPr>
-          <p:cNvPr id="216" name="Oval 215"/>
+          <p:cNvPr id="256" name="Oval 255"/>
           <p:cNvSpPr/>
           <p:nvPr/>
         </p:nvSpPr>
         <p:spPr>
           <a:xfrm>
-            <a:off x="3788048" y="2904161"/>
-            <a:ext cx="50000" cy="50000"/>
+            <a:off x="3791048" y="2907161"/>
+            <a:ext cx="44000" cy="44000"/>
           </a:xfrm>
           <a:prstGeom prst="ellipse">
             <a:avLst/>
@@ -11684,7 +13404,7 @@
           <a:solidFill>
             <a:srgbClr val="FFFFFF"/>
           </a:solidFill>
-          <a:ln w="12700">
+          <a:ln w="11430">
             <a:solidFill>
               <a:srgbClr val="0A7D6E"/>
             </a:solidFill>
@@ -11715,14 +13435,14 @@
       </p:sp>
       <p:sp>
         <p:nvSpPr>
-          <p:cNvPr id="217" name="Oval 216"/>
+          <p:cNvPr id="257" name="Oval 256"/>
           <p:cNvSpPr/>
           <p:nvPr/>
         </p:nvSpPr>
         <p:spPr>
           <a:xfrm>
-            <a:off x="5644280" y="2592271"/>
-            <a:ext cx="50000" cy="50000"/>
+            <a:off x="5647280" y="2595271"/>
+            <a:ext cx="44000" cy="44000"/>
           </a:xfrm>
           <a:prstGeom prst="ellipse">
             <a:avLst/>
@@ -11730,7 +13450,7 @@
           <a:solidFill>
             <a:srgbClr val="FFFFFF"/>
           </a:solidFill>
-          <a:ln w="12700">
+          <a:ln w="11430">
             <a:solidFill>
               <a:srgbClr val="0A7D6E"/>
             </a:solidFill>
@@ -11761,14 +13481,14 @@
       </p:sp>
       <p:sp>
         <p:nvSpPr>
-          <p:cNvPr id="218" name="Oval 217"/>
+          <p:cNvPr id="258" name="Oval 257"/>
           <p:cNvSpPr/>
           <p:nvPr/>
         </p:nvSpPr>
         <p:spPr>
           <a:xfrm>
-            <a:off x="3788048" y="3028235"/>
-            <a:ext cx="50000" cy="50000"/>
+            <a:off x="3791048" y="3031235"/>
+            <a:ext cx="44000" cy="44000"/>
           </a:xfrm>
           <a:prstGeom prst="ellipse">
             <a:avLst/>
@@ -11776,7 +13496,7 @@
           <a:solidFill>
             <a:srgbClr val="FFFFFF"/>
           </a:solidFill>
-          <a:ln w="12700">
+          <a:ln w="11430">
             <a:solidFill>
               <a:srgbClr val="0A7D6E"/>
             </a:solidFill>
@@ -11807,14 +13527,14 @@
       </p:sp>
       <p:sp>
         <p:nvSpPr>
-          <p:cNvPr id="219" name="Oval 218"/>
+          <p:cNvPr id="259" name="Oval 258"/>
           <p:cNvSpPr/>
           <p:nvPr/>
         </p:nvSpPr>
         <p:spPr>
           <a:xfrm>
-            <a:off x="5644280" y="2923589"/>
-            <a:ext cx="50000" cy="50000"/>
+            <a:off x="5647280" y="2926589"/>
+            <a:ext cx="44000" cy="44000"/>
           </a:xfrm>
           <a:prstGeom prst="ellipse">
             <a:avLst/>
@@ -11822,7 +13542,7 @@
           <a:solidFill>
             <a:srgbClr val="FFFFFF"/>
           </a:solidFill>
-          <a:ln w="12700">
+          <a:ln w="11430">
             <a:solidFill>
               <a:srgbClr val="0A7D6E"/>
             </a:solidFill>
@@ -11853,14 +13573,14 @@
       </p:sp>
       <p:sp>
         <p:nvSpPr>
-          <p:cNvPr id="220" name="Oval 219"/>
+          <p:cNvPr id="260" name="Oval 259"/>
           <p:cNvSpPr/>
           <p:nvPr/>
         </p:nvSpPr>
         <p:spPr>
           <a:xfrm>
-            <a:off x="3788048" y="3044499"/>
-            <a:ext cx="50000" cy="50000"/>
+            <a:off x="3791048" y="3047499"/>
+            <a:ext cx="44000" cy="44000"/>
           </a:xfrm>
           <a:prstGeom prst="ellipse">
             <a:avLst/>
@@ -11868,7 +13588,7 @@
           <a:solidFill>
             <a:srgbClr val="FFFFFF"/>
           </a:solidFill>
-          <a:ln w="12700">
+          <a:ln w="11430">
             <a:solidFill>
               <a:srgbClr val="0A7D6E"/>
             </a:solidFill>
@@ -11899,14 +13619,14 @@
       </p:sp>
       <p:sp>
         <p:nvSpPr>
-          <p:cNvPr id="221" name="Oval 220"/>
+          <p:cNvPr id="261" name="Oval 260"/>
           <p:cNvSpPr/>
           <p:nvPr/>
         </p:nvSpPr>
         <p:spPr>
           <a:xfrm>
-            <a:off x="5644280" y="2951421"/>
-            <a:ext cx="50000" cy="50000"/>
+            <a:off x="5647280" y="2954421"/>
+            <a:ext cx="44000" cy="44000"/>
           </a:xfrm>
           <a:prstGeom prst="ellipse">
             <a:avLst/>
@@ -11914,7 +13634,7 @@
           <a:solidFill>
             <a:srgbClr val="FFFFFF"/>
           </a:solidFill>
-          <a:ln w="12700">
+          <a:ln w="11430">
             <a:solidFill>
               <a:srgbClr val="0A7D6E"/>
             </a:solidFill>
@@ -11945,14 +13665,14 @@
       </p:sp>
       <p:sp>
         <p:nvSpPr>
-          <p:cNvPr id="222" name="Oval 221"/>
+          <p:cNvPr id="262" name="Oval 261"/>
           <p:cNvSpPr/>
           <p:nvPr/>
         </p:nvSpPr>
         <p:spPr>
           <a:xfrm>
-            <a:off x="3788048" y="3223632"/>
-            <a:ext cx="50000" cy="50000"/>
+            <a:off x="3791048" y="3226632"/>
+            <a:ext cx="44000" cy="44000"/>
           </a:xfrm>
           <a:prstGeom prst="ellipse">
             <a:avLst/>
@@ -11960,7 +13680,7 @@
           <a:solidFill>
             <a:srgbClr val="FFFFFF"/>
           </a:solidFill>
-          <a:ln w="12700">
+          <a:ln w="11430">
             <a:solidFill>
               <a:srgbClr val="0A7D6E"/>
             </a:solidFill>
@@ -11991,14 +13711,14 @@
       </p:sp>
       <p:sp>
         <p:nvSpPr>
-          <p:cNvPr id="223" name="Oval 222"/>
+          <p:cNvPr id="263" name="Oval 262"/>
           <p:cNvSpPr/>
           <p:nvPr/>
         </p:nvSpPr>
         <p:spPr>
           <a:xfrm>
-            <a:off x="5644280" y="2587869"/>
-            <a:ext cx="50000" cy="50000"/>
+            <a:off x="5647280" y="2590869"/>
+            <a:ext cx="44000" cy="44000"/>
           </a:xfrm>
           <a:prstGeom prst="ellipse">
             <a:avLst/>
@@ -12006,7 +13726,7 @@
           <a:solidFill>
             <a:srgbClr val="FFFFFF"/>
           </a:solidFill>
-          <a:ln w="12700">
+          <a:ln w="11430">
             <a:solidFill>
               <a:srgbClr val="0A7D6E"/>
             </a:solidFill>
@@ -12037,14 +13757,14 @@
       </p:sp>
       <p:sp>
         <p:nvSpPr>
-          <p:cNvPr id="224" name="Oval 223"/>
+          <p:cNvPr id="264" name="Oval 263"/>
           <p:cNvSpPr/>
           <p:nvPr/>
         </p:nvSpPr>
         <p:spPr>
           <a:xfrm>
-            <a:off x="3788048" y="2942627"/>
-            <a:ext cx="50000" cy="50000"/>
+            <a:off x="3791048" y="2945627"/>
+            <a:ext cx="44000" cy="44000"/>
           </a:xfrm>
           <a:prstGeom prst="ellipse">
             <a:avLst/>
@@ -12052,7 +13772,7 @@
           <a:solidFill>
             <a:srgbClr val="FFFFFF"/>
           </a:solidFill>
-          <a:ln w="12700">
+          <a:ln w="11430">
             <a:solidFill>
               <a:srgbClr val="0A7D6E"/>
             </a:solidFill>
@@ -12083,14 +13803,14 @@
       </p:sp>
       <p:sp>
         <p:nvSpPr>
-          <p:cNvPr id="225" name="Oval 224"/>
+          <p:cNvPr id="265" name="Oval 264"/>
           <p:cNvSpPr/>
           <p:nvPr/>
         </p:nvSpPr>
         <p:spPr>
           <a:xfrm>
-            <a:off x="5644280" y="2512678"/>
-            <a:ext cx="50000" cy="50000"/>
+            <a:off x="5647280" y="2515678"/>
+            <a:ext cx="44000" cy="44000"/>
           </a:xfrm>
           <a:prstGeom prst="ellipse">
             <a:avLst/>
@@ -12098,7 +13818,7 @@
           <a:solidFill>
             <a:srgbClr val="FFFFFF"/>
           </a:solidFill>
-          <a:ln w="12700">
+          <a:ln w="11430">
             <a:solidFill>
               <a:srgbClr val="0A7D6E"/>
             </a:solidFill>
@@ -12129,14 +13849,14 @@
       </p:sp>
       <p:sp>
         <p:nvSpPr>
-          <p:cNvPr id="226" name="Oval 225"/>
+          <p:cNvPr id="266" name="Oval 265"/>
           <p:cNvSpPr/>
           <p:nvPr/>
         </p:nvSpPr>
         <p:spPr>
           <a:xfrm>
-            <a:off x="3788048" y="3007605"/>
-            <a:ext cx="50000" cy="50000"/>
+            <a:off x="3791048" y="3010605"/>
+            <a:ext cx="44000" cy="44000"/>
           </a:xfrm>
           <a:prstGeom prst="ellipse">
             <a:avLst/>
@@ -12144,7 +13864,7 @@
           <a:solidFill>
             <a:srgbClr val="FFFFFF"/>
           </a:solidFill>
-          <a:ln w="12700">
+          <a:ln w="11430">
             <a:solidFill>
               <a:srgbClr val="0A7D6E"/>
             </a:solidFill>
@@ -12175,14 +13895,14 @@
       </p:sp>
       <p:sp>
         <p:nvSpPr>
-          <p:cNvPr id="227" name="Oval 226"/>
+          <p:cNvPr id="267" name="Oval 266"/>
           <p:cNvSpPr/>
           <p:nvPr/>
         </p:nvSpPr>
         <p:spPr>
           <a:xfrm>
-            <a:off x="5644280" y="2861274"/>
-            <a:ext cx="50000" cy="50000"/>
+            <a:off x="5647280" y="2864274"/>
+            <a:ext cx="44000" cy="44000"/>
           </a:xfrm>
           <a:prstGeom prst="ellipse">
             <a:avLst/>
@@ -12190,7 +13910,7 @@
           <a:solidFill>
             <a:srgbClr val="FFFFFF"/>
           </a:solidFill>
-          <a:ln w="12700">
+          <a:ln w="11430">
             <a:solidFill>
               <a:srgbClr val="0A7D6E"/>
             </a:solidFill>
@@ -12219,16 +13939,272 @@
           </a:p>
         </p:txBody>
       </p:sp>
-      <p:sp>
-        <p:nvSpPr>
-          <p:cNvPr id="228" name="Rectangle 227"/>
+      <p:cxnSp>
+        <p:nvCxnSpPr>
+          <p:cNvPr id="268" name="Connector 267"/>
+          <p:cNvCxnSpPr/>
+          <p:nvPr/>
+        </p:nvCxnSpPr>
+        <p:spPr>
+          <a:xfrm flipV="1">
+            <a:off x="3721608" y="2751772"/>
+            <a:ext cx="1856232" cy="291148"/>
+          </a:xfrm>
+          <a:prstGeom prst="line">
+            <a:avLst/>
+          </a:prstGeom>
+          <a:ln w="27940">
+            <a:solidFill>
+              <a:srgbClr val="0A7D6E"/>
+            </a:solidFill>
+          </a:ln>
+          <a:effectLst/>
+        </p:spPr>
+        <p:style>
+          <a:lnRef idx="2">
+            <a:schemeClr val="accent1"/>
+          </a:lnRef>
+          <a:fillRef idx="0">
+            <a:schemeClr val="accent1"/>
+          </a:fillRef>
+          <a:effectRef idx="1">
+            <a:schemeClr val="accent1"/>
+          </a:effectRef>
+          <a:fontRef idx="minor">
+            <a:schemeClr val="tx1"/>
+          </a:fontRef>
+        </p:style>
+      </p:cxnSp>
+      <p:sp>
+        <p:nvSpPr>
+          <p:cNvPr id="269" name="Diamond 268"/>
           <p:cNvSpPr/>
           <p:nvPr/>
         </p:nvSpPr>
         <p:spPr>
           <a:xfrm>
-            <a:off x="3858768" y="2459736"/>
-            <a:ext cx="1188720" cy="420624"/>
+            <a:off x="3679608" y="3000920"/>
+            <a:ext cx="84000" cy="84000"/>
+          </a:xfrm>
+          <a:prstGeom prst="diamond">
+            <a:avLst/>
+          </a:prstGeom>
+          <a:solidFill>
+            <a:srgbClr val="0A7D6E"/>
+          </a:solidFill>
+          <a:ln w="15240">
+            <a:solidFill>
+              <a:srgbClr val="FFFFFF"/>
+            </a:solidFill>
+          </a:ln>
+          <a:effectLst/>
+        </p:spPr>
+        <p:style>
+          <a:lnRef idx="1">
+            <a:schemeClr val="accent1"/>
+          </a:lnRef>
+          <a:fillRef idx="3">
+            <a:schemeClr val="accent1"/>
+          </a:fillRef>
+          <a:effectRef idx="2">
+            <a:schemeClr val="accent1"/>
+          </a:effectRef>
+          <a:fontRef idx="minor">
+            <a:schemeClr val="lt1"/>
+          </a:fontRef>
+        </p:style>
+        <p:txBody>
+          <a:bodyPr rtlCol="0" anchor="ctr"/>
+          <a:lstStyle/>
+          <a:p>
+            <a:pPr algn="ctr"/>
+          </a:p>
+        </p:txBody>
+      </p:sp>
+      <p:sp>
+        <p:nvSpPr>
+          <p:cNvPr id="270" name="Diamond 269"/>
+          <p:cNvSpPr/>
+          <p:nvPr/>
+        </p:nvSpPr>
+        <p:spPr>
+          <a:xfrm>
+            <a:off x="5535840" y="2709772"/>
+            <a:ext cx="84000" cy="84000"/>
+          </a:xfrm>
+          <a:prstGeom prst="diamond">
+            <a:avLst/>
+          </a:prstGeom>
+          <a:solidFill>
+            <a:srgbClr val="0A7D6E"/>
+          </a:solidFill>
+          <a:ln w="15240">
+            <a:solidFill>
+              <a:srgbClr val="FFFFFF"/>
+            </a:solidFill>
+          </a:ln>
+          <a:effectLst/>
+        </p:spPr>
+        <p:style>
+          <a:lnRef idx="1">
+            <a:schemeClr val="accent1"/>
+          </a:lnRef>
+          <a:fillRef idx="3">
+            <a:schemeClr val="accent1"/>
+          </a:fillRef>
+          <a:effectRef idx="2">
+            <a:schemeClr val="accent1"/>
+          </a:effectRef>
+          <a:fontRef idx="minor">
+            <a:schemeClr val="lt1"/>
+          </a:fontRef>
+        </p:style>
+        <p:txBody>
+          <a:bodyPr rtlCol="0" anchor="ctr"/>
+          <a:lstStyle/>
+          <a:p>
+            <a:pPr algn="ctr"/>
+          </a:p>
+        </p:txBody>
+      </p:sp>
+      <p:cxnSp>
+        <p:nvCxnSpPr>
+          <p:cNvPr id="271" name="Connector 270"/>
+          <p:cNvCxnSpPr/>
+          <p:nvPr/>
+        </p:nvCxnSpPr>
+        <p:spPr>
+          <a:xfrm flipV="1">
+            <a:off x="3904488" y="2864538"/>
+            <a:ext cx="1856232" cy="121028"/>
+          </a:xfrm>
+          <a:prstGeom prst="line">
+            <a:avLst/>
+          </a:prstGeom>
+          <a:ln w="27940">
+            <a:solidFill>
+              <a:srgbClr val="C53E1F"/>
+            </a:solidFill>
+          </a:ln>
+          <a:effectLst/>
+        </p:spPr>
+        <p:style>
+          <a:lnRef idx="2">
+            <a:schemeClr val="accent1"/>
+          </a:lnRef>
+          <a:fillRef idx="0">
+            <a:schemeClr val="accent1"/>
+          </a:fillRef>
+          <a:effectRef idx="1">
+            <a:schemeClr val="accent1"/>
+          </a:effectRef>
+          <a:fontRef idx="minor">
+            <a:schemeClr val="tx1"/>
+          </a:fontRef>
+        </p:style>
+      </p:cxnSp>
+      <p:sp>
+        <p:nvSpPr>
+          <p:cNvPr id="272" name="Diamond 271"/>
+          <p:cNvSpPr/>
+          <p:nvPr/>
+        </p:nvSpPr>
+        <p:spPr>
+          <a:xfrm>
+            <a:off x="3862488" y="2943566"/>
+            <a:ext cx="84000" cy="84000"/>
+          </a:xfrm>
+          <a:prstGeom prst="diamond">
+            <a:avLst/>
+          </a:prstGeom>
+          <a:solidFill>
+            <a:srgbClr val="C53E1F"/>
+          </a:solidFill>
+          <a:ln w="15240">
+            <a:solidFill>
+              <a:srgbClr val="FFFFFF"/>
+            </a:solidFill>
+          </a:ln>
+          <a:effectLst/>
+        </p:spPr>
+        <p:style>
+          <a:lnRef idx="1">
+            <a:schemeClr val="accent1"/>
+          </a:lnRef>
+          <a:fillRef idx="3">
+            <a:schemeClr val="accent1"/>
+          </a:fillRef>
+          <a:effectRef idx="2">
+            <a:schemeClr val="accent1"/>
+          </a:effectRef>
+          <a:fontRef idx="minor">
+            <a:schemeClr val="lt1"/>
+          </a:fontRef>
+        </p:style>
+        <p:txBody>
+          <a:bodyPr rtlCol="0" anchor="ctr"/>
+          <a:lstStyle/>
+          <a:p>
+            <a:pPr algn="ctr"/>
+          </a:p>
+        </p:txBody>
+      </p:sp>
+      <p:sp>
+        <p:nvSpPr>
+          <p:cNvPr id="273" name="Diamond 272"/>
+          <p:cNvSpPr/>
+          <p:nvPr/>
+        </p:nvSpPr>
+        <p:spPr>
+          <a:xfrm>
+            <a:off x="5718720" y="2822538"/>
+            <a:ext cx="84000" cy="84000"/>
+          </a:xfrm>
+          <a:prstGeom prst="diamond">
+            <a:avLst/>
+          </a:prstGeom>
+          <a:solidFill>
+            <a:srgbClr val="C53E1F"/>
+          </a:solidFill>
+          <a:ln w="15240">
+            <a:solidFill>
+              <a:srgbClr val="FFFFFF"/>
+            </a:solidFill>
+          </a:ln>
+          <a:effectLst/>
+        </p:spPr>
+        <p:style>
+          <a:lnRef idx="1">
+            <a:schemeClr val="accent1"/>
+          </a:lnRef>
+          <a:fillRef idx="3">
+            <a:schemeClr val="accent1"/>
+          </a:fillRef>
+          <a:effectRef idx="2">
+            <a:schemeClr val="accent1"/>
+          </a:effectRef>
+          <a:fontRef idx="minor">
+            <a:schemeClr val="lt1"/>
+          </a:fontRef>
+        </p:style>
+        <p:txBody>
+          <a:bodyPr rtlCol="0" anchor="ctr"/>
+          <a:lstStyle/>
+          <a:p>
+            <a:pPr algn="ctr"/>
+          </a:p>
+        </p:txBody>
+      </p:sp>
+      <p:sp>
+        <p:nvSpPr>
+          <p:cNvPr id="274" name="Rectangle 273"/>
+          <p:cNvSpPr/>
+          <p:nvPr/>
+        </p:nvSpPr>
+        <p:spPr>
+          <a:xfrm>
+            <a:off x="3858768" y="2450592"/>
+            <a:ext cx="1234440" cy="530352"/>
           </a:xfrm>
           <a:prstGeom prst="rect">
             <a:avLst/>
@@ -12267,14 +14243,14 @@
       </p:sp>
       <p:sp>
         <p:nvSpPr>
-          <p:cNvPr id="229" name="TextBox 228"/>
+          <p:cNvPr id="275" name="TextBox 274"/>
           <p:cNvSpPr txBox="1"/>
           <p:nvPr/>
         </p:nvSpPr>
         <p:spPr>
           <a:xfrm>
-            <a:off x="3895344" y="2459736"/>
-            <a:ext cx="1115568" cy="164592"/>
+            <a:off x="3895344" y="2458592"/>
+            <a:ext cx="1161288" cy="146304"/>
           </a:xfrm>
           <a:prstGeom prst="rect">
             <a:avLst/>
@@ -12303,14 +14279,14 @@
       </p:sp>
       <p:sp>
         <p:nvSpPr>
-          <p:cNvPr id="230" name="TextBox 229"/>
+          <p:cNvPr id="276" name="TextBox 275"/>
           <p:cNvSpPr txBox="1"/>
           <p:nvPr/>
         </p:nvSpPr>
         <p:spPr>
           <a:xfrm>
-            <a:off x="3895344" y="2642616"/>
-            <a:ext cx="1115568" cy="164592"/>
+            <a:off x="3895344" y="2615184"/>
+            <a:ext cx="1161288" cy="146304"/>
           </a:xfrm>
           <a:prstGeom prst="rect">
             <a:avLst/>
@@ -12339,7 +14315,79 @@
       </p:sp>
       <p:sp>
         <p:nvSpPr>
-          <p:cNvPr id="231" name="TextBox 230"/>
+          <p:cNvPr id="277" name="TextBox 276"/>
+          <p:cNvSpPr txBox="1"/>
+          <p:nvPr/>
+        </p:nvSpPr>
+        <p:spPr>
+          <a:xfrm>
+            <a:off x="3895344" y="2779776"/>
+            <a:ext cx="1161288" cy="146304"/>
+          </a:xfrm>
+          <a:prstGeom prst="rect">
+            <a:avLst/>
+          </a:prstGeom>
+          <a:noFill/>
+          <a:effectLst/>
+        </p:spPr>
+        <p:txBody>
+          <a:bodyPr wrap="square" lIns="0" rIns="0" tIns="0" bIns="0" anchor="t">
+            <a:spAutoFit/>
+          </a:bodyPr>
+          <a:lstStyle/>
+          <a:p>
+            <a:pPr algn="l"/>
+            <a:r>
+              <a:rPr sz="600" b="0">
+                <a:solidFill>
+                  <a:srgbClr val="222222"/>
+                </a:solidFill>
+                <a:latin typeface="Arial"/>
+              </a:rPr>
+              <a:t>MW Δ (good vs bad) P = 0.70</a:t>
+            </a:r>
+          </a:p>
+        </p:txBody>
+      </p:sp>
+      <p:sp>
+        <p:nvSpPr>
+          <p:cNvPr id="278" name="TextBox 277"/>
+          <p:cNvSpPr txBox="1"/>
+          <p:nvPr/>
+        </p:nvSpPr>
+        <p:spPr>
+          <a:xfrm>
+            <a:off x="5413248" y="2468880"/>
+            <a:ext cx="237744" cy="182880"/>
+          </a:xfrm>
+          <a:prstGeom prst="rect">
+            <a:avLst/>
+          </a:prstGeom>
+          <a:noFill/>
+          <a:effectLst/>
+        </p:spPr>
+        <p:txBody>
+          <a:bodyPr wrap="square" lIns="0" rIns="0" tIns="0" bIns="0" anchor="ctr">
+            <a:spAutoFit/>
+          </a:bodyPr>
+          <a:lstStyle/>
+          <a:p>
+            <a:pPr algn="ctr"/>
+            <a:r>
+              <a:rPr sz="700" b="1">
+                <a:solidFill>
+                  <a:srgbClr val="666666"/>
+                </a:solidFill>
+                <a:latin typeface="Arial"/>
+              </a:rPr>
+              <a:t>pred ↑</a:t>
+            </a:r>
+          </a:p>
+        </p:txBody>
+      </p:sp>
+      <p:sp>
+        <p:nvSpPr>
+          <p:cNvPr id="279" name="TextBox 278"/>
           <p:cNvSpPr txBox="1"/>
           <p:nvPr/>
         </p:nvSpPr>
@@ -12375,7 +14423,7 @@
       </p:sp>
       <p:sp>
         <p:nvSpPr>
-          <p:cNvPr id="232" name="Oval 231"/>
+          <p:cNvPr id="280" name="Oval 279"/>
           <p:cNvSpPr/>
           <p:nvPr/>
         </p:nvSpPr>
@@ -12421,7 +14469,7 @@
       </p:sp>
       <p:cxnSp>
         <p:nvCxnSpPr>
-          <p:cNvPr id="233" name="Connector 232"/>
+          <p:cNvPr id="281" name="Connector 280"/>
           <p:cNvCxnSpPr/>
           <p:nvPr/>
         </p:nvCxnSpPr>
@@ -12457,7 +14505,7 @@
       </p:cxnSp>
       <p:sp>
         <p:nvSpPr>
-          <p:cNvPr id="234" name="Oval 233"/>
+          <p:cNvPr id="282" name="Oval 281"/>
           <p:cNvSpPr/>
           <p:nvPr/>
         </p:nvSpPr>
@@ -12503,7 +14551,7 @@
       </p:sp>
       <p:sp>
         <p:nvSpPr>
-          <p:cNvPr id="235" name="TextBox 234"/>
+          <p:cNvPr id="283" name="TextBox 282"/>
           <p:cNvSpPr txBox="1"/>
           <p:nvPr/>
         </p:nvSpPr>
@@ -12539,7 +14587,7 @@
       </p:sp>
       <p:sp>
         <p:nvSpPr>
-          <p:cNvPr id="236" name="Oval 235"/>
+          <p:cNvPr id="284" name="Oval 283"/>
           <p:cNvSpPr/>
           <p:nvPr/>
         </p:nvSpPr>
@@ -12585,7 +14633,7 @@
       </p:sp>
       <p:cxnSp>
         <p:nvCxnSpPr>
-          <p:cNvPr id="237" name="Connector 236"/>
+          <p:cNvPr id="285" name="Connector 284"/>
           <p:cNvCxnSpPr/>
           <p:nvPr/>
         </p:nvCxnSpPr>
@@ -12621,7 +14669,7 @@
       </p:cxnSp>
       <p:sp>
         <p:nvSpPr>
-          <p:cNvPr id="238" name="Oval 237"/>
+          <p:cNvPr id="286" name="Oval 285"/>
           <p:cNvSpPr/>
           <p:nvPr/>
         </p:nvSpPr>
@@ -12667,7 +14715,7 @@
       </p:sp>
       <p:sp>
         <p:nvSpPr>
-          <p:cNvPr id="239" name="TextBox 238"/>
+          <p:cNvPr id="287" name="TextBox 286"/>
           <p:cNvSpPr txBox="1"/>
           <p:nvPr/>
         </p:nvSpPr>
